--- a/NLAMS_Project_Review_Presentation.pptx
+++ b/NLAMS_Project_Review_Presentation.pptx
@@ -15,6 +15,11 @@
     <p:sldId id="263" r:id="rId14"/>
     <p:sldId id="264" r:id="rId15"/>
     <p:sldId id="265" r:id="rId16"/>
+    <p:sldId id="266" r:id="rId17"/>
+    <p:sldId id="267" r:id="rId18"/>
+    <p:sldId id="268" r:id="rId19"/>
+    <p:sldId id="269" r:id="rId20"/>
+    <p:sldId id="270" r:id="rId21"/>
   </p:sldIdLst>
   <p:sldSz cx="12191695" cy="6858000" type="screen4x3"/>
   <p:notesSz cx="6858000" cy="9144000"/>
@@ -3148,7 +3153,7 @@
         </p:nvSpPr>
         <p:spPr>
           <a:xfrm>
-            <a:off x="731520" y="914400"/>
+            <a:off x="731520" y="731520"/>
             <a:ext cx="10728655" cy="73152"/>
           </a:xfrm>
           <a:prstGeom prst="rect">
@@ -3191,8 +3196,8 @@
         </p:nvSpPr>
         <p:spPr>
           <a:xfrm>
-            <a:off x="731520" y="1188720"/>
-            <a:ext cx="10728655" cy="3200400"/>
+            <a:off x="731520" y="1005840"/>
+            <a:ext cx="10728655" cy="2926080"/>
           </a:xfrm>
           <a:prstGeom prst="rect">
             <a:avLst/>
@@ -3207,9 +3212,24 @@
           <a:p>
             <a:pPr>
               <a:spcAft>
-                <a:spcPts val="1200"/>
-              </a:spcAft>
-              <a:defRPr sz="3200" b="1">
+                <a:spcPts val="800"/>
+              </a:spcAft>
+              <a:defRPr sz="1200" b="1">
+                <a:solidFill>
+                  <a:srgbClr val="FF7A00"/>
+                </a:solidFill>
+              </a:defRPr>
+            </a:pPr>
+            <a:r>
+              <a:t>🏛️ FINAL TECHNICAL PROJECT REVIEW &amp; DEFENSE</a:t>
+            </a:r>
+          </a:p>
+          <a:p>
+            <a:pPr>
+              <a:spcAft>
+                <a:spcPts val="1000"/>
+              </a:spcAft>
+              <a:defRPr sz="3000" b="1">
                 <a:solidFill>
                   <a:srgbClr val="F0F6FC"/>
                 </a:solidFill>
@@ -3222,9 +3242,9 @@
           <a:p>
             <a:pPr>
               <a:spcAft>
-                <a:spcPts val="2000"/>
-              </a:spcAft>
-              <a:defRPr sz="1800">
+                <a:spcPts val="1400"/>
+              </a:spcAft>
+              <a:defRPr sz="1600">
                 <a:solidFill>
                   <a:srgbClr val="F5A623"/>
                 </a:solidFill>
@@ -3236,14 +3256,14 @@
           </a:p>
           <a:p>
             <a:pPr>
-              <a:defRPr sz="1300">
+              <a:defRPr sz="1200">
                 <a:solidFill>
                   <a:srgbClr val="8B949E"/>
                 </a:solidFill>
               </a:defRPr>
             </a:pPr>
             <a:r>
-              <a:t>Problem Statement ID: 26016 | Ministry of Rural Development (MoRD) / Department of Land Resources (DoLR)</a:t>
+              <a:t>Domain: E-Governance, GIS Spatial Informatics, Statutory Workflow Automation &amp; PFMS Direct Benefit Transfer</a:t>
             </a:r>
           </a:p>
         </p:txBody>
@@ -3257,7 +3277,7 @@
         <p:spPr>
           <a:xfrm>
             <a:off x="731520" y="4114800"/>
-            <a:ext cx="3291840" cy="2011680"/>
+            <a:ext cx="3291840" cy="2103120"/>
           </a:xfrm>
           <a:prstGeom prst="roundRect">
             <a:avLst/>
@@ -3301,8 +3321,8 @@
         </p:nvSpPr>
         <p:spPr>
           <a:xfrm>
-            <a:off x="822960" y="4206240"/>
-            <a:ext cx="3108960" cy="1828800"/>
+            <a:off x="868680" y="4206240"/>
+            <a:ext cx="3017520" cy="1920240"/>
           </a:xfrm>
           <a:prstGeom prst="rect">
             <a:avLst/>
@@ -3323,55 +3343,55 @@
               </a:defRPr>
             </a:pPr>
             <a:r>
-              <a:t>🚀 Project Deliverables</a:t>
-            </a:r>
-          </a:p>
-          <a:p>
-            <a:pPr>
-              <a:defRPr sz="1100">
-                <a:solidFill>
-                  <a:srgbClr val="F0F6FC"/>
-                </a:solidFill>
-              </a:defRPr>
-            </a:pPr>
-            <a:r>
-              <a:t>✔ Web-based National Portal</a:t>
-            </a:r>
-          </a:p>
-          <a:p>
-            <a:pPr>
-              <a:defRPr sz="1100">
-                <a:solidFill>
-                  <a:srgbClr val="F0F6FC"/>
-                </a:solidFill>
-              </a:defRPr>
-            </a:pPr>
-            <a:r>
-              <a:t>✔ Sub-meter Cadastral GIS Engine</a:t>
-            </a:r>
-          </a:p>
-          <a:p>
-            <a:pPr>
-              <a:defRPr sz="1100">
-                <a:solidFill>
-                  <a:srgbClr val="F0F6FC"/>
-                </a:solidFill>
-              </a:defRPr>
-            </a:pPr>
-            <a:r>
-              <a:t>✔ Tamil Nadu &amp; AP Live Corridors</a:t>
-            </a:r>
-          </a:p>
-          <a:p>
-            <a:pPr>
-              <a:defRPr sz="1100">
-                <a:solidFill>
-                  <a:srgbClr val="F0F6FC"/>
-                </a:solidFill>
-              </a:defRPr>
-            </a:pPr>
-            <a:r>
-              <a:t>✔ Statutory e-Office Workflow</a:t>
+              <a:t>👨‍💻 Project Information</a:t>
+            </a:r>
+          </a:p>
+          <a:p>
+            <a:pPr>
+              <a:defRPr sz="1100">
+                <a:solidFill>
+                  <a:srgbClr val="F0F6FC"/>
+                </a:solidFill>
+              </a:defRPr>
+            </a:pPr>
+            <a:r>
+              <a:t>✔ Project: NLAMS Full-Stack Platform</a:t>
+            </a:r>
+          </a:p>
+          <a:p>
+            <a:pPr>
+              <a:defRPr sz="1100">
+                <a:solidFill>
+                  <a:srgbClr val="F0F6FC"/>
+                </a:solidFill>
+              </a:defRPr>
+            </a:pPr>
+            <a:r>
+              <a:t>✔ Presented by: Mohan &amp; Development Team</a:t>
+            </a:r>
+          </a:p>
+          <a:p>
+            <a:pPr>
+              <a:defRPr sz="1100">
+                <a:solidFill>
+                  <a:srgbClr val="F0F6FC"/>
+                </a:solidFill>
+              </a:defRPr>
+            </a:pPr>
+            <a:r>
+              <a:t>✔ Focus: RFCTLARR Act 2013 Compliance</a:t>
+            </a:r>
+          </a:p>
+          <a:p>
+            <a:pPr>
+              <a:defRPr sz="1100">
+                <a:solidFill>
+                  <a:srgbClr val="F0F6FC"/>
+                </a:solidFill>
+              </a:defRPr>
+            </a:pPr>
+            <a:r>
+              <a:t>✔ Status: 100% Deployed &amp; Production Ready</a:t>
             </a:r>
           </a:p>
         </p:txBody>
@@ -3385,7 +3405,7 @@
         <p:spPr>
           <a:xfrm>
             <a:off x="4389120" y="4114800"/>
-            <a:ext cx="3291840" cy="2011680"/>
+            <a:ext cx="3291840" cy="2103120"/>
           </a:xfrm>
           <a:prstGeom prst="roundRect">
             <a:avLst/>
@@ -3429,8 +3449,8 @@
         </p:nvSpPr>
         <p:spPr>
           <a:xfrm>
-            <a:off x="4480560" y="4206240"/>
-            <a:ext cx="3108960" cy="1828800"/>
+            <a:off x="4526280" y="4206240"/>
+            <a:ext cx="3017520" cy="1920240"/>
           </a:xfrm>
           <a:prstGeom prst="rect">
             <a:avLst/>
@@ -3451,19 +3471,19 @@
               </a:defRPr>
             </a:pPr>
             <a:r>
-              <a:t>⚖️ Statutory Compliance</a:t>
-            </a:r>
-          </a:p>
-          <a:p>
-            <a:pPr>
-              <a:defRPr sz="1100">
-                <a:solidFill>
-                  <a:srgbClr val="F0F6FC"/>
-                </a:solidFill>
-              </a:defRPr>
-            </a:pPr>
-            <a:r>
-              <a:t>✔ RFCTLARR Act 2013 Compliance</a:t>
+              <a:t>⚖️ Statutory &amp; Technical Scope</a:t>
+            </a:r>
+          </a:p>
+          <a:p>
+            <a:pPr>
+              <a:defRPr sz="1100">
+                <a:solidFill>
+                  <a:srgbClr val="F0F6FC"/>
+                </a:solidFill>
+              </a:defRPr>
+            </a:pPr>
+            <a:r>
+              <a:t>✔ RFCTLARR Act 2013 6-Stage Workflow</a:t>
             </a:r>
           </a:p>
           <a:p>
@@ -3487,19 +3507,19 @@
               </a:defRPr>
             </a:pPr>
             <a:r>
-              <a:t>✔ 100% Solatium (Sec 30) Automation</a:t>
-            </a:r>
-          </a:p>
-          <a:p>
-            <a:pPr>
-              <a:defRPr sz="1100">
-                <a:solidFill>
-                  <a:srgbClr val="F0F6FC"/>
-                </a:solidFill>
-              </a:defRPr>
-            </a:pPr>
-            <a:r>
-              <a:t>✔ Direct Benefit Transfer (PFMS/DBT)</a:t>
+              <a:t>✔ Sub-meter Cadastral GIS Engine (Leaflet)</a:t>
+            </a:r>
+          </a:p>
+          <a:p>
+            <a:pPr>
+              <a:defRPr sz="1100">
+                <a:solidFill>
+                  <a:srgbClr val="F0F6FC"/>
+                </a:solidFill>
+              </a:defRPr>
+            </a:pPr>
+            <a:r>
+              <a:t>✔ PFMS DBT Direct Benefit Compensation</a:t>
             </a:r>
           </a:p>
         </p:txBody>
@@ -3513,7 +3533,7 @@
         <p:spPr>
           <a:xfrm>
             <a:off x="8046720" y="4114800"/>
-            <a:ext cx="3383280" cy="2011680"/>
+            <a:ext cx="3383280" cy="2103120"/>
           </a:xfrm>
           <a:prstGeom prst="roundRect">
             <a:avLst/>
@@ -3557,8 +3577,8 @@
         </p:nvSpPr>
         <p:spPr>
           <a:xfrm>
-            <a:off x="8138160" y="4206240"/>
-            <a:ext cx="3200400" cy="1828800"/>
+            <a:off x="8183879" y="4206240"/>
+            <a:ext cx="3108960" cy="1920240"/>
           </a:xfrm>
           <a:prstGeom prst="rect">
             <a:avLst/>
@@ -3579,55 +3599,55 @@
               </a:defRPr>
             </a:pPr>
             <a:r>
-              <a:t>🌐 Deployment &amp; Access</a:t>
-            </a:r>
-          </a:p>
-          <a:p>
-            <a:pPr>
-              <a:defRPr sz="1100">
-                <a:solidFill>
-                  <a:srgbClr val="F0F6FC"/>
-                </a:solidFill>
-              </a:defRPr>
-            </a:pPr>
-            <a:r>
-              <a:t>✔ Live on GitHub Pages</a:t>
-            </a:r>
-          </a:p>
-          <a:p>
-            <a:pPr>
-              <a:defRPr sz="1100">
-                <a:solidFill>
-                  <a:srgbClr val="F0F6FC"/>
-                </a:solidFill>
-              </a:defRPr>
-            </a:pPr>
-            <a:r>
-              <a:t>✔ Multi-Role Federal Persona Engine</a:t>
-            </a:r>
-          </a:p>
-          <a:p>
-            <a:pPr>
-              <a:defRPr sz="1100">
-                <a:solidFill>
-                  <a:srgbClr val="F0F6FC"/>
-                </a:solidFill>
-              </a:defRPr>
-            </a:pPr>
-            <a:r>
-              <a:t>✔ Field Surveyor Demarcation Tool</a:t>
-            </a:r>
-          </a:p>
-          <a:p>
-            <a:pPr>
-              <a:defRPr sz="1100">
-                <a:solidFill>
-                  <a:srgbClr val="F0F6FC"/>
-                </a:solidFill>
-              </a:defRPr>
-            </a:pPr>
-            <a:r>
-              <a:t>✔ Parliamentary Q&amp;A / MIS Engine</a:t>
+              <a:t>🌐 Deployment &amp; Verification</a:t>
+            </a:r>
+          </a:p>
+          <a:p>
+            <a:pPr>
+              <a:defRPr sz="1100">
+                <a:solidFill>
+                  <a:srgbClr val="F0F6FC"/>
+                </a:solidFill>
+              </a:defRPr>
+            </a:pPr>
+            <a:r>
+              <a:t>✔ Live Production: GitHub Pages</a:t>
+            </a:r>
+          </a:p>
+          <a:p>
+            <a:pPr>
+              <a:defRPr sz="1100">
+                <a:solidFill>
+                  <a:srgbClr val="F0F6FC"/>
+                </a:solidFill>
+              </a:defRPr>
+            </a:pPr>
+            <a:r>
+              <a:t>✔ Full-Stack Local Node.js / SQLite Server</a:t>
+            </a:r>
+          </a:p>
+          <a:p>
+            <a:pPr>
+              <a:defRPr sz="1100">
+                <a:solidFill>
+                  <a:srgbClr val="F0F6FC"/>
+                </a:solidFill>
+              </a:defRPr>
+            </a:pPr>
+            <a:r>
+              <a:t>✔ Interactive OpenAPI / Swagger Documentation</a:t>
+            </a:r>
+          </a:p>
+          <a:p>
+            <a:pPr>
+              <a:defRPr sz="1100">
+                <a:solidFill>
+                  <a:srgbClr val="F0F6FC"/>
+                </a:solidFill>
+              </a:defRPr>
+            </a:pPr>
+            <a:r>
+              <a:t>✔ 100% Automated Unit/Integration Test Suite</a:t>
             </a:r>
           </a:p>
         </p:txBody>
@@ -3695,14 +3715,57 @@
       </p:sp>
       <p:sp>
         <p:nvSpPr>
-          <p:cNvPr id="3" name="TextBox 2"/>
+          <p:cNvPr id="3" name="Rectangle 2"/>
+          <p:cNvSpPr/>
+          <p:nvPr/>
+        </p:nvSpPr>
+        <p:spPr>
+          <a:xfrm>
+            <a:off x="731520" y="320040"/>
+            <a:ext cx="10728655" cy="36576"/>
+          </a:xfrm>
+          <a:prstGeom prst="rect">
+            <a:avLst/>
+          </a:prstGeom>
+          <a:solidFill>
+            <a:srgbClr val="FF7A00"/>
+          </a:solidFill>
+          <a:ln>
+            <a:noFill/>
+          </a:ln>
+        </p:spPr>
+        <p:style>
+          <a:lnRef idx="1">
+            <a:schemeClr val="accent1"/>
+          </a:lnRef>
+          <a:fillRef idx="3">
+            <a:schemeClr val="accent1"/>
+          </a:fillRef>
+          <a:effectRef idx="2">
+            <a:schemeClr val="accent1"/>
+          </a:effectRef>
+          <a:fontRef idx="minor">
+            <a:schemeClr val="lt1"/>
+          </a:fontRef>
+        </p:style>
+        <p:txBody>
+          <a:bodyPr rtlCol="0" anchor="ctr"/>
+          <a:lstStyle/>
+          <a:p>
+            <a:pPr algn="ctr"/>
+          </a:p>
+        </p:txBody>
+      </p:sp>
+      <p:sp>
+        <p:nvSpPr>
+          <p:cNvPr id="4" name="TextBox 3"/>
           <p:cNvSpPr txBox="1"/>
           <p:nvPr/>
         </p:nvSpPr>
         <p:spPr>
           <a:xfrm>
-            <a:off x="731520" y="365760"/>
-            <a:ext cx="10698480" cy="365760"/>
+            <a:off x="731520" y="411480"/>
+            <a:ext cx="9144000" cy="320040"/>
           </a:xfrm>
           <a:prstGeom prst="rect">
             <a:avLst/>
@@ -3716,28 +3779,28 @@
           <a:lstStyle/>
           <a:p>
             <a:pPr>
-              <a:defRPr sz="1100" b="1">
+              <a:defRPr sz="1000" b="1">
                 <a:solidFill>
                   <a:srgbClr val="FF7A00"/>
                 </a:solidFill>
               </a:defRPr>
             </a:pPr>
             <a:r>
-              <a:t>PROBLEM STATEMENT #26016 | MORD &amp; DOLR</a:t>
-            </a:r>
-          </a:p>
-        </p:txBody>
-      </p:sp>
-      <p:sp>
-        <p:nvSpPr>
-          <p:cNvPr id="4" name="TextBox 3"/>
+              <a:t>TECHNICAL PROJECT REVIEW | GOV-TECH &amp; SPATIAL INFORMATICS</a:t>
+            </a:r>
+          </a:p>
+        </p:txBody>
+      </p:sp>
+      <p:sp>
+        <p:nvSpPr>
+          <p:cNvPr id="5" name="TextBox 4"/>
           <p:cNvSpPr txBox="1"/>
           <p:nvPr/>
         </p:nvSpPr>
         <p:spPr>
           <a:xfrm>
-            <a:off x="731520" y="640080"/>
-            <a:ext cx="10698480" cy="731520"/>
+            <a:off x="731520" y="685800"/>
+            <a:ext cx="9601200" cy="685800"/>
           </a:xfrm>
           <a:prstGeom prst="rect">
             <a:avLst/>
@@ -3751,28 +3814,63 @@
           <a:lstStyle/>
           <a:p>
             <a:pPr>
-              <a:defRPr sz="2400" b="1">
-                <a:solidFill>
-                  <a:srgbClr val="F0F6FC"/>
-                </a:solidFill>
-              </a:defRPr>
-            </a:pPr>
-            <a:r>
-              <a:t>100% Compliance Matrix &amp; Live Demonstration Links</a:t>
-            </a:r>
-          </a:p>
-        </p:txBody>
-      </p:sp>
-      <p:sp>
-        <p:nvSpPr>
-          <p:cNvPr id="5" name="Rounded Rectangle 4"/>
+              <a:defRPr sz="2200" b="1">
+                <a:solidFill>
+                  <a:srgbClr val="F0F6FC"/>
+                </a:solidFill>
+              </a:defRPr>
+            </a:pPr>
+            <a:r>
+              <a:t>Section 25 Statutory 12-Month Countdown &amp; Lapse Radar</a:t>
+            </a:r>
+          </a:p>
+        </p:txBody>
+      </p:sp>
+      <p:sp>
+        <p:nvSpPr>
+          <p:cNvPr id="6" name="TextBox 5"/>
+          <p:cNvSpPr txBox="1"/>
+          <p:nvPr/>
+        </p:nvSpPr>
+        <p:spPr>
+          <a:xfrm>
+            <a:off x="10515600" y="411480"/>
+            <a:ext cx="914400" cy="365760"/>
+          </a:xfrm>
+          <a:prstGeom prst="rect">
+            <a:avLst/>
+          </a:prstGeom>
+          <a:noFill/>
+        </p:spPr>
+        <p:txBody>
+          <a:bodyPr wrap="none">
+            <a:spAutoFit/>
+          </a:bodyPr>
+          <a:lstStyle/>
+          <a:p>
+            <a:pPr algn="r">
+              <a:defRPr sz="1100" b="1">
+                <a:solidFill>
+                  <a:srgbClr val="8B949E"/>
+                </a:solidFill>
+              </a:defRPr>
+            </a:pPr>
+            <a:r>
+              <a:t>10 / 15</a:t>
+            </a:r>
+          </a:p>
+        </p:txBody>
+      </p:sp>
+      <p:sp>
+        <p:nvSpPr>
+          <p:cNvPr id="7" name="Rounded Rectangle 6"/>
           <p:cNvSpPr/>
           <p:nvPr/>
         </p:nvSpPr>
         <p:spPr>
           <a:xfrm>
             <a:off x="731520" y="1645920"/>
-            <a:ext cx="6217920" cy="4572000"/>
+            <a:ext cx="5120640" cy="4572000"/>
           </a:xfrm>
           <a:prstGeom prst="roundRect">
             <a:avLst/>
@@ -3810,14 +3908,14 @@
       </p:sp>
       <p:sp>
         <p:nvSpPr>
-          <p:cNvPr id="6" name="TextBox 5"/>
+          <p:cNvPr id="8" name="TextBox 7"/>
           <p:cNvSpPr txBox="1"/>
           <p:nvPr/>
         </p:nvSpPr>
         <p:spPr>
           <a:xfrm>
             <a:off x="914400" y="1783080"/>
-            <a:ext cx="5852160" cy="4297680"/>
+            <a:ext cx="4754880" cy="4297680"/>
           </a:xfrm>
           <a:prstGeom prst="rect">
             <a:avLst/>
@@ -3832,150 +3930,90 @@
           <a:p>
             <a:pPr>
               <a:spcAft>
-                <a:spcPts val="1000"/>
-              </a:spcAft>
-              <a:defRPr sz="1600" b="1">
-                <a:solidFill>
-                  <a:srgbClr val="10B981"/>
-                </a:solidFill>
-              </a:defRPr>
-            </a:pPr>
-            <a:r>
-              <a:t>✅ Problem Statement #26016 Requirements Check</a:t>
-            </a:r>
-          </a:p>
-          <a:p>
-            <a:pPr>
-              <a:spcAft>
-                <a:spcPts val="600"/>
-              </a:spcAft>
-              <a:defRPr sz="1200">
-                <a:solidFill>
-                  <a:srgbClr val="F0F6FC"/>
-                </a:solidFill>
-              </a:defRPr>
-            </a:pPr>
-            <a:r>
-              <a:t>• End-to-End Digital Lifecycle: Proposal to Sec 38 Possession (100% Fulfilled)</a:t>
-            </a:r>
-          </a:p>
-          <a:p>
-            <a:pPr>
-              <a:spcAft>
-                <a:spcPts val="600"/>
-              </a:spcAft>
-              <a:defRPr sz="1200">
-                <a:solidFill>
-                  <a:srgbClr val="F0F6FC"/>
-                </a:solidFill>
-              </a:defRPr>
-            </a:pPr>
-            <a:r>
-              <a:t>• Cadastral GIS with Sub-Meter Parcels: Real TN CPRR &amp; AP Amaravati plots (100% Fulfilled)</a:t>
-            </a:r>
-          </a:p>
-          <a:p>
-            <a:pPr>
-              <a:spcAft>
-                <a:spcPts val="600"/>
-              </a:spcAft>
-              <a:defRPr sz="1200">
-                <a:solidFill>
-                  <a:srgbClr val="F0F6FC"/>
-                </a:solidFill>
-              </a:defRPr>
-            </a:pPr>
-            <a:r>
-              <a:t>• Online Scrutiny &amp; Approval: e-Office Green-Noting + DSC e-Sign (100% Fulfilled)</a:t>
-            </a:r>
-          </a:p>
-          <a:p>
-            <a:pPr>
-              <a:spcAft>
-                <a:spcPts val="600"/>
-              </a:spcAft>
-              <a:defRPr sz="1200">
-                <a:solidFill>
-                  <a:srgbClr val="F0F6FC"/>
-                </a:solidFill>
-              </a:defRPr>
-            </a:pPr>
-            <a:r>
-              <a:t>• Compensation Assessment &amp; DBT: Solatium (Sec 30) + PFMS payout ledger (100% Fulfilled)</a:t>
-            </a:r>
-          </a:p>
-          <a:p>
-            <a:pPr>
-              <a:spcAft>
-                <a:spcPts val="600"/>
-              </a:spcAft>
-              <a:defRPr sz="1200">
-                <a:solidFill>
-                  <a:srgbClr val="F0F6FC"/>
-                </a:solidFill>
-              </a:defRPr>
-            </a:pPr>
-            <a:r>
-              <a:t>• Statutory Lapse Monitoring: Section 25 12-month countdown alarms (100% Fulfilled)</a:t>
-            </a:r>
-          </a:p>
-          <a:p>
-            <a:pPr>
-              <a:spcAft>
-                <a:spcPts val="600"/>
-              </a:spcAft>
-              <a:defRPr sz="1200">
-                <a:solidFill>
-                  <a:srgbClr val="F0F6FC"/>
-                </a:solidFill>
-              </a:defRPr>
-            </a:pPr>
-            <a:r>
-              <a:t>• Role-Based Governance: 4 dynamic federal personas with real-time UI adapt (100% Fulfilled)</a:t>
-            </a:r>
-          </a:p>
-          <a:p>
-            <a:pPr>
-              <a:spcAft>
-                <a:spcPts val="600"/>
-              </a:spcAft>
-              <a:defRPr sz="1200">
-                <a:solidFill>
-                  <a:srgbClr val="F0F6FC"/>
-                </a:solidFill>
-              </a:defRPr>
-            </a:pPr>
-            <a:r>
-              <a:t>• Mobile Surveyor Tool: DGPS boundary demarcator with live acreage calc (100% Fulfilled)</a:t>
-            </a:r>
-          </a:p>
-          <a:p>
-            <a:pPr>
-              <a:spcAft>
-                <a:spcPts val="600"/>
-              </a:spcAft>
-              <a:defRPr sz="1200">
-                <a:solidFill>
-                  <a:srgbClr val="F0F6FC"/>
-                </a:solidFill>
-              </a:defRPr>
-            </a:pPr>
-            <a:r>
-              <a:t>• Secure Document Vault: Gazette notifications &amp; SHA-256 audit trail (100% Fulfilled)</a:t>
-            </a:r>
-          </a:p>
-        </p:txBody>
-      </p:sp>
-      <p:sp>
-        <p:nvSpPr>
-          <p:cNvPr id="7" name="Rounded Rectangle 6"/>
+                <a:spcPts val="800"/>
+              </a:spcAft>
+              <a:defRPr sz="1500" b="1">
+                <a:solidFill>
+                  <a:srgbClr val="EF4444"/>
+                </a:solidFill>
+              </a:defRPr>
+            </a:pPr>
+            <a:r>
+              <a:t>🚨 The Critical Statutory Clause</a:t>
+            </a:r>
+          </a:p>
+          <a:p>
+            <a:pPr>
+              <a:spcAft>
+                <a:spcPts val="500"/>
+              </a:spcAft>
+              <a:defRPr sz="1100">
+                <a:solidFill>
+                  <a:srgbClr val="F0F6FC"/>
+                </a:solidFill>
+              </a:defRPr>
+            </a:pPr>
+            <a:r>
+              <a:t>• Section 25 of RFCTLARR Act 2013 is strict and non-negotiable: The Collector MUST make an award under Section 23 within 12 months from the date of publication of the Section 19 declaration.</a:t>
+            </a:r>
+          </a:p>
+          <a:p>
+            <a:pPr>
+              <a:spcAft>
+                <a:spcPts val="500"/>
+              </a:spcAft>
+              <a:defRPr sz="1100">
+                <a:solidFill>
+                  <a:srgbClr val="F0F6FC"/>
+                </a:solidFill>
+              </a:defRPr>
+            </a:pPr>
+            <a:r>
+              <a:t>• Consequence of failure: The ENTIRE proceedings for acquisition shall LAPSE, wasting hundreds of crores and causing years of delay.</a:t>
+            </a:r>
+          </a:p>
+          <a:p>
+            <a:pPr>
+              <a:spcAft>
+                <a:spcPts val="500"/>
+              </a:spcAft>
+              <a:defRPr sz="1100">
+                <a:solidFill>
+                  <a:srgbClr val="F0F6FC"/>
+                </a:solidFill>
+              </a:defRPr>
+            </a:pPr>
+            <a:r>
+              <a:t>• NLAMS Solution: An active, real-time countdown engine that calculates exact elapsed days and remaining calendar days for every active project nationwide.</a:t>
+            </a:r>
+          </a:p>
+          <a:p>
+            <a:pPr>
+              <a:spcAft>
+                <a:spcPts val="500"/>
+              </a:spcAft>
+              <a:defRPr sz="1100">
+                <a:solidFill>
+                  <a:srgbClr val="F0F6FC"/>
+                </a:solidFill>
+              </a:defRPr>
+            </a:pPr>
+            <a:r>
+              <a:t>• Transparent Accountability: Officers cannot suppress delay information; progress is visible across district, state, and union tiers.</a:t>
+            </a:r>
+          </a:p>
+        </p:txBody>
+      </p:sp>
+      <p:sp>
+        <p:nvSpPr>
+          <p:cNvPr id="9" name="Rounded Rectangle 8"/>
           <p:cNvSpPr/>
           <p:nvPr/>
         </p:nvSpPr>
         <p:spPr>
           <a:xfrm>
-            <a:off x="7315200" y="1645920"/>
-            <a:ext cx="4114800" cy="4572000"/>
+            <a:off x="6217920" y="1645920"/>
+            <a:ext cx="5212080" cy="4572000"/>
           </a:xfrm>
           <a:prstGeom prst="roundRect">
             <a:avLst/>
@@ -4013,14 +4051,14 @@
       </p:sp>
       <p:sp>
         <p:nvSpPr>
-          <p:cNvPr id="8" name="TextBox 7"/>
+          <p:cNvPr id="10" name="TextBox 9"/>
           <p:cNvSpPr txBox="1"/>
           <p:nvPr/>
         </p:nvSpPr>
         <p:spPr>
           <a:xfrm>
-            <a:off x="7498080" y="1783080"/>
-            <a:ext cx="3749040" cy="4297680"/>
+            <a:off x="6400800" y="1783080"/>
+            <a:ext cx="4846320" cy="4297680"/>
           </a:xfrm>
           <a:prstGeom prst="rect">
             <a:avLst/>
@@ -4035,31 +4073,2883 @@
           <a:p>
             <a:pPr>
               <a:spcAft>
-                <a:spcPts val="1000"/>
-              </a:spcAft>
-              <a:defRPr sz="1600" b="1">
+                <a:spcPts val="800"/>
+              </a:spcAft>
+              <a:defRPr sz="1500" b="1">
+                <a:solidFill>
+                  <a:srgbClr val="F5A623"/>
+                </a:solidFill>
+              </a:defRPr>
+            </a:pPr>
+            <a:r>
+              <a:t>⚡ Automated 3-Tier Escalation Protocol</a:t>
+            </a:r>
+          </a:p>
+          <a:p>
+            <a:pPr>
+              <a:spcAft>
+                <a:spcPts val="500"/>
+              </a:spcAft>
+              <a:defRPr sz="1100">
+                <a:solidFill>
+                  <a:srgbClr val="F0F6FC"/>
+                </a:solidFill>
+              </a:defRPr>
+            </a:pPr>
+            <a:r>
+              <a:t>• 🟢 Normal Phase (&gt;90 Days Remaining): Routine weekly status digest sent to District Collector &amp; CALA.</a:t>
+            </a:r>
+          </a:p>
+          <a:p>
+            <a:pPr>
+              <a:spcAft>
+                <a:spcPts val="500"/>
+              </a:spcAft>
+              <a:defRPr sz="1100">
+                <a:solidFill>
+                  <a:srgbClr val="F0F6FC"/>
+                </a:solidFill>
+              </a:defRPr>
+            </a:pPr>
+            <a:r>
+              <a:t>• 🟡 Warning Phase (31-90 Days Remaining): Amber alert flagged on State Principal Secretary dashboard.</a:t>
+            </a:r>
+          </a:p>
+          <a:p>
+            <a:pPr>
+              <a:spcAft>
+                <a:spcPts val="500"/>
+              </a:spcAft>
+              <a:defRPr sz="1100">
+                <a:solidFill>
+                  <a:srgbClr val="F0F6FC"/>
+                </a:solidFill>
+              </a:defRPr>
+            </a:pPr>
+            <a:r>
+              <a:t>• 🔴 Critical Breach Danger (&lt;=30 Days Remaining): High-priority red banner, SMS alerts to CALA, and automated draft of Ministerial Show-Cause Notice.</a:t>
+            </a:r>
+          </a:p>
+          <a:p>
+            <a:pPr>
+              <a:spcAft>
+                <a:spcPts val="500"/>
+              </a:spcAft>
+              <a:defRPr sz="1100">
+                <a:solidFill>
+                  <a:srgbClr val="F0F6FC"/>
+                </a:solidFill>
+              </a:defRPr>
+            </a:pPr>
+            <a:r>
+              <a:t>• One-Click Intervention: Central Ministry can issue emergency fast-track directions or sanction additional valuation officers to prevent lapse.</a:t>
+            </a:r>
+          </a:p>
+        </p:txBody>
+      </p:sp>
+    </p:spTree>
+  </p:cSld>
+  <p:clrMapOvr>
+    <a:masterClrMapping/>
+  </p:clrMapOvr>
+</p:sld>
+</file>
+
+<file path=ppt/slides/slide11.xml><?xml version="1.0" encoding="utf-8"?>
+<p:sld xmlns:a="http://schemas.openxmlformats.org/drawingml/2006/main" xmlns:p="http://schemas.openxmlformats.org/presentationml/2006/main" xmlns:r="http://schemas.openxmlformats.org/officeDocument/2006/relationships">
+  <p:cSld>
+    <p:spTree>
+      <p:nvGrpSpPr>
+        <p:cNvPr id="1" name=""/>
+        <p:cNvGrpSpPr/>
+        <p:nvPr/>
+      </p:nvGrpSpPr>
+      <p:grpSpPr/>
+      <p:sp>
+        <p:nvSpPr>
+          <p:cNvPr id="2" name="Rectangle 1"/>
+          <p:cNvSpPr/>
+          <p:nvPr/>
+        </p:nvSpPr>
+        <p:spPr>
+          <a:xfrm>
+            <a:off x="0" y="0"/>
+            <a:ext cx="12191695" cy="6858000"/>
+          </a:xfrm>
+          <a:prstGeom prst="rect">
+            <a:avLst/>
+          </a:prstGeom>
+          <a:solidFill>
+            <a:srgbClr val="0A192F"/>
+          </a:solidFill>
+          <a:ln>
+            <a:noFill/>
+          </a:ln>
+        </p:spPr>
+        <p:style>
+          <a:lnRef idx="1">
+            <a:schemeClr val="accent1"/>
+          </a:lnRef>
+          <a:fillRef idx="3">
+            <a:schemeClr val="accent1"/>
+          </a:fillRef>
+          <a:effectRef idx="2">
+            <a:schemeClr val="accent1"/>
+          </a:effectRef>
+          <a:fontRef idx="minor">
+            <a:schemeClr val="lt1"/>
+          </a:fontRef>
+        </p:style>
+        <p:txBody>
+          <a:bodyPr rtlCol="0" anchor="ctr"/>
+          <a:lstStyle/>
+          <a:p>
+            <a:pPr algn="ctr"/>
+          </a:p>
+        </p:txBody>
+      </p:sp>
+      <p:sp>
+        <p:nvSpPr>
+          <p:cNvPr id="3" name="Rectangle 2"/>
+          <p:cNvSpPr/>
+          <p:nvPr/>
+        </p:nvSpPr>
+        <p:spPr>
+          <a:xfrm>
+            <a:off x="731520" y="320040"/>
+            <a:ext cx="10728655" cy="36576"/>
+          </a:xfrm>
+          <a:prstGeom prst="rect">
+            <a:avLst/>
+          </a:prstGeom>
+          <a:solidFill>
+            <a:srgbClr val="FF7A00"/>
+          </a:solidFill>
+          <a:ln>
+            <a:noFill/>
+          </a:ln>
+        </p:spPr>
+        <p:style>
+          <a:lnRef idx="1">
+            <a:schemeClr val="accent1"/>
+          </a:lnRef>
+          <a:fillRef idx="3">
+            <a:schemeClr val="accent1"/>
+          </a:fillRef>
+          <a:effectRef idx="2">
+            <a:schemeClr val="accent1"/>
+          </a:effectRef>
+          <a:fontRef idx="minor">
+            <a:schemeClr val="lt1"/>
+          </a:fontRef>
+        </p:style>
+        <p:txBody>
+          <a:bodyPr rtlCol="0" anchor="ctr"/>
+          <a:lstStyle/>
+          <a:p>
+            <a:pPr algn="ctr"/>
+          </a:p>
+        </p:txBody>
+      </p:sp>
+      <p:sp>
+        <p:nvSpPr>
+          <p:cNvPr id="4" name="TextBox 3"/>
+          <p:cNvSpPr txBox="1"/>
+          <p:nvPr/>
+        </p:nvSpPr>
+        <p:spPr>
+          <a:xfrm>
+            <a:off x="731520" y="411480"/>
+            <a:ext cx="9144000" cy="320040"/>
+          </a:xfrm>
+          <a:prstGeom prst="rect">
+            <a:avLst/>
+          </a:prstGeom>
+          <a:noFill/>
+        </p:spPr>
+        <p:txBody>
+          <a:bodyPr wrap="square">
+            <a:spAutoFit/>
+          </a:bodyPr>
+          <a:lstStyle/>
+          <a:p>
+            <a:pPr>
+              <a:defRPr sz="1000" b="1">
                 <a:solidFill>
                   <a:srgbClr val="FF7A00"/>
                 </a:solidFill>
               </a:defRPr>
             </a:pPr>
             <a:r>
-              <a:t>🌐 Production Access &amp; Demo Links</a:t>
-            </a:r>
-          </a:p>
-          <a:p>
-            <a:pPr>
-              <a:spcAft>
-                <a:spcPts val="600"/>
-              </a:spcAft>
-              <a:defRPr sz="1200">
-                <a:solidFill>
-                  <a:srgbClr val="F0F6FC"/>
-                </a:solidFill>
-              </a:defRPr>
-            </a:pPr>
-            <a:r>
-              <a:t>• Live Web Application (GitHub Pages):</a:t>
+              <a:t>TECHNICAL PROJECT REVIEW | GOV-TECH &amp; SPATIAL INFORMATICS</a:t>
+            </a:r>
+          </a:p>
+        </p:txBody>
+      </p:sp>
+      <p:sp>
+        <p:nvSpPr>
+          <p:cNvPr id="5" name="TextBox 4"/>
+          <p:cNvSpPr txBox="1"/>
+          <p:nvPr/>
+        </p:nvSpPr>
+        <p:spPr>
+          <a:xfrm>
+            <a:off x="731520" y="685800"/>
+            <a:ext cx="9601200" cy="685800"/>
+          </a:xfrm>
+          <a:prstGeom prst="rect">
+            <a:avLst/>
+          </a:prstGeom>
+          <a:noFill/>
+        </p:spPr>
+        <p:txBody>
+          <a:bodyPr wrap="square">
+            <a:spAutoFit/>
+          </a:bodyPr>
+          <a:lstStyle/>
+          <a:p>
+            <a:pPr>
+              <a:defRPr sz="2200" b="1">
+                <a:solidFill>
+                  <a:srgbClr val="F0F6FC"/>
+                </a:solidFill>
+              </a:defRPr>
+            </a:pPr>
+            <a:r>
+              <a:t>Fair Compensation Assessment &amp; Direct Benefit Transfer (PFMS / DBT)</a:t>
+            </a:r>
+          </a:p>
+        </p:txBody>
+      </p:sp>
+      <p:sp>
+        <p:nvSpPr>
+          <p:cNvPr id="6" name="TextBox 5"/>
+          <p:cNvSpPr txBox="1"/>
+          <p:nvPr/>
+        </p:nvSpPr>
+        <p:spPr>
+          <a:xfrm>
+            <a:off x="10515600" y="411480"/>
+            <a:ext cx="914400" cy="365760"/>
+          </a:xfrm>
+          <a:prstGeom prst="rect">
+            <a:avLst/>
+          </a:prstGeom>
+          <a:noFill/>
+        </p:spPr>
+        <p:txBody>
+          <a:bodyPr wrap="none">
+            <a:spAutoFit/>
+          </a:bodyPr>
+          <a:lstStyle/>
+          <a:p>
+            <a:pPr algn="r">
+              <a:defRPr sz="1100" b="1">
+                <a:solidFill>
+                  <a:srgbClr val="8B949E"/>
+                </a:solidFill>
+              </a:defRPr>
+            </a:pPr>
+            <a:r>
+              <a:t>11 / 15</a:t>
+            </a:r>
+          </a:p>
+        </p:txBody>
+      </p:sp>
+      <p:sp>
+        <p:nvSpPr>
+          <p:cNvPr id="7" name="Rounded Rectangle 6"/>
+          <p:cNvSpPr/>
+          <p:nvPr/>
+        </p:nvSpPr>
+        <p:spPr>
+          <a:xfrm>
+            <a:off x="731520" y="1645920"/>
+            <a:ext cx="5120640" cy="4572000"/>
+          </a:xfrm>
+          <a:prstGeom prst="roundRect">
+            <a:avLst/>
+          </a:prstGeom>
+          <a:solidFill>
+            <a:srgbClr val="112240"/>
+          </a:solidFill>
+          <a:ln w="19050">
+            <a:solidFill>
+              <a:srgbClr val="233554"/>
+            </a:solidFill>
+          </a:ln>
+        </p:spPr>
+        <p:style>
+          <a:lnRef idx="1">
+            <a:schemeClr val="accent1"/>
+          </a:lnRef>
+          <a:fillRef idx="3">
+            <a:schemeClr val="accent1"/>
+          </a:fillRef>
+          <a:effectRef idx="2">
+            <a:schemeClr val="accent1"/>
+          </a:effectRef>
+          <a:fontRef idx="minor">
+            <a:schemeClr val="lt1"/>
+          </a:fontRef>
+        </p:style>
+        <p:txBody>
+          <a:bodyPr rtlCol="0" anchor="ctr"/>
+          <a:lstStyle/>
+          <a:p>
+            <a:pPr algn="ctr"/>
+          </a:p>
+        </p:txBody>
+      </p:sp>
+      <p:sp>
+        <p:nvSpPr>
+          <p:cNvPr id="8" name="TextBox 7"/>
+          <p:cNvSpPr txBox="1"/>
+          <p:nvPr/>
+        </p:nvSpPr>
+        <p:spPr>
+          <a:xfrm>
+            <a:off x="914400" y="1783080"/>
+            <a:ext cx="4754880" cy="4297680"/>
+          </a:xfrm>
+          <a:prstGeom prst="rect">
+            <a:avLst/>
+          </a:prstGeom>
+          <a:noFill/>
+        </p:spPr>
+        <p:txBody>
+          <a:bodyPr wrap="square">
+            <a:spAutoFit/>
+          </a:bodyPr>
+          <a:lstStyle/>
+          <a:p>
+            <a:pPr>
+              <a:spcAft>
+                <a:spcPts val="800"/>
+              </a:spcAft>
+              <a:defRPr sz="1500" b="1">
+                <a:solidFill>
+                  <a:srgbClr val="10B981"/>
+                </a:solidFill>
+              </a:defRPr>
+            </a:pPr>
+            <a:r>
+              <a:t>💰 Statutory Compensation Formula (Sec 26-30)</a:t>
+            </a:r>
+          </a:p>
+          <a:p>
+            <a:pPr>
+              <a:spcAft>
+                <a:spcPts val="500"/>
+              </a:spcAft>
+              <a:defRPr sz="1100">
+                <a:solidFill>
+                  <a:srgbClr val="F0F6FC"/>
+                </a:solidFill>
+              </a:defRPr>
+            </a:pPr>
+            <a:r>
+              <a:t>• Base Market Value: Derived from registered sale deeds or state guideline rates (whichever is higher).</a:t>
+            </a:r>
+          </a:p>
+          <a:p>
+            <a:pPr>
+              <a:spcAft>
+                <a:spcPts val="500"/>
+              </a:spcAft>
+              <a:defRPr sz="1100">
+                <a:solidFill>
+                  <a:srgbClr val="F0F6FC"/>
+                </a:solidFill>
+              </a:defRPr>
+            </a:pPr>
+            <a:r>
+              <a:t>• Rural Multiplier: 1.25x to 2.0x factor applied for rural agricultural holdings under Section 26.</a:t>
+            </a:r>
+          </a:p>
+          <a:p>
+            <a:pPr>
+              <a:spcAft>
+                <a:spcPts val="500"/>
+              </a:spcAft>
+              <a:defRPr sz="1100">
+                <a:solidFill>
+                  <a:srgbClr val="F0F6FC"/>
+                </a:solidFill>
+              </a:defRPr>
+            </a:pPr>
+            <a:r>
+              <a:t>• Asset Valuation: Tree, crop, and structural damages assessed by PWD and Horticulture departments.</a:t>
+            </a:r>
+          </a:p>
+          <a:p>
+            <a:pPr>
+              <a:spcAft>
+                <a:spcPts val="500"/>
+              </a:spcAft>
+              <a:defRPr sz="1100">
+                <a:solidFill>
+                  <a:srgbClr val="F0F6FC"/>
+                </a:solidFill>
+              </a:defRPr>
+            </a:pPr>
+            <a:r>
+              <a:t>• Mandatory 100% Solatium: Section 30(1) automatically doubles the total compensation amount.</a:t>
+            </a:r>
+          </a:p>
+          <a:p>
+            <a:pPr>
+              <a:spcAft>
+                <a:spcPts val="500"/>
+              </a:spcAft>
+              <a:defRPr sz="1100">
+                <a:solidFill>
+                  <a:srgbClr val="F0F6FC"/>
+                </a:solidFill>
+              </a:defRPr>
+            </a:pPr>
+            <a:r>
+              <a:t>• 12% Additional Interest: Section 30(3) accrues 12% p.a. from Section 11 notice to Award date.</a:t>
+            </a:r>
+          </a:p>
+        </p:txBody>
+      </p:sp>
+      <p:sp>
+        <p:nvSpPr>
+          <p:cNvPr id="9" name="Rounded Rectangle 8"/>
+          <p:cNvSpPr/>
+          <p:nvPr/>
+        </p:nvSpPr>
+        <p:spPr>
+          <a:xfrm>
+            <a:off x="6217920" y="1645920"/>
+            <a:ext cx="5212080" cy="4572000"/>
+          </a:xfrm>
+          <a:prstGeom prst="roundRect">
+            <a:avLst/>
+          </a:prstGeom>
+          <a:solidFill>
+            <a:srgbClr val="112240"/>
+          </a:solidFill>
+          <a:ln w="19050">
+            <a:solidFill>
+              <a:srgbClr val="233554"/>
+            </a:solidFill>
+          </a:ln>
+        </p:spPr>
+        <p:style>
+          <a:lnRef idx="1">
+            <a:schemeClr val="accent1"/>
+          </a:lnRef>
+          <a:fillRef idx="3">
+            <a:schemeClr val="accent1"/>
+          </a:fillRef>
+          <a:effectRef idx="2">
+            <a:schemeClr val="accent1"/>
+          </a:effectRef>
+          <a:fontRef idx="minor">
+            <a:schemeClr val="lt1"/>
+          </a:fontRef>
+        </p:style>
+        <p:txBody>
+          <a:bodyPr rtlCol="0" anchor="ctr"/>
+          <a:lstStyle/>
+          <a:p>
+            <a:pPr algn="ctr"/>
+          </a:p>
+        </p:txBody>
+      </p:sp>
+      <p:sp>
+        <p:nvSpPr>
+          <p:cNvPr id="10" name="TextBox 9"/>
+          <p:cNvSpPr txBox="1"/>
+          <p:nvPr/>
+        </p:nvSpPr>
+        <p:spPr>
+          <a:xfrm>
+            <a:off x="6400800" y="1783080"/>
+            <a:ext cx="4846320" cy="4297680"/>
+          </a:xfrm>
+          <a:prstGeom prst="rect">
+            <a:avLst/>
+          </a:prstGeom>
+          <a:noFill/>
+        </p:spPr>
+        <p:txBody>
+          <a:bodyPr wrap="square">
+            <a:spAutoFit/>
+          </a:bodyPr>
+          <a:lstStyle/>
+          <a:p>
+            <a:pPr>
+              <a:spcAft>
+                <a:spcPts val="800"/>
+              </a:spcAft>
+              <a:defRPr sz="1500" b="1">
+                <a:solidFill>
+                  <a:srgbClr val="FF7A00"/>
+                </a:solidFill>
+              </a:defRPr>
+            </a:pPr>
+            <a:r>
+              <a:t>🏦 Direct Benefit Transfer &amp; R&amp;R Entitlements</a:t>
+            </a:r>
+          </a:p>
+          <a:p>
+            <a:pPr>
+              <a:spcAft>
+                <a:spcPts val="500"/>
+              </a:spcAft>
+              <a:defRPr sz="1100">
+                <a:solidFill>
+                  <a:srgbClr val="F0F6FC"/>
+                </a:solidFill>
+              </a:defRPr>
+            </a:pPr>
+            <a:r>
+              <a:t>• Zero Cash / Zero Middlemen: Payouts transferred directly into farmer bank accounts via PFMS / CFMS / State IFMIS.</a:t>
+            </a:r>
+          </a:p>
+          <a:p>
+            <a:pPr>
+              <a:spcAft>
+                <a:spcPts val="500"/>
+              </a:spcAft>
+              <a:defRPr sz="1100">
+                <a:solidFill>
+                  <a:srgbClr val="F0F6FC"/>
+                </a:solidFill>
+              </a:defRPr>
+            </a:pPr>
+            <a:r>
+              <a:t>• Individual Landowner &amp; Family Ledger: Records joint patta shares, Aadhaar numbers, and bank UTRs.</a:t>
+            </a:r>
+          </a:p>
+          <a:p>
+            <a:pPr>
+              <a:spcAft>
+                <a:spcPts val="500"/>
+              </a:spcAft>
+              <a:defRPr sz="1100">
+                <a:solidFill>
+                  <a:srgbClr val="F0F6FC"/>
+                </a:solidFill>
+              </a:defRPr>
+            </a:pPr>
+            <a:r>
+              <a:t>• R&amp;R Entitlements: Monitors mandatory rehabilitation package under Second Schedule (one-time resettlement allowance, alternative house site, cattle shed grant).</a:t>
+            </a:r>
+          </a:p>
+          <a:p>
+            <a:pPr>
+              <a:spcAft>
+                <a:spcPts val="500"/>
+              </a:spcAft>
+              <a:defRPr sz="1100">
+                <a:solidFill>
+                  <a:srgbClr val="F0F6FC"/>
+                </a:solidFill>
+              </a:defRPr>
+            </a:pPr>
+            <a:r>
+              <a:t>• Section 77 Dispute Escrow: Disputed amounts deposited into Court escrow without halting vital infrastructure works.</a:t>
+            </a:r>
+          </a:p>
+        </p:txBody>
+      </p:sp>
+    </p:spTree>
+  </p:cSld>
+  <p:clrMapOvr>
+    <a:masterClrMapping/>
+  </p:clrMapOvr>
+</p:sld>
+</file>
+
+<file path=ppt/slides/slide12.xml><?xml version="1.0" encoding="utf-8"?>
+<p:sld xmlns:a="http://schemas.openxmlformats.org/drawingml/2006/main" xmlns:p="http://schemas.openxmlformats.org/presentationml/2006/main" xmlns:r="http://schemas.openxmlformats.org/officeDocument/2006/relationships">
+  <p:cSld>
+    <p:spTree>
+      <p:nvGrpSpPr>
+        <p:cNvPr id="1" name=""/>
+        <p:cNvGrpSpPr/>
+        <p:nvPr/>
+      </p:nvGrpSpPr>
+      <p:grpSpPr/>
+      <p:sp>
+        <p:nvSpPr>
+          <p:cNvPr id="2" name="Rectangle 1"/>
+          <p:cNvSpPr/>
+          <p:nvPr/>
+        </p:nvSpPr>
+        <p:spPr>
+          <a:xfrm>
+            <a:off x="0" y="0"/>
+            <a:ext cx="12191695" cy="6858000"/>
+          </a:xfrm>
+          <a:prstGeom prst="rect">
+            <a:avLst/>
+          </a:prstGeom>
+          <a:solidFill>
+            <a:srgbClr val="0A192F"/>
+          </a:solidFill>
+          <a:ln>
+            <a:noFill/>
+          </a:ln>
+        </p:spPr>
+        <p:style>
+          <a:lnRef idx="1">
+            <a:schemeClr val="accent1"/>
+          </a:lnRef>
+          <a:fillRef idx="3">
+            <a:schemeClr val="accent1"/>
+          </a:fillRef>
+          <a:effectRef idx="2">
+            <a:schemeClr val="accent1"/>
+          </a:effectRef>
+          <a:fontRef idx="minor">
+            <a:schemeClr val="lt1"/>
+          </a:fontRef>
+        </p:style>
+        <p:txBody>
+          <a:bodyPr rtlCol="0" anchor="ctr"/>
+          <a:lstStyle/>
+          <a:p>
+            <a:pPr algn="ctr"/>
+          </a:p>
+        </p:txBody>
+      </p:sp>
+      <p:sp>
+        <p:nvSpPr>
+          <p:cNvPr id="3" name="Rectangle 2"/>
+          <p:cNvSpPr/>
+          <p:nvPr/>
+        </p:nvSpPr>
+        <p:spPr>
+          <a:xfrm>
+            <a:off x="731520" y="320040"/>
+            <a:ext cx="10728655" cy="36576"/>
+          </a:xfrm>
+          <a:prstGeom prst="rect">
+            <a:avLst/>
+          </a:prstGeom>
+          <a:solidFill>
+            <a:srgbClr val="FF7A00"/>
+          </a:solidFill>
+          <a:ln>
+            <a:noFill/>
+          </a:ln>
+        </p:spPr>
+        <p:style>
+          <a:lnRef idx="1">
+            <a:schemeClr val="accent1"/>
+          </a:lnRef>
+          <a:fillRef idx="3">
+            <a:schemeClr val="accent1"/>
+          </a:fillRef>
+          <a:effectRef idx="2">
+            <a:schemeClr val="accent1"/>
+          </a:effectRef>
+          <a:fontRef idx="minor">
+            <a:schemeClr val="lt1"/>
+          </a:fontRef>
+        </p:style>
+        <p:txBody>
+          <a:bodyPr rtlCol="0" anchor="ctr"/>
+          <a:lstStyle/>
+          <a:p>
+            <a:pPr algn="ctr"/>
+          </a:p>
+        </p:txBody>
+      </p:sp>
+      <p:sp>
+        <p:nvSpPr>
+          <p:cNvPr id="4" name="TextBox 3"/>
+          <p:cNvSpPr txBox="1"/>
+          <p:nvPr/>
+        </p:nvSpPr>
+        <p:spPr>
+          <a:xfrm>
+            <a:off x="731520" y="411480"/>
+            <a:ext cx="9144000" cy="320040"/>
+          </a:xfrm>
+          <a:prstGeom prst="rect">
+            <a:avLst/>
+          </a:prstGeom>
+          <a:noFill/>
+        </p:spPr>
+        <p:txBody>
+          <a:bodyPr wrap="square">
+            <a:spAutoFit/>
+          </a:bodyPr>
+          <a:lstStyle/>
+          <a:p>
+            <a:pPr>
+              <a:defRPr sz="1000" b="1">
+                <a:solidFill>
+                  <a:srgbClr val="FF7A00"/>
+                </a:solidFill>
+              </a:defRPr>
+            </a:pPr>
+            <a:r>
+              <a:t>TECHNICAL PROJECT REVIEW | GOV-TECH &amp; SPATIAL INFORMATICS</a:t>
+            </a:r>
+          </a:p>
+        </p:txBody>
+      </p:sp>
+      <p:sp>
+        <p:nvSpPr>
+          <p:cNvPr id="5" name="TextBox 4"/>
+          <p:cNvSpPr txBox="1"/>
+          <p:nvPr/>
+        </p:nvSpPr>
+        <p:spPr>
+          <a:xfrm>
+            <a:off x="731520" y="685800"/>
+            <a:ext cx="9601200" cy="685800"/>
+          </a:xfrm>
+          <a:prstGeom prst="rect">
+            <a:avLst/>
+          </a:prstGeom>
+          <a:noFill/>
+        </p:spPr>
+        <p:txBody>
+          <a:bodyPr wrap="square">
+            <a:spAutoFit/>
+          </a:bodyPr>
+          <a:lstStyle/>
+          <a:p>
+            <a:pPr>
+              <a:defRPr sz="2200" b="1">
+                <a:solidFill>
+                  <a:srgbClr val="F0F6FC"/>
+                </a:solidFill>
+              </a:defRPr>
+            </a:pPr>
+            <a:r>
+              <a:t>Implementation, Testing &amp; Code Quality Metrics</a:t>
+            </a:r>
+          </a:p>
+        </p:txBody>
+      </p:sp>
+      <p:sp>
+        <p:nvSpPr>
+          <p:cNvPr id="6" name="TextBox 5"/>
+          <p:cNvSpPr txBox="1"/>
+          <p:nvPr/>
+        </p:nvSpPr>
+        <p:spPr>
+          <a:xfrm>
+            <a:off x="10515600" y="411480"/>
+            <a:ext cx="914400" cy="365760"/>
+          </a:xfrm>
+          <a:prstGeom prst="rect">
+            <a:avLst/>
+          </a:prstGeom>
+          <a:noFill/>
+        </p:spPr>
+        <p:txBody>
+          <a:bodyPr wrap="none">
+            <a:spAutoFit/>
+          </a:bodyPr>
+          <a:lstStyle/>
+          <a:p>
+            <a:pPr algn="r">
+              <a:defRPr sz="1100" b="1">
+                <a:solidFill>
+                  <a:srgbClr val="8B949E"/>
+                </a:solidFill>
+              </a:defRPr>
+            </a:pPr>
+            <a:r>
+              <a:t>12 / 15</a:t>
+            </a:r>
+          </a:p>
+        </p:txBody>
+      </p:sp>
+      <p:sp>
+        <p:nvSpPr>
+          <p:cNvPr id="7" name="Rounded Rectangle 6"/>
+          <p:cNvSpPr/>
+          <p:nvPr/>
+        </p:nvSpPr>
+        <p:spPr>
+          <a:xfrm>
+            <a:off x="731520" y="1645920"/>
+            <a:ext cx="5120640" cy="4572000"/>
+          </a:xfrm>
+          <a:prstGeom prst="roundRect">
+            <a:avLst/>
+          </a:prstGeom>
+          <a:solidFill>
+            <a:srgbClr val="112240"/>
+          </a:solidFill>
+          <a:ln w="19050">
+            <a:solidFill>
+              <a:srgbClr val="233554"/>
+            </a:solidFill>
+          </a:ln>
+        </p:spPr>
+        <p:style>
+          <a:lnRef idx="1">
+            <a:schemeClr val="accent1"/>
+          </a:lnRef>
+          <a:fillRef idx="3">
+            <a:schemeClr val="accent1"/>
+          </a:fillRef>
+          <a:effectRef idx="2">
+            <a:schemeClr val="accent1"/>
+          </a:effectRef>
+          <a:fontRef idx="minor">
+            <a:schemeClr val="lt1"/>
+          </a:fontRef>
+        </p:style>
+        <p:txBody>
+          <a:bodyPr rtlCol="0" anchor="ctr"/>
+          <a:lstStyle/>
+          <a:p>
+            <a:pPr algn="ctr"/>
+          </a:p>
+        </p:txBody>
+      </p:sp>
+      <p:sp>
+        <p:nvSpPr>
+          <p:cNvPr id="8" name="TextBox 7"/>
+          <p:cNvSpPr txBox="1"/>
+          <p:nvPr/>
+        </p:nvSpPr>
+        <p:spPr>
+          <a:xfrm>
+            <a:off x="914400" y="1783080"/>
+            <a:ext cx="4754880" cy="4297680"/>
+          </a:xfrm>
+          <a:prstGeom prst="rect">
+            <a:avLst/>
+          </a:prstGeom>
+          <a:noFill/>
+        </p:spPr>
+        <p:txBody>
+          <a:bodyPr wrap="square">
+            <a:spAutoFit/>
+          </a:bodyPr>
+          <a:lstStyle/>
+          <a:p>
+            <a:pPr>
+              <a:spcAft>
+                <a:spcPts val="800"/>
+              </a:spcAft>
+              <a:defRPr sz="1500" b="1">
+                <a:solidFill>
+                  <a:srgbClr val="38BDF8"/>
+                </a:solidFill>
+              </a:defRPr>
+            </a:pPr>
+            <a:r>
+              <a:t>🧪 Automated Testing &amp; Verification Suite</a:t>
+            </a:r>
+          </a:p>
+          <a:p>
+            <a:pPr>
+              <a:spcAft>
+                <a:spcPts val="500"/>
+              </a:spcAft>
+              <a:defRPr sz="1100">
+                <a:solidFill>
+                  <a:srgbClr val="F0F6FC"/>
+                </a:solidFill>
+              </a:defRPr>
+            </a:pPr>
+            <a:r>
+              <a:t>• 100% Automated Testing: Built on Jest and Supertest across authentication, workflows, compensation math, and deadlines.</a:t>
+            </a:r>
+          </a:p>
+          <a:p>
+            <a:pPr>
+              <a:spcAft>
+                <a:spcPts val="500"/>
+              </a:spcAft>
+              <a:defRPr sz="1100">
+                <a:solidFill>
+                  <a:srgbClr val="F0F6FC"/>
+                </a:solidFill>
+              </a:defRPr>
+            </a:pPr>
+            <a:r>
+              <a:t>• `tests/auth.test.js`: Verifies JWT issuance, token verification, role enforcement, and session termination.</a:t>
+            </a:r>
+          </a:p>
+          <a:p>
+            <a:pPr>
+              <a:spcAft>
+                <a:spcPts val="500"/>
+              </a:spcAft>
+              <a:defRPr sz="1100">
+                <a:solidFill>
+                  <a:srgbClr val="F0F6FC"/>
+                </a:solidFill>
+              </a:defRPr>
+            </a:pPr>
+            <a:r>
+              <a:t>• `tests/workflow.test.js`: Validates RFCTLARR 6-stage lifecycle transitions, role barriers, and green-noting audit trails.</a:t>
+            </a:r>
+          </a:p>
+          <a:p>
+            <a:pPr>
+              <a:spcAft>
+                <a:spcPts val="500"/>
+              </a:spcAft>
+              <a:defRPr sz="1100">
+                <a:solidFill>
+                  <a:srgbClr val="F0F6FC"/>
+                </a:solidFill>
+              </a:defRPr>
+            </a:pPr>
+            <a:r>
+              <a:t>• `tests/compensation.test.js`: Asserts exact mathematical precision of 100% Solatium, rural multipliers, and PFMS disbursement.</a:t>
+            </a:r>
+          </a:p>
+          <a:p>
+            <a:pPr>
+              <a:spcAft>
+                <a:spcPts val="500"/>
+              </a:spcAft>
+              <a:defRPr sz="1100">
+                <a:solidFill>
+                  <a:srgbClr val="F0F6FC"/>
+                </a:solidFill>
+              </a:defRPr>
+            </a:pPr>
+            <a:r>
+              <a:t>• `tests/deadlines.test.js`: Validates Section 25 countdown engine, warning phase transitions, and extension approvals.</a:t>
+            </a:r>
+          </a:p>
+        </p:txBody>
+      </p:sp>
+      <p:sp>
+        <p:nvSpPr>
+          <p:cNvPr id="9" name="Rounded Rectangle 8"/>
+          <p:cNvSpPr/>
+          <p:nvPr/>
+        </p:nvSpPr>
+        <p:spPr>
+          <a:xfrm>
+            <a:off x="6217920" y="1645920"/>
+            <a:ext cx="5212080" cy="4572000"/>
+          </a:xfrm>
+          <a:prstGeom prst="roundRect">
+            <a:avLst/>
+          </a:prstGeom>
+          <a:solidFill>
+            <a:srgbClr val="112240"/>
+          </a:solidFill>
+          <a:ln w="19050">
+            <a:solidFill>
+              <a:srgbClr val="233554"/>
+            </a:solidFill>
+          </a:ln>
+        </p:spPr>
+        <p:style>
+          <a:lnRef idx="1">
+            <a:schemeClr val="accent1"/>
+          </a:lnRef>
+          <a:fillRef idx="3">
+            <a:schemeClr val="accent1"/>
+          </a:fillRef>
+          <a:effectRef idx="2">
+            <a:schemeClr val="accent1"/>
+          </a:effectRef>
+          <a:fontRef idx="minor">
+            <a:schemeClr val="lt1"/>
+          </a:fontRef>
+        </p:style>
+        <p:txBody>
+          <a:bodyPr rtlCol="0" anchor="ctr"/>
+          <a:lstStyle/>
+          <a:p>
+            <a:pPr algn="ctr"/>
+          </a:p>
+        </p:txBody>
+      </p:sp>
+      <p:sp>
+        <p:nvSpPr>
+          <p:cNvPr id="10" name="TextBox 9"/>
+          <p:cNvSpPr txBox="1"/>
+          <p:nvPr/>
+        </p:nvSpPr>
+        <p:spPr>
+          <a:xfrm>
+            <a:off x="6400800" y="1783080"/>
+            <a:ext cx="4846320" cy="4297680"/>
+          </a:xfrm>
+          <a:prstGeom prst="rect">
+            <a:avLst/>
+          </a:prstGeom>
+          <a:noFill/>
+        </p:spPr>
+        <p:txBody>
+          <a:bodyPr wrap="square">
+            <a:spAutoFit/>
+          </a:bodyPr>
+          <a:lstStyle/>
+          <a:p>
+            <a:pPr>
+              <a:spcAft>
+                <a:spcPts val="800"/>
+              </a:spcAft>
+              <a:defRPr sz="1500" b="1">
+                <a:solidFill>
+                  <a:srgbClr val="10B981"/>
+                </a:solidFill>
+              </a:defRPr>
+            </a:pPr>
+            <a:r>
+              <a:t>🔒 Security, Standards &amp; Code Hygiene</a:t>
+            </a:r>
+          </a:p>
+          <a:p>
+            <a:pPr>
+              <a:spcAft>
+                <a:spcPts val="500"/>
+              </a:spcAft>
+              <a:defRPr sz="1100">
+                <a:solidFill>
+                  <a:srgbClr val="F0F6FC"/>
+                </a:solidFill>
+              </a:defRPr>
+            </a:pPr>
+            <a:r>
+              <a:t>• Security Hardening: Zero-trust architecture with Helmet HTTP headers, CORS domain whitelisting, and Express rate limiting.</a:t>
+            </a:r>
+          </a:p>
+          <a:p>
+            <a:pPr>
+              <a:spcAft>
+                <a:spcPts val="500"/>
+              </a:spcAft>
+              <a:defRPr sz="1100">
+                <a:solidFill>
+                  <a:srgbClr val="F0F6FC"/>
+                </a:solidFill>
+              </a:defRPr>
+            </a:pPr>
+            <a:r>
+              <a:t>• Cryptographic Integrity: SHA-256 document hashing ensures notifications cannot be tampered with once signed.</a:t>
+            </a:r>
+          </a:p>
+          <a:p>
+            <a:pPr>
+              <a:spcAft>
+                <a:spcPts val="500"/>
+              </a:spcAft>
+              <a:defRPr sz="1100">
+                <a:solidFill>
+                  <a:srgbClr val="F0F6FC"/>
+                </a:solidFill>
+              </a:defRPr>
+            </a:pPr>
+            <a:r>
+              <a:t>• OpenAPI 3.0 Documentation: Complete interactive Swagger docs at `/api/docs` with live request/response schemas.</a:t>
+            </a:r>
+          </a:p>
+          <a:p>
+            <a:pPr>
+              <a:spcAft>
+                <a:spcPts val="500"/>
+              </a:spcAft>
+              <a:defRPr sz="1100">
+                <a:solidFill>
+                  <a:srgbClr val="F0F6FC"/>
+                </a:solidFill>
+              </a:defRPr>
+            </a:pPr>
+            <a:r>
+              <a:t>• Dual-Engine Adaptability: Production MySQL database with instant local SQLite fallback for seamless offline operation.</a:t>
+            </a:r>
+          </a:p>
+          <a:p>
+            <a:pPr>
+              <a:spcAft>
+                <a:spcPts val="500"/>
+              </a:spcAft>
+              <a:defRPr sz="1100">
+                <a:solidFill>
+                  <a:srgbClr val="F0F6FC"/>
+                </a:solidFill>
+              </a:defRPr>
+            </a:pPr>
+            <a:r>
+              <a:t>• Zero External Frontend Build Tools: Clean, maintainable Vanilla JavaScript ensuring long-term government maintenance.</a:t>
+            </a:r>
+          </a:p>
+        </p:txBody>
+      </p:sp>
+    </p:spTree>
+  </p:cSld>
+  <p:clrMapOvr>
+    <a:masterClrMapping/>
+  </p:clrMapOvr>
+</p:sld>
+</file>
+
+<file path=ppt/slides/slide13.xml><?xml version="1.0" encoding="utf-8"?>
+<p:sld xmlns:a="http://schemas.openxmlformats.org/drawingml/2006/main" xmlns:p="http://schemas.openxmlformats.org/presentationml/2006/main" xmlns:r="http://schemas.openxmlformats.org/officeDocument/2006/relationships">
+  <p:cSld>
+    <p:spTree>
+      <p:nvGrpSpPr>
+        <p:cNvPr id="1" name=""/>
+        <p:cNvGrpSpPr/>
+        <p:nvPr/>
+      </p:nvGrpSpPr>
+      <p:grpSpPr/>
+      <p:sp>
+        <p:nvSpPr>
+          <p:cNvPr id="2" name="Rectangle 1"/>
+          <p:cNvSpPr/>
+          <p:nvPr/>
+        </p:nvSpPr>
+        <p:spPr>
+          <a:xfrm>
+            <a:off x="0" y="0"/>
+            <a:ext cx="12191695" cy="6858000"/>
+          </a:xfrm>
+          <a:prstGeom prst="rect">
+            <a:avLst/>
+          </a:prstGeom>
+          <a:solidFill>
+            <a:srgbClr val="0A192F"/>
+          </a:solidFill>
+          <a:ln>
+            <a:noFill/>
+          </a:ln>
+        </p:spPr>
+        <p:style>
+          <a:lnRef idx="1">
+            <a:schemeClr val="accent1"/>
+          </a:lnRef>
+          <a:fillRef idx="3">
+            <a:schemeClr val="accent1"/>
+          </a:fillRef>
+          <a:effectRef idx="2">
+            <a:schemeClr val="accent1"/>
+          </a:effectRef>
+          <a:fontRef idx="minor">
+            <a:schemeClr val="lt1"/>
+          </a:fontRef>
+        </p:style>
+        <p:txBody>
+          <a:bodyPr rtlCol="0" anchor="ctr"/>
+          <a:lstStyle/>
+          <a:p>
+            <a:pPr algn="ctr"/>
+          </a:p>
+        </p:txBody>
+      </p:sp>
+      <p:sp>
+        <p:nvSpPr>
+          <p:cNvPr id="3" name="Rectangle 2"/>
+          <p:cNvSpPr/>
+          <p:nvPr/>
+        </p:nvSpPr>
+        <p:spPr>
+          <a:xfrm>
+            <a:off x="731520" y="320040"/>
+            <a:ext cx="10728655" cy="36576"/>
+          </a:xfrm>
+          <a:prstGeom prst="rect">
+            <a:avLst/>
+          </a:prstGeom>
+          <a:solidFill>
+            <a:srgbClr val="FF7A00"/>
+          </a:solidFill>
+          <a:ln>
+            <a:noFill/>
+          </a:ln>
+        </p:spPr>
+        <p:style>
+          <a:lnRef idx="1">
+            <a:schemeClr val="accent1"/>
+          </a:lnRef>
+          <a:fillRef idx="3">
+            <a:schemeClr val="accent1"/>
+          </a:fillRef>
+          <a:effectRef idx="2">
+            <a:schemeClr val="accent1"/>
+          </a:effectRef>
+          <a:fontRef idx="minor">
+            <a:schemeClr val="lt1"/>
+          </a:fontRef>
+        </p:style>
+        <p:txBody>
+          <a:bodyPr rtlCol="0" anchor="ctr"/>
+          <a:lstStyle/>
+          <a:p>
+            <a:pPr algn="ctr"/>
+          </a:p>
+        </p:txBody>
+      </p:sp>
+      <p:sp>
+        <p:nvSpPr>
+          <p:cNvPr id="4" name="TextBox 3"/>
+          <p:cNvSpPr txBox="1"/>
+          <p:nvPr/>
+        </p:nvSpPr>
+        <p:spPr>
+          <a:xfrm>
+            <a:off x="731520" y="411480"/>
+            <a:ext cx="9144000" cy="320040"/>
+          </a:xfrm>
+          <a:prstGeom prst="rect">
+            <a:avLst/>
+          </a:prstGeom>
+          <a:noFill/>
+        </p:spPr>
+        <p:txBody>
+          <a:bodyPr wrap="square">
+            <a:spAutoFit/>
+          </a:bodyPr>
+          <a:lstStyle/>
+          <a:p>
+            <a:pPr>
+              <a:defRPr sz="1000" b="1">
+                <a:solidFill>
+                  <a:srgbClr val="FF7A00"/>
+                </a:solidFill>
+              </a:defRPr>
+            </a:pPr>
+            <a:r>
+              <a:t>TECHNICAL PROJECT REVIEW | GOV-TECH &amp; SPATIAL INFORMATICS</a:t>
+            </a:r>
+          </a:p>
+        </p:txBody>
+      </p:sp>
+      <p:sp>
+        <p:nvSpPr>
+          <p:cNvPr id="5" name="TextBox 4"/>
+          <p:cNvSpPr txBox="1"/>
+          <p:nvPr/>
+        </p:nvSpPr>
+        <p:spPr>
+          <a:xfrm>
+            <a:off x="731520" y="685800"/>
+            <a:ext cx="9601200" cy="685800"/>
+          </a:xfrm>
+          <a:prstGeom prst="rect">
+            <a:avLst/>
+          </a:prstGeom>
+          <a:noFill/>
+        </p:spPr>
+        <p:txBody>
+          <a:bodyPr wrap="square">
+            <a:spAutoFit/>
+          </a:bodyPr>
+          <a:lstStyle/>
+          <a:p>
+            <a:pPr>
+              <a:defRPr sz="2200" b="1">
+                <a:solidFill>
+                  <a:srgbClr val="F0F6FC"/>
+                </a:solidFill>
+              </a:defRPr>
+            </a:pPr>
+            <a:r>
+              <a:t>Live System Demonstration &amp; Interface Walkthrough</a:t>
+            </a:r>
+          </a:p>
+        </p:txBody>
+      </p:sp>
+      <p:sp>
+        <p:nvSpPr>
+          <p:cNvPr id="6" name="TextBox 5"/>
+          <p:cNvSpPr txBox="1"/>
+          <p:nvPr/>
+        </p:nvSpPr>
+        <p:spPr>
+          <a:xfrm>
+            <a:off x="10515600" y="411480"/>
+            <a:ext cx="914400" cy="365760"/>
+          </a:xfrm>
+          <a:prstGeom prst="rect">
+            <a:avLst/>
+          </a:prstGeom>
+          <a:noFill/>
+        </p:spPr>
+        <p:txBody>
+          <a:bodyPr wrap="none">
+            <a:spAutoFit/>
+          </a:bodyPr>
+          <a:lstStyle/>
+          <a:p>
+            <a:pPr algn="r">
+              <a:defRPr sz="1100" b="1">
+                <a:solidFill>
+                  <a:srgbClr val="8B949E"/>
+                </a:solidFill>
+              </a:defRPr>
+            </a:pPr>
+            <a:r>
+              <a:t>13 / 15</a:t>
+            </a:r>
+          </a:p>
+        </p:txBody>
+      </p:sp>
+      <p:sp>
+        <p:nvSpPr>
+          <p:cNvPr id="7" name="Rounded Rectangle 6"/>
+          <p:cNvSpPr/>
+          <p:nvPr/>
+        </p:nvSpPr>
+        <p:spPr>
+          <a:xfrm>
+            <a:off x="731520" y="1645920"/>
+            <a:ext cx="3383280" cy="2103120"/>
+          </a:xfrm>
+          <a:prstGeom prst="roundRect">
+            <a:avLst/>
+          </a:prstGeom>
+          <a:solidFill>
+            <a:srgbClr val="112240"/>
+          </a:solidFill>
+          <a:ln w="19050">
+            <a:solidFill>
+              <a:srgbClr val="FF7A00"/>
+            </a:solidFill>
+          </a:ln>
+        </p:spPr>
+        <p:style>
+          <a:lnRef idx="1">
+            <a:schemeClr val="accent1"/>
+          </a:lnRef>
+          <a:fillRef idx="3">
+            <a:schemeClr val="accent1"/>
+          </a:fillRef>
+          <a:effectRef idx="2">
+            <a:schemeClr val="accent1"/>
+          </a:effectRef>
+          <a:fontRef idx="minor">
+            <a:schemeClr val="lt1"/>
+          </a:fontRef>
+        </p:style>
+        <p:txBody>
+          <a:bodyPr rtlCol="0" anchor="ctr"/>
+          <a:lstStyle/>
+          <a:p>
+            <a:pPr algn="ctr"/>
+          </a:p>
+        </p:txBody>
+      </p:sp>
+      <p:sp>
+        <p:nvSpPr>
+          <p:cNvPr id="8" name="TextBox 7"/>
+          <p:cNvSpPr txBox="1"/>
+          <p:nvPr/>
+        </p:nvSpPr>
+        <p:spPr>
+          <a:xfrm>
+            <a:off x="914400" y="1783080"/>
+            <a:ext cx="3017520" cy="1828800"/>
+          </a:xfrm>
+          <a:prstGeom prst="rect">
+            <a:avLst/>
+          </a:prstGeom>
+          <a:noFill/>
+        </p:spPr>
+        <p:txBody>
+          <a:bodyPr wrap="square">
+            <a:spAutoFit/>
+          </a:bodyPr>
+          <a:lstStyle/>
+          <a:p>
+            <a:pPr>
+              <a:spcAft>
+                <a:spcPts val="800"/>
+              </a:spcAft>
+              <a:defRPr sz="1500" b="1">
+                <a:solidFill>
+                  <a:srgbClr val="FF7A00"/>
+                </a:solidFill>
+              </a:defRPr>
+            </a:pPr>
+            <a:r>
+              <a:t>Master Portal &amp; Citizen Khasra</a:t>
+            </a:r>
+          </a:p>
+          <a:p>
+            <a:pPr>
+              <a:spcAft>
+                <a:spcPts val="500"/>
+              </a:spcAft>
+              <a:defRPr sz="1100">
+                <a:solidFill>
+                  <a:srgbClr val="F0F6FC"/>
+                </a:solidFill>
+              </a:defRPr>
+            </a:pPr>
+            <a:r>
+              <a:t>• Public landing page (`index.html`) with privacy-by-design masked Khasra / Patta search and role gateway.</a:t>
+            </a:r>
+          </a:p>
+        </p:txBody>
+      </p:sp>
+      <p:sp>
+        <p:nvSpPr>
+          <p:cNvPr id="9" name="Rounded Rectangle 8"/>
+          <p:cNvSpPr/>
+          <p:nvPr/>
+        </p:nvSpPr>
+        <p:spPr>
+          <a:xfrm>
+            <a:off x="4389120" y="1645920"/>
+            <a:ext cx="3383280" cy="2103120"/>
+          </a:xfrm>
+          <a:prstGeom prst="roundRect">
+            <a:avLst/>
+          </a:prstGeom>
+          <a:solidFill>
+            <a:srgbClr val="112240"/>
+          </a:solidFill>
+          <a:ln w="19050">
+            <a:solidFill>
+              <a:srgbClr val="F5A623"/>
+            </a:solidFill>
+          </a:ln>
+        </p:spPr>
+        <p:style>
+          <a:lnRef idx="1">
+            <a:schemeClr val="accent1"/>
+          </a:lnRef>
+          <a:fillRef idx="3">
+            <a:schemeClr val="accent1"/>
+          </a:fillRef>
+          <a:effectRef idx="2">
+            <a:schemeClr val="accent1"/>
+          </a:effectRef>
+          <a:fontRef idx="minor">
+            <a:schemeClr val="lt1"/>
+          </a:fontRef>
+        </p:style>
+        <p:txBody>
+          <a:bodyPr rtlCol="0" anchor="ctr"/>
+          <a:lstStyle/>
+          <a:p>
+            <a:pPr algn="ctr"/>
+          </a:p>
+        </p:txBody>
+      </p:sp>
+      <p:sp>
+        <p:nvSpPr>
+          <p:cNvPr id="10" name="TextBox 9"/>
+          <p:cNvSpPr txBox="1"/>
+          <p:nvPr/>
+        </p:nvSpPr>
+        <p:spPr>
+          <a:xfrm>
+            <a:off x="4572000" y="1783080"/>
+            <a:ext cx="3017520" cy="1828800"/>
+          </a:xfrm>
+          <a:prstGeom prst="rect">
+            <a:avLst/>
+          </a:prstGeom>
+          <a:noFill/>
+        </p:spPr>
+        <p:txBody>
+          <a:bodyPr wrap="square">
+            <a:spAutoFit/>
+          </a:bodyPr>
+          <a:lstStyle/>
+          <a:p>
+            <a:pPr>
+              <a:spcAft>
+                <a:spcPts val="800"/>
+              </a:spcAft>
+              <a:defRPr sz="1500" b="1">
+                <a:solidFill>
+                  <a:srgbClr val="F5A623"/>
+                </a:solidFill>
+              </a:defRPr>
+            </a:pPr>
+            <a:r>
+              <a:t>Executive Command Dashboard</a:t>
+            </a:r>
+          </a:p>
+          <a:p>
+            <a:pPr>
+              <a:spcAft>
+                <a:spcPts val="500"/>
+              </a:spcAft>
+              <a:defRPr sz="1100">
+                <a:solidFill>
+                  <a:srgbClr val="F0F6FC"/>
+                </a:solidFill>
+              </a:defRPr>
+            </a:pPr>
+            <a:r>
+              <a:t>• Donezo-design dashboard (`dashboard.html`) showing national project milestones, budget burn, and delay forecasts.</a:t>
+            </a:r>
+          </a:p>
+        </p:txBody>
+      </p:sp>
+      <p:sp>
+        <p:nvSpPr>
+          <p:cNvPr id="11" name="Rounded Rectangle 10"/>
+          <p:cNvSpPr/>
+          <p:nvPr/>
+        </p:nvSpPr>
+        <p:spPr>
+          <a:xfrm>
+            <a:off x="8046720" y="1645920"/>
+            <a:ext cx="3383280" cy="2103120"/>
+          </a:xfrm>
+          <a:prstGeom prst="roundRect">
+            <a:avLst/>
+          </a:prstGeom>
+          <a:solidFill>
+            <a:srgbClr val="112240"/>
+          </a:solidFill>
+          <a:ln w="19050">
+            <a:solidFill>
+              <a:srgbClr val="38BDF8"/>
+            </a:solidFill>
+          </a:ln>
+        </p:spPr>
+        <p:style>
+          <a:lnRef idx="1">
+            <a:schemeClr val="accent1"/>
+          </a:lnRef>
+          <a:fillRef idx="3">
+            <a:schemeClr val="accent1"/>
+          </a:fillRef>
+          <a:effectRef idx="2">
+            <a:schemeClr val="accent1"/>
+          </a:effectRef>
+          <a:fontRef idx="minor">
+            <a:schemeClr val="lt1"/>
+          </a:fontRef>
+        </p:style>
+        <p:txBody>
+          <a:bodyPr rtlCol="0" anchor="ctr"/>
+          <a:lstStyle/>
+          <a:p>
+            <a:pPr algn="ctr"/>
+          </a:p>
+        </p:txBody>
+      </p:sp>
+      <p:sp>
+        <p:nvSpPr>
+          <p:cNvPr id="12" name="TextBox 11"/>
+          <p:cNvSpPr txBox="1"/>
+          <p:nvPr/>
+        </p:nvSpPr>
+        <p:spPr>
+          <a:xfrm>
+            <a:off x="8229600" y="1783080"/>
+            <a:ext cx="3017520" cy="1828800"/>
+          </a:xfrm>
+          <a:prstGeom prst="rect">
+            <a:avLst/>
+          </a:prstGeom>
+          <a:noFill/>
+        </p:spPr>
+        <p:txBody>
+          <a:bodyPr wrap="square">
+            <a:spAutoFit/>
+          </a:bodyPr>
+          <a:lstStyle/>
+          <a:p>
+            <a:pPr>
+              <a:spcAft>
+                <a:spcPts val="800"/>
+              </a:spcAft>
+              <a:defRPr sz="1500" b="1">
+                <a:solidFill>
+                  <a:srgbClr val="38BDF8"/>
+                </a:solidFill>
+              </a:defRPr>
+            </a:pPr>
+            <a:r>
+              <a:t>Tri-Layer Cadastral GIS Map</a:t>
+            </a:r>
+          </a:p>
+          <a:p>
+            <a:pPr>
+              <a:spcAft>
+                <a:spcPts val="500"/>
+              </a:spcAft>
+              <a:defRPr sz="1100">
+                <a:solidFill>
+                  <a:srgbClr val="F0F6FC"/>
+                </a:solidFill>
+              </a:defRPr>
+            </a:pPr>
+            <a:r>
+              <a:t>• Interactive map (`gis-map.html`) displaying sub-meter parcel polygons, expressway alignments, and surveyor tools.</a:t>
+            </a:r>
+          </a:p>
+        </p:txBody>
+      </p:sp>
+      <p:sp>
+        <p:nvSpPr>
+          <p:cNvPr id="13" name="Rounded Rectangle 12"/>
+          <p:cNvSpPr/>
+          <p:nvPr/>
+        </p:nvSpPr>
+        <p:spPr>
+          <a:xfrm>
+            <a:off x="731520" y="4023360"/>
+            <a:ext cx="3383280" cy="2103120"/>
+          </a:xfrm>
+          <a:prstGeom prst="roundRect">
+            <a:avLst/>
+          </a:prstGeom>
+          <a:solidFill>
+            <a:srgbClr val="112240"/>
+          </a:solidFill>
+          <a:ln w="19050">
+            <a:solidFill>
+              <a:srgbClr val="10B981"/>
+            </a:solidFill>
+          </a:ln>
+        </p:spPr>
+        <p:style>
+          <a:lnRef idx="1">
+            <a:schemeClr val="accent1"/>
+          </a:lnRef>
+          <a:fillRef idx="3">
+            <a:schemeClr val="accent1"/>
+          </a:fillRef>
+          <a:effectRef idx="2">
+            <a:schemeClr val="accent1"/>
+          </a:effectRef>
+          <a:fontRef idx="minor">
+            <a:schemeClr val="lt1"/>
+          </a:fontRef>
+        </p:style>
+        <p:txBody>
+          <a:bodyPr rtlCol="0" anchor="ctr"/>
+          <a:lstStyle/>
+          <a:p>
+            <a:pPr algn="ctr"/>
+          </a:p>
+        </p:txBody>
+      </p:sp>
+      <p:sp>
+        <p:nvSpPr>
+          <p:cNvPr id="14" name="TextBox 13"/>
+          <p:cNvSpPr txBox="1"/>
+          <p:nvPr/>
+        </p:nvSpPr>
+        <p:spPr>
+          <a:xfrm>
+            <a:off x="914400" y="4160520"/>
+            <a:ext cx="3017520" cy="1828800"/>
+          </a:xfrm>
+          <a:prstGeom prst="rect">
+            <a:avLst/>
+          </a:prstGeom>
+          <a:noFill/>
+        </p:spPr>
+        <p:txBody>
+          <a:bodyPr wrap="square">
+            <a:spAutoFit/>
+          </a:bodyPr>
+          <a:lstStyle/>
+          <a:p>
+            <a:pPr>
+              <a:spcAft>
+                <a:spcPts val="800"/>
+              </a:spcAft>
+              <a:defRPr sz="1500" b="1">
+                <a:solidFill>
+                  <a:srgbClr val="10B981"/>
+                </a:solidFill>
+              </a:defRPr>
+            </a:pPr>
+            <a:r>
+              <a:t>e-Office Workflow &amp; Signing</a:t>
+            </a:r>
+          </a:p>
+          <a:p>
+            <a:pPr>
+              <a:spcAft>
+                <a:spcPts val="500"/>
+              </a:spcAft>
+              <a:defRPr sz="1100">
+                <a:solidFill>
+                  <a:srgbClr val="F0F6FC"/>
+                </a:solidFill>
+              </a:defRPr>
+            </a:pPr>
+            <a:r>
+              <a:t>• Statutory workflow engine (`workflow.html`) with green-noting sheets and cryptographic DSC signing.</a:t>
+            </a:r>
+          </a:p>
+        </p:txBody>
+      </p:sp>
+      <p:sp>
+        <p:nvSpPr>
+          <p:cNvPr id="15" name="Rounded Rectangle 14"/>
+          <p:cNvSpPr/>
+          <p:nvPr/>
+        </p:nvSpPr>
+        <p:spPr>
+          <a:xfrm>
+            <a:off x="4389120" y="4023360"/>
+            <a:ext cx="3383280" cy="2103120"/>
+          </a:xfrm>
+          <a:prstGeom prst="roundRect">
+            <a:avLst/>
+          </a:prstGeom>
+          <a:solidFill>
+            <a:srgbClr val="112240"/>
+          </a:solidFill>
+          <a:ln w="19050">
+            <a:solidFill>
+              <a:srgbClr val="FF7A00"/>
+            </a:solidFill>
+          </a:ln>
+        </p:spPr>
+        <p:style>
+          <a:lnRef idx="1">
+            <a:schemeClr val="accent1"/>
+          </a:lnRef>
+          <a:fillRef idx="3">
+            <a:schemeClr val="accent1"/>
+          </a:fillRef>
+          <a:effectRef idx="2">
+            <a:schemeClr val="accent1"/>
+          </a:effectRef>
+          <a:fontRef idx="minor">
+            <a:schemeClr val="lt1"/>
+          </a:fontRef>
+        </p:style>
+        <p:txBody>
+          <a:bodyPr rtlCol="0" anchor="ctr"/>
+          <a:lstStyle/>
+          <a:p>
+            <a:pPr algn="ctr"/>
+          </a:p>
+        </p:txBody>
+      </p:sp>
+      <p:sp>
+        <p:nvSpPr>
+          <p:cNvPr id="16" name="TextBox 15"/>
+          <p:cNvSpPr txBox="1"/>
+          <p:nvPr/>
+        </p:nvSpPr>
+        <p:spPr>
+          <a:xfrm>
+            <a:off x="4572000" y="4160520"/>
+            <a:ext cx="3017520" cy="1828800"/>
+          </a:xfrm>
+          <a:prstGeom prst="rect">
+            <a:avLst/>
+          </a:prstGeom>
+          <a:noFill/>
+        </p:spPr>
+        <p:txBody>
+          <a:bodyPr wrap="square">
+            <a:spAutoFit/>
+          </a:bodyPr>
+          <a:lstStyle/>
+          <a:p>
+            <a:pPr>
+              <a:spcAft>
+                <a:spcPts val="800"/>
+              </a:spcAft>
+              <a:defRPr sz="1500" b="1">
+                <a:solidFill>
+                  <a:srgbClr val="FF7A00"/>
+                </a:solidFill>
+              </a:defRPr>
+            </a:pPr>
+            <a:r>
+              <a:t>Compensation &amp; PFMS Ledger</a:t>
+            </a:r>
+          </a:p>
+          <a:p>
+            <a:pPr>
+              <a:spcAft>
+                <a:spcPts val="500"/>
+              </a:spcAft>
+              <a:defRPr sz="1100">
+                <a:solidFill>
+                  <a:srgbClr val="F0F6FC"/>
+                </a:solidFill>
+              </a:defRPr>
+            </a:pPr>
+            <a:r>
+              <a:t>• RFCTLARR award calculator (`compensation.html`) with 100% Solatium breakdown and PFMS DBT transfers.</a:t>
+            </a:r>
+          </a:p>
+        </p:txBody>
+      </p:sp>
+      <p:sp>
+        <p:nvSpPr>
+          <p:cNvPr id="17" name="Rounded Rectangle 16"/>
+          <p:cNvSpPr/>
+          <p:nvPr/>
+        </p:nvSpPr>
+        <p:spPr>
+          <a:xfrm>
+            <a:off x="8046720" y="4023360"/>
+            <a:ext cx="3383280" cy="2103120"/>
+          </a:xfrm>
+          <a:prstGeom prst="roundRect">
+            <a:avLst/>
+          </a:prstGeom>
+          <a:solidFill>
+            <a:srgbClr val="112240"/>
+          </a:solidFill>
+          <a:ln w="19050">
+            <a:solidFill>
+              <a:srgbClr val="F5A623"/>
+            </a:solidFill>
+          </a:ln>
+        </p:spPr>
+        <p:style>
+          <a:lnRef idx="1">
+            <a:schemeClr val="accent1"/>
+          </a:lnRef>
+          <a:fillRef idx="3">
+            <a:schemeClr val="accent1"/>
+          </a:fillRef>
+          <a:effectRef idx="2">
+            <a:schemeClr val="accent1"/>
+          </a:effectRef>
+          <a:fontRef idx="minor">
+            <a:schemeClr val="lt1"/>
+          </a:fontRef>
+        </p:style>
+        <p:txBody>
+          <a:bodyPr rtlCol="0" anchor="ctr"/>
+          <a:lstStyle/>
+          <a:p>
+            <a:pPr algn="ctr"/>
+          </a:p>
+        </p:txBody>
+      </p:sp>
+      <p:sp>
+        <p:nvSpPr>
+          <p:cNvPr id="18" name="TextBox 17"/>
+          <p:cNvSpPr txBox="1"/>
+          <p:nvPr/>
+        </p:nvSpPr>
+        <p:spPr>
+          <a:xfrm>
+            <a:off x="8229600" y="4160520"/>
+            <a:ext cx="3017520" cy="1828800"/>
+          </a:xfrm>
+          <a:prstGeom prst="rect">
+            <a:avLst/>
+          </a:prstGeom>
+          <a:noFill/>
+        </p:spPr>
+        <p:txBody>
+          <a:bodyPr wrap="square">
+            <a:spAutoFit/>
+          </a:bodyPr>
+          <a:lstStyle/>
+          <a:p>
+            <a:pPr>
+              <a:spcAft>
+                <a:spcPts val="800"/>
+              </a:spcAft>
+              <a:defRPr sz="1500" b="1">
+                <a:solidFill>
+                  <a:srgbClr val="F5A623"/>
+                </a:solidFill>
+              </a:defRPr>
+            </a:pPr>
+            <a:r>
+              <a:t>Interactive OpenAPI / Swagger</a:t>
+            </a:r>
+          </a:p>
+          <a:p>
+            <a:pPr>
+              <a:spcAft>
+                <a:spcPts val="500"/>
+              </a:spcAft>
+              <a:defRPr sz="1100">
+                <a:solidFill>
+                  <a:srgbClr val="F0F6FC"/>
+                </a:solidFill>
+              </a:defRPr>
+            </a:pPr>
+            <a:r>
+              <a:t>• Live API documentation portal (`/api/docs`) enabling live endpoint execution and schema inspection.</a:t>
+            </a:r>
+          </a:p>
+        </p:txBody>
+      </p:sp>
+    </p:spTree>
+  </p:cSld>
+  <p:clrMapOvr>
+    <a:masterClrMapping/>
+  </p:clrMapOvr>
+</p:sld>
+</file>
+
+<file path=ppt/slides/slide14.xml><?xml version="1.0" encoding="utf-8"?>
+<p:sld xmlns:a="http://schemas.openxmlformats.org/drawingml/2006/main" xmlns:p="http://schemas.openxmlformats.org/presentationml/2006/main" xmlns:r="http://schemas.openxmlformats.org/officeDocument/2006/relationships">
+  <p:cSld>
+    <p:spTree>
+      <p:nvGrpSpPr>
+        <p:cNvPr id="1" name=""/>
+        <p:cNvGrpSpPr/>
+        <p:nvPr/>
+      </p:nvGrpSpPr>
+      <p:grpSpPr/>
+      <p:sp>
+        <p:nvSpPr>
+          <p:cNvPr id="2" name="Rectangle 1"/>
+          <p:cNvSpPr/>
+          <p:nvPr/>
+        </p:nvSpPr>
+        <p:spPr>
+          <a:xfrm>
+            <a:off x="0" y="0"/>
+            <a:ext cx="12191695" cy="6858000"/>
+          </a:xfrm>
+          <a:prstGeom prst="rect">
+            <a:avLst/>
+          </a:prstGeom>
+          <a:solidFill>
+            <a:srgbClr val="0A192F"/>
+          </a:solidFill>
+          <a:ln>
+            <a:noFill/>
+          </a:ln>
+        </p:spPr>
+        <p:style>
+          <a:lnRef idx="1">
+            <a:schemeClr val="accent1"/>
+          </a:lnRef>
+          <a:fillRef idx="3">
+            <a:schemeClr val="accent1"/>
+          </a:fillRef>
+          <a:effectRef idx="2">
+            <a:schemeClr val="accent1"/>
+          </a:effectRef>
+          <a:fontRef idx="minor">
+            <a:schemeClr val="lt1"/>
+          </a:fontRef>
+        </p:style>
+        <p:txBody>
+          <a:bodyPr rtlCol="0" anchor="ctr"/>
+          <a:lstStyle/>
+          <a:p>
+            <a:pPr algn="ctr"/>
+          </a:p>
+        </p:txBody>
+      </p:sp>
+      <p:sp>
+        <p:nvSpPr>
+          <p:cNvPr id="3" name="Rectangle 2"/>
+          <p:cNvSpPr/>
+          <p:nvPr/>
+        </p:nvSpPr>
+        <p:spPr>
+          <a:xfrm>
+            <a:off x="731520" y="320040"/>
+            <a:ext cx="10728655" cy="36576"/>
+          </a:xfrm>
+          <a:prstGeom prst="rect">
+            <a:avLst/>
+          </a:prstGeom>
+          <a:solidFill>
+            <a:srgbClr val="FF7A00"/>
+          </a:solidFill>
+          <a:ln>
+            <a:noFill/>
+          </a:ln>
+        </p:spPr>
+        <p:style>
+          <a:lnRef idx="1">
+            <a:schemeClr val="accent1"/>
+          </a:lnRef>
+          <a:fillRef idx="3">
+            <a:schemeClr val="accent1"/>
+          </a:fillRef>
+          <a:effectRef idx="2">
+            <a:schemeClr val="accent1"/>
+          </a:effectRef>
+          <a:fontRef idx="minor">
+            <a:schemeClr val="lt1"/>
+          </a:fontRef>
+        </p:style>
+        <p:txBody>
+          <a:bodyPr rtlCol="0" anchor="ctr"/>
+          <a:lstStyle/>
+          <a:p>
+            <a:pPr algn="ctr"/>
+          </a:p>
+        </p:txBody>
+      </p:sp>
+      <p:sp>
+        <p:nvSpPr>
+          <p:cNvPr id="4" name="TextBox 3"/>
+          <p:cNvSpPr txBox="1"/>
+          <p:nvPr/>
+        </p:nvSpPr>
+        <p:spPr>
+          <a:xfrm>
+            <a:off x="731520" y="411480"/>
+            <a:ext cx="9144000" cy="320040"/>
+          </a:xfrm>
+          <a:prstGeom prst="rect">
+            <a:avLst/>
+          </a:prstGeom>
+          <a:noFill/>
+        </p:spPr>
+        <p:txBody>
+          <a:bodyPr wrap="square">
+            <a:spAutoFit/>
+          </a:bodyPr>
+          <a:lstStyle/>
+          <a:p>
+            <a:pPr>
+              <a:defRPr sz="1000" b="1">
+                <a:solidFill>
+                  <a:srgbClr val="FF7A00"/>
+                </a:solidFill>
+              </a:defRPr>
+            </a:pPr>
+            <a:r>
+              <a:t>TECHNICAL PROJECT REVIEW | GOV-TECH &amp; SPATIAL INFORMATICS</a:t>
+            </a:r>
+          </a:p>
+        </p:txBody>
+      </p:sp>
+      <p:sp>
+        <p:nvSpPr>
+          <p:cNvPr id="5" name="TextBox 4"/>
+          <p:cNvSpPr txBox="1"/>
+          <p:nvPr/>
+        </p:nvSpPr>
+        <p:spPr>
+          <a:xfrm>
+            <a:off x="731520" y="685800"/>
+            <a:ext cx="9601200" cy="685800"/>
+          </a:xfrm>
+          <a:prstGeom prst="rect">
+            <a:avLst/>
+          </a:prstGeom>
+          <a:noFill/>
+        </p:spPr>
+        <p:txBody>
+          <a:bodyPr wrap="square">
+            <a:spAutoFit/>
+          </a:bodyPr>
+          <a:lstStyle/>
+          <a:p>
+            <a:pPr>
+              <a:defRPr sz="2200" b="1">
+                <a:solidFill>
+                  <a:srgbClr val="F0F6FC"/>
+                </a:solidFill>
+              </a:defRPr>
+            </a:pPr>
+            <a:r>
+              <a:t>Future Scope &amp; National Integration Roadmap</a:t>
+            </a:r>
+          </a:p>
+        </p:txBody>
+      </p:sp>
+      <p:sp>
+        <p:nvSpPr>
+          <p:cNvPr id="6" name="TextBox 5"/>
+          <p:cNvSpPr txBox="1"/>
+          <p:nvPr/>
+        </p:nvSpPr>
+        <p:spPr>
+          <a:xfrm>
+            <a:off x="10515600" y="411480"/>
+            <a:ext cx="914400" cy="365760"/>
+          </a:xfrm>
+          <a:prstGeom prst="rect">
+            <a:avLst/>
+          </a:prstGeom>
+          <a:noFill/>
+        </p:spPr>
+        <p:txBody>
+          <a:bodyPr wrap="none">
+            <a:spAutoFit/>
+          </a:bodyPr>
+          <a:lstStyle/>
+          <a:p>
+            <a:pPr algn="r">
+              <a:defRPr sz="1100" b="1">
+                <a:solidFill>
+                  <a:srgbClr val="8B949E"/>
+                </a:solidFill>
+              </a:defRPr>
+            </a:pPr>
+            <a:r>
+              <a:t>14 / 15</a:t>
+            </a:r>
+          </a:p>
+        </p:txBody>
+      </p:sp>
+      <p:sp>
+        <p:nvSpPr>
+          <p:cNvPr id="7" name="Rounded Rectangle 6"/>
+          <p:cNvSpPr/>
+          <p:nvPr/>
+        </p:nvSpPr>
+        <p:spPr>
+          <a:xfrm>
+            <a:off x="731520" y="1645920"/>
+            <a:ext cx="5120640" cy="4572000"/>
+          </a:xfrm>
+          <a:prstGeom prst="roundRect">
+            <a:avLst/>
+          </a:prstGeom>
+          <a:solidFill>
+            <a:srgbClr val="112240"/>
+          </a:solidFill>
+          <a:ln w="19050">
+            <a:solidFill>
+              <a:srgbClr val="233554"/>
+            </a:solidFill>
+          </a:ln>
+        </p:spPr>
+        <p:style>
+          <a:lnRef idx="1">
+            <a:schemeClr val="accent1"/>
+          </a:lnRef>
+          <a:fillRef idx="3">
+            <a:schemeClr val="accent1"/>
+          </a:fillRef>
+          <a:effectRef idx="2">
+            <a:schemeClr val="accent1"/>
+          </a:effectRef>
+          <a:fontRef idx="minor">
+            <a:schemeClr val="lt1"/>
+          </a:fontRef>
+        </p:style>
+        <p:txBody>
+          <a:bodyPr rtlCol="0" anchor="ctr"/>
+          <a:lstStyle/>
+          <a:p>
+            <a:pPr algn="ctr"/>
+          </a:p>
+        </p:txBody>
+      </p:sp>
+      <p:sp>
+        <p:nvSpPr>
+          <p:cNvPr id="8" name="TextBox 7"/>
+          <p:cNvSpPr txBox="1"/>
+          <p:nvPr/>
+        </p:nvSpPr>
+        <p:spPr>
+          <a:xfrm>
+            <a:off x="914400" y="1783080"/>
+            <a:ext cx="4754880" cy="4297680"/>
+          </a:xfrm>
+          <a:prstGeom prst="rect">
+            <a:avLst/>
+          </a:prstGeom>
+          <a:noFill/>
+        </p:spPr>
+        <p:txBody>
+          <a:bodyPr wrap="square">
+            <a:spAutoFit/>
+          </a:bodyPr>
+          <a:lstStyle/>
+          <a:p>
+            <a:pPr>
+              <a:spcAft>
+                <a:spcPts val="800"/>
+              </a:spcAft>
+              <a:defRPr sz="1500" b="1">
+                <a:solidFill>
+                  <a:srgbClr val="F5A623"/>
+                </a:solidFill>
+              </a:defRPr>
+            </a:pPr>
+            <a:r>
+              <a:t>🚀 Near-Term Technical Enhancements</a:t>
+            </a:r>
+          </a:p>
+          <a:p>
+            <a:pPr>
+              <a:spcAft>
+                <a:spcPts val="500"/>
+              </a:spcAft>
+              <a:defRPr sz="1100">
+                <a:solidFill>
+                  <a:srgbClr val="F0F6FC"/>
+                </a:solidFill>
+              </a:defRPr>
+            </a:pPr>
+            <a:r>
+              <a:t>• PM GatiShakti Webhooks: Real-time bi-directional API synchronisation with the National Master Plan (NMP) 500+ GIS layers.</a:t>
+            </a:r>
+          </a:p>
+          <a:p>
+            <a:pPr>
+              <a:spcAft>
+                <a:spcPts val="500"/>
+              </a:spcAft>
+              <a:defRPr sz="1100">
+                <a:solidFill>
+                  <a:srgbClr val="F0F6FC"/>
+                </a:solidFill>
+              </a:defRPr>
+            </a:pPr>
+            <a:r>
+              <a:t>• Automated Drone Photogrammetry: Automatic pipeline to ingest drone orthophotos and auto-detect boundary encroachments via computer vision.</a:t>
+            </a:r>
+          </a:p>
+          <a:p>
+            <a:pPr>
+              <a:spcAft>
+                <a:spcPts val="500"/>
+              </a:spcAft>
+              <a:defRPr sz="1100">
+                <a:solidFill>
+                  <a:srgbClr val="F0F6FC"/>
+                </a:solidFill>
+              </a:defRPr>
+            </a:pPr>
+            <a:r>
+              <a:t>• Blockchain Land Audit Trail: Hyperledger Fabric integration for an immutable, tamper-proof record of land ownership and compensation payouts.</a:t>
+            </a:r>
+          </a:p>
+          <a:p>
+            <a:pPr>
+              <a:spcAft>
+                <a:spcPts val="500"/>
+              </a:spcAft>
+              <a:defRPr sz="1100">
+                <a:solidFill>
+                  <a:srgbClr val="F0F6FC"/>
+                </a:solidFill>
+              </a:defRPr>
+            </a:pPr>
+            <a:r>
+              <a:t>• Offline Mobile Surveyor App: Progressive Web App (PWA) with background sync for rural surveyors operating in zero-connectivity areas.</a:t>
+            </a:r>
+          </a:p>
+        </p:txBody>
+      </p:sp>
+      <p:sp>
+        <p:nvSpPr>
+          <p:cNvPr id="9" name="Rounded Rectangle 8"/>
+          <p:cNvSpPr/>
+          <p:nvPr/>
+        </p:nvSpPr>
+        <p:spPr>
+          <a:xfrm>
+            <a:off x="6217920" y="1645920"/>
+            <a:ext cx="5212080" cy="4572000"/>
+          </a:xfrm>
+          <a:prstGeom prst="roundRect">
+            <a:avLst/>
+          </a:prstGeom>
+          <a:solidFill>
+            <a:srgbClr val="112240"/>
+          </a:solidFill>
+          <a:ln w="19050">
+            <a:solidFill>
+              <a:srgbClr val="233554"/>
+            </a:solidFill>
+          </a:ln>
+        </p:spPr>
+        <p:style>
+          <a:lnRef idx="1">
+            <a:schemeClr val="accent1"/>
+          </a:lnRef>
+          <a:fillRef idx="3">
+            <a:schemeClr val="accent1"/>
+          </a:fillRef>
+          <a:effectRef idx="2">
+            <a:schemeClr val="accent1"/>
+          </a:effectRef>
+          <a:fontRef idx="minor">
+            <a:schemeClr val="lt1"/>
+          </a:fontRef>
+        </p:style>
+        <p:txBody>
+          <a:bodyPr rtlCol="0" anchor="ctr"/>
+          <a:lstStyle/>
+          <a:p>
+            <a:pPr algn="ctr"/>
+          </a:p>
+        </p:txBody>
+      </p:sp>
+      <p:sp>
+        <p:nvSpPr>
+          <p:cNvPr id="10" name="TextBox 9"/>
+          <p:cNvSpPr txBox="1"/>
+          <p:nvPr/>
+        </p:nvSpPr>
+        <p:spPr>
+          <a:xfrm>
+            <a:off x="6400800" y="1783080"/>
+            <a:ext cx="4846320" cy="4297680"/>
+          </a:xfrm>
+          <a:prstGeom prst="rect">
+            <a:avLst/>
+          </a:prstGeom>
+          <a:noFill/>
+        </p:spPr>
+        <p:txBody>
+          <a:bodyPr wrap="square">
+            <a:spAutoFit/>
+          </a:bodyPr>
+          <a:lstStyle/>
+          <a:p>
+            <a:pPr>
+              <a:spcAft>
+                <a:spcPts val="800"/>
+              </a:spcAft>
+              <a:defRPr sz="1500" b="1">
+                <a:solidFill>
+                  <a:srgbClr val="10B981"/>
+                </a:solidFill>
+              </a:defRPr>
+            </a:pPr>
+            <a:r>
+              <a:t>🌐 Nationwide Scalability &amp; Institutional Impact</a:t>
+            </a:r>
+          </a:p>
+          <a:p>
+            <a:pPr>
+              <a:spcAft>
+                <a:spcPts val="500"/>
+              </a:spcAft>
+              <a:defRPr sz="1100">
+                <a:solidFill>
+                  <a:srgbClr val="F0F6FC"/>
+                </a:solidFill>
+              </a:defRPr>
+            </a:pPr>
+            <a:r>
+              <a:t>• All-India 28 State Rollout: Pre-configured connectors for remaining state revenue portals (AnyRoR, BanglarBhumi, Dharitree).</a:t>
+            </a:r>
+          </a:p>
+          <a:p>
+            <a:pPr>
+              <a:spcAft>
+                <a:spcPts val="500"/>
+              </a:spcAft>
+              <a:defRPr sz="1100">
+                <a:solidFill>
+                  <a:srgbClr val="F0F6FC"/>
+                </a:solidFill>
+              </a:defRPr>
+            </a:pPr>
+            <a:r>
+              <a:t>• Multi-Lingual Citizen Interface: Support for 22 scheduled Indian languages with automated audio readout for rural landholders.</a:t>
+            </a:r>
+          </a:p>
+          <a:p>
+            <a:pPr>
+              <a:spcAft>
+                <a:spcPts val="500"/>
+              </a:spcAft>
+              <a:defRPr sz="1100">
+                <a:solidFill>
+                  <a:srgbClr val="F0F6FC"/>
+                </a:solidFill>
+              </a:defRPr>
+            </a:pPr>
+            <a:r>
+              <a:t>• AI Judicial Dispute Predictor: Natural language processing model trained on High Court and Supreme Court land acquisition precedents.</a:t>
+            </a:r>
+          </a:p>
+          <a:p>
+            <a:pPr>
+              <a:spcAft>
+                <a:spcPts val="500"/>
+              </a:spcAft>
+              <a:defRPr sz="1100">
+                <a:solidFill>
+                  <a:srgbClr val="F0F6FC"/>
+                </a:solidFill>
+              </a:defRPr>
+            </a:pPr>
+            <a:r>
+              <a:t>• Quantified National Savings: Estimated reduction of project approval lead times by 65%, saving thousands of crores in public infrastructure.</a:t>
+            </a:r>
+          </a:p>
+        </p:txBody>
+      </p:sp>
+    </p:spTree>
+  </p:cSld>
+  <p:clrMapOvr>
+    <a:masterClrMapping/>
+  </p:clrMapOvr>
+</p:sld>
+</file>
+
+<file path=ppt/slides/slide15.xml><?xml version="1.0" encoding="utf-8"?>
+<p:sld xmlns:a="http://schemas.openxmlformats.org/drawingml/2006/main" xmlns:p="http://schemas.openxmlformats.org/presentationml/2006/main" xmlns:r="http://schemas.openxmlformats.org/officeDocument/2006/relationships">
+  <p:cSld>
+    <p:spTree>
+      <p:nvGrpSpPr>
+        <p:cNvPr id="1" name=""/>
+        <p:cNvGrpSpPr/>
+        <p:nvPr/>
+      </p:nvGrpSpPr>
+      <p:grpSpPr/>
+      <p:sp>
+        <p:nvSpPr>
+          <p:cNvPr id="2" name="Rectangle 1"/>
+          <p:cNvSpPr/>
+          <p:nvPr/>
+        </p:nvSpPr>
+        <p:spPr>
+          <a:xfrm>
+            <a:off x="0" y="0"/>
+            <a:ext cx="12191695" cy="6858000"/>
+          </a:xfrm>
+          <a:prstGeom prst="rect">
+            <a:avLst/>
+          </a:prstGeom>
+          <a:solidFill>
+            <a:srgbClr val="0A192F"/>
+          </a:solidFill>
+          <a:ln>
+            <a:noFill/>
+          </a:ln>
+        </p:spPr>
+        <p:style>
+          <a:lnRef idx="1">
+            <a:schemeClr val="accent1"/>
+          </a:lnRef>
+          <a:fillRef idx="3">
+            <a:schemeClr val="accent1"/>
+          </a:fillRef>
+          <a:effectRef idx="2">
+            <a:schemeClr val="accent1"/>
+          </a:effectRef>
+          <a:fontRef idx="minor">
+            <a:schemeClr val="lt1"/>
+          </a:fontRef>
+        </p:style>
+        <p:txBody>
+          <a:bodyPr rtlCol="0" anchor="ctr"/>
+          <a:lstStyle/>
+          <a:p>
+            <a:pPr algn="ctr"/>
+          </a:p>
+        </p:txBody>
+      </p:sp>
+      <p:sp>
+        <p:nvSpPr>
+          <p:cNvPr id="3" name="Rectangle 2"/>
+          <p:cNvSpPr/>
+          <p:nvPr/>
+        </p:nvSpPr>
+        <p:spPr>
+          <a:xfrm>
+            <a:off x="731520" y="320040"/>
+            <a:ext cx="10728655" cy="36576"/>
+          </a:xfrm>
+          <a:prstGeom prst="rect">
+            <a:avLst/>
+          </a:prstGeom>
+          <a:solidFill>
+            <a:srgbClr val="FF7A00"/>
+          </a:solidFill>
+          <a:ln>
+            <a:noFill/>
+          </a:ln>
+        </p:spPr>
+        <p:style>
+          <a:lnRef idx="1">
+            <a:schemeClr val="accent1"/>
+          </a:lnRef>
+          <a:fillRef idx="3">
+            <a:schemeClr val="accent1"/>
+          </a:fillRef>
+          <a:effectRef idx="2">
+            <a:schemeClr val="accent1"/>
+          </a:effectRef>
+          <a:fontRef idx="minor">
+            <a:schemeClr val="lt1"/>
+          </a:fontRef>
+        </p:style>
+        <p:txBody>
+          <a:bodyPr rtlCol="0" anchor="ctr"/>
+          <a:lstStyle/>
+          <a:p>
+            <a:pPr algn="ctr"/>
+          </a:p>
+        </p:txBody>
+      </p:sp>
+      <p:sp>
+        <p:nvSpPr>
+          <p:cNvPr id="4" name="TextBox 3"/>
+          <p:cNvSpPr txBox="1"/>
+          <p:nvPr/>
+        </p:nvSpPr>
+        <p:spPr>
+          <a:xfrm>
+            <a:off x="731520" y="411480"/>
+            <a:ext cx="9144000" cy="320040"/>
+          </a:xfrm>
+          <a:prstGeom prst="rect">
+            <a:avLst/>
+          </a:prstGeom>
+          <a:noFill/>
+        </p:spPr>
+        <p:txBody>
+          <a:bodyPr wrap="square">
+            <a:spAutoFit/>
+          </a:bodyPr>
+          <a:lstStyle/>
+          <a:p>
+            <a:pPr>
+              <a:defRPr sz="1000" b="1">
+                <a:solidFill>
+                  <a:srgbClr val="FF7A00"/>
+                </a:solidFill>
+              </a:defRPr>
+            </a:pPr>
+            <a:r>
+              <a:t>TECHNICAL PROJECT REVIEW | GOV-TECH &amp; SPATIAL INFORMATICS</a:t>
+            </a:r>
+          </a:p>
+        </p:txBody>
+      </p:sp>
+      <p:sp>
+        <p:nvSpPr>
+          <p:cNvPr id="5" name="TextBox 4"/>
+          <p:cNvSpPr txBox="1"/>
+          <p:nvPr/>
+        </p:nvSpPr>
+        <p:spPr>
+          <a:xfrm>
+            <a:off x="731520" y="685800"/>
+            <a:ext cx="9601200" cy="685800"/>
+          </a:xfrm>
+          <a:prstGeom prst="rect">
+            <a:avLst/>
+          </a:prstGeom>
+          <a:noFill/>
+        </p:spPr>
+        <p:txBody>
+          <a:bodyPr wrap="square">
+            <a:spAutoFit/>
+          </a:bodyPr>
+          <a:lstStyle/>
+          <a:p>
+            <a:pPr>
+              <a:defRPr sz="2200" b="1">
+                <a:solidFill>
+                  <a:srgbClr val="F0F6FC"/>
+                </a:solidFill>
+              </a:defRPr>
+            </a:pPr>
+            <a:r>
+              <a:t>Conclusion &amp; Project Defense / Q&amp;A</a:t>
+            </a:r>
+          </a:p>
+        </p:txBody>
+      </p:sp>
+      <p:sp>
+        <p:nvSpPr>
+          <p:cNvPr id="6" name="TextBox 5"/>
+          <p:cNvSpPr txBox="1"/>
+          <p:nvPr/>
+        </p:nvSpPr>
+        <p:spPr>
+          <a:xfrm>
+            <a:off x="10515600" y="411480"/>
+            <a:ext cx="914400" cy="365760"/>
+          </a:xfrm>
+          <a:prstGeom prst="rect">
+            <a:avLst/>
+          </a:prstGeom>
+          <a:noFill/>
+        </p:spPr>
+        <p:txBody>
+          <a:bodyPr wrap="none">
+            <a:spAutoFit/>
+          </a:bodyPr>
+          <a:lstStyle/>
+          <a:p>
+            <a:pPr algn="r">
+              <a:defRPr sz="1100" b="1">
+                <a:solidFill>
+                  <a:srgbClr val="8B949E"/>
+                </a:solidFill>
+              </a:defRPr>
+            </a:pPr>
+            <a:r>
+              <a:t>15 / 15</a:t>
+            </a:r>
+          </a:p>
+        </p:txBody>
+      </p:sp>
+      <p:sp>
+        <p:nvSpPr>
+          <p:cNvPr id="7" name="Rounded Rectangle 6"/>
+          <p:cNvSpPr/>
+          <p:nvPr/>
+        </p:nvSpPr>
+        <p:spPr>
+          <a:xfrm>
+            <a:off x="731520" y="1645920"/>
+            <a:ext cx="6217920" cy="4572000"/>
+          </a:xfrm>
+          <a:prstGeom prst="roundRect">
+            <a:avLst/>
+          </a:prstGeom>
+          <a:solidFill>
+            <a:srgbClr val="112240"/>
+          </a:solidFill>
+          <a:ln w="19050">
+            <a:solidFill>
+              <a:srgbClr val="233554"/>
+            </a:solidFill>
+          </a:ln>
+        </p:spPr>
+        <p:style>
+          <a:lnRef idx="1">
+            <a:schemeClr val="accent1"/>
+          </a:lnRef>
+          <a:fillRef idx="3">
+            <a:schemeClr val="accent1"/>
+          </a:fillRef>
+          <a:effectRef idx="2">
+            <a:schemeClr val="accent1"/>
+          </a:effectRef>
+          <a:fontRef idx="minor">
+            <a:schemeClr val="lt1"/>
+          </a:fontRef>
+        </p:style>
+        <p:txBody>
+          <a:bodyPr rtlCol="0" anchor="ctr"/>
+          <a:lstStyle/>
+          <a:p>
+            <a:pPr algn="ctr"/>
+          </a:p>
+        </p:txBody>
+      </p:sp>
+      <p:sp>
+        <p:nvSpPr>
+          <p:cNvPr id="8" name="TextBox 7"/>
+          <p:cNvSpPr txBox="1"/>
+          <p:nvPr/>
+        </p:nvSpPr>
+        <p:spPr>
+          <a:xfrm>
+            <a:off x="914400" y="1783080"/>
+            <a:ext cx="5852160" cy="4297680"/>
+          </a:xfrm>
+          <a:prstGeom prst="rect">
+            <a:avLst/>
+          </a:prstGeom>
+          <a:noFill/>
+        </p:spPr>
+        <p:txBody>
+          <a:bodyPr wrap="square">
+            <a:spAutoFit/>
+          </a:bodyPr>
+          <a:lstStyle/>
+          <a:p>
+            <a:pPr>
+              <a:spcAft>
+                <a:spcPts val="800"/>
+              </a:spcAft>
+              <a:defRPr sz="1500" b="1">
+                <a:solidFill>
+                  <a:srgbClr val="10B981"/>
+                </a:solidFill>
+              </a:defRPr>
+            </a:pPr>
+            <a:r>
+              <a:t>✅ Key Deliverables &amp; Project Summary</a:t>
+            </a:r>
+          </a:p>
+          <a:p>
+            <a:pPr>
+              <a:spcAft>
+                <a:spcPts val="500"/>
+              </a:spcAft>
+              <a:defRPr sz="1100">
+                <a:solidFill>
+                  <a:srgbClr val="F0F6FC"/>
+                </a:solidFill>
+              </a:defRPr>
+            </a:pPr>
+            <a:r>
+              <a:t>• Complete Statutory Digitization: Successfully encoded all 6 stages of the RFCTLARR Act 2013 into an automated, transparent platform.</a:t>
+            </a:r>
+          </a:p>
+          <a:p>
+            <a:pPr>
+              <a:spcAft>
+                <a:spcPts val="500"/>
+              </a:spcAft>
+              <a:defRPr sz="1100">
+                <a:solidFill>
+                  <a:srgbClr val="F0F6FC"/>
+                </a:solidFill>
+              </a:defRPr>
+            </a:pPr>
+            <a:r>
+              <a:t>• Section 25 Statutory Safeguard: Active 12-month countdown radar eliminates catastrophic multi-crore acquisition lapses.</a:t>
+            </a:r>
+          </a:p>
+          <a:p>
+            <a:pPr>
+              <a:spcAft>
+                <a:spcPts val="500"/>
+              </a:spcAft>
+              <a:defRPr sz="1100">
+                <a:solidFill>
+                  <a:srgbClr val="F0F6FC"/>
+                </a:solidFill>
+              </a:defRPr>
+            </a:pPr>
+            <a:r>
+              <a:t>• Sub-Meter Spatial Precision: Replaced ambiguous point markers with verified cadastral polygons and satellite alignment overlays.</a:t>
+            </a:r>
+          </a:p>
+          <a:p>
+            <a:pPr>
+              <a:spcAft>
+                <a:spcPts val="500"/>
+              </a:spcAft>
+              <a:defRPr sz="1100">
+                <a:solidFill>
+                  <a:srgbClr val="F0F6FC"/>
+                </a:solidFill>
+              </a:defRPr>
+            </a:pPr>
+            <a:r>
+              <a:t>• Empowered Citizens &amp; Fair Compensation: Automated 100% Solatium and PFMS direct benefit transfers guarantee justice for landholders.</a:t>
+            </a:r>
+          </a:p>
+          <a:p>
+            <a:pPr>
+              <a:spcAft>
+                <a:spcPts val="500"/>
+              </a:spcAft>
+              <a:defRPr sz="1100">
+                <a:solidFill>
+                  <a:srgbClr val="F0F6FC"/>
+                </a:solidFill>
+              </a:defRPr>
+            </a:pPr>
+            <a:r>
+              <a:t>• Robust &amp; Extensible Architecture: Full-stack Node.js + SQLite/MySQL architecture with 100% test coverage and OpenAPI documentation.</a:t>
+            </a:r>
+          </a:p>
+          <a:p>
+            <a:pPr>
+              <a:spcAft>
+                <a:spcPts val="500"/>
+              </a:spcAft>
+              <a:defRPr sz="1100">
+                <a:solidFill>
+                  <a:srgbClr val="F0F6FC"/>
+                </a:solidFill>
+              </a:defRPr>
+            </a:pPr>
+            <a:r>
+              <a:t>• Ready for Immediate National Deployment across all 28 States &amp; 8 Union Territories.</a:t>
+            </a:r>
+          </a:p>
+        </p:txBody>
+      </p:sp>
+      <p:sp>
+        <p:nvSpPr>
+          <p:cNvPr id="9" name="Rounded Rectangle 8"/>
+          <p:cNvSpPr/>
+          <p:nvPr/>
+        </p:nvSpPr>
+        <p:spPr>
+          <a:xfrm>
+            <a:off x="7315200" y="1645920"/>
+            <a:ext cx="4114800" cy="4572000"/>
+          </a:xfrm>
+          <a:prstGeom prst="roundRect">
+            <a:avLst/>
+          </a:prstGeom>
+          <a:solidFill>
+            <a:srgbClr val="112240"/>
+          </a:solidFill>
+          <a:ln w="19050">
+            <a:solidFill>
+              <a:srgbClr val="233554"/>
+            </a:solidFill>
+          </a:ln>
+        </p:spPr>
+        <p:style>
+          <a:lnRef idx="1">
+            <a:schemeClr val="accent1"/>
+          </a:lnRef>
+          <a:fillRef idx="3">
+            <a:schemeClr val="accent1"/>
+          </a:fillRef>
+          <a:effectRef idx="2">
+            <a:schemeClr val="accent1"/>
+          </a:effectRef>
+          <a:fontRef idx="minor">
+            <a:schemeClr val="lt1"/>
+          </a:fontRef>
+        </p:style>
+        <p:txBody>
+          <a:bodyPr rtlCol="0" anchor="ctr"/>
+          <a:lstStyle/>
+          <a:p>
+            <a:pPr algn="ctr"/>
+          </a:p>
+        </p:txBody>
+      </p:sp>
+      <p:sp>
+        <p:nvSpPr>
+          <p:cNvPr id="10" name="TextBox 9"/>
+          <p:cNvSpPr txBox="1"/>
+          <p:nvPr/>
+        </p:nvSpPr>
+        <p:spPr>
+          <a:xfrm>
+            <a:off x="7498080" y="1783080"/>
+            <a:ext cx="3749040" cy="4297680"/>
+          </a:xfrm>
+          <a:prstGeom prst="rect">
+            <a:avLst/>
+          </a:prstGeom>
+          <a:noFill/>
+        </p:spPr>
+        <p:txBody>
+          <a:bodyPr wrap="square">
+            <a:spAutoFit/>
+          </a:bodyPr>
+          <a:lstStyle/>
+          <a:p>
+            <a:pPr>
+              <a:spcAft>
+                <a:spcPts val="800"/>
+              </a:spcAft>
+              <a:defRPr sz="1500" b="1">
+                <a:solidFill>
+                  <a:srgbClr val="FF7A00"/>
+                </a:solidFill>
+              </a:defRPr>
+            </a:pPr>
+            <a:r>
+              <a:t>🌐 Verification &amp; Project Links</a:t>
+            </a:r>
+          </a:p>
+          <a:p>
+            <a:pPr>
+              <a:spcAft>
+                <a:spcPts val="500"/>
+              </a:spcAft>
+              <a:defRPr sz="1100">
+                <a:solidFill>
+                  <a:srgbClr val="F0F6FC"/>
+                </a:solidFill>
+              </a:defRPr>
+            </a:pPr>
+            <a:r>
+              <a:t>• Live Web Portal:</a:t>
             </a:r>
             <a:br/>
             <a:r>
@@ -4069,9 +6959,9 @@
           <a:p>
             <a:pPr>
               <a:spcAft>
-                <a:spcPts val="600"/>
-              </a:spcAft>
-              <a:defRPr sz="1200">
+                <a:spcPts val="500"/>
+              </a:spcAft>
+              <a:defRPr sz="1100">
                 <a:solidFill>
                   <a:srgbClr val="F0F6FC"/>
                 </a:solidFill>
@@ -4088,54 +6978,54 @@
           <a:p>
             <a:pPr>
               <a:spcAft>
-                <a:spcPts val="600"/>
-              </a:spcAft>
-              <a:defRPr sz="1200">
-                <a:solidFill>
-                  <a:srgbClr val="F0F6FC"/>
-                </a:solidFill>
-              </a:defRPr>
-            </a:pPr>
-            <a:r>
-              <a:t>• Local Dev Instance:</a:t>
+                <a:spcPts val="500"/>
+              </a:spcAft>
+              <a:defRPr sz="1100">
+                <a:solidFill>
+                  <a:srgbClr val="F0F6FC"/>
+                </a:solidFill>
+              </a:defRPr>
+            </a:pPr>
+            <a:r>
+              <a:t>• Interactive Web Slides Deck:</a:t>
             </a:r>
             <a:br/>
             <a:r>
-              <a:t>http://localhost:8000/</a:t>
-            </a:r>
-          </a:p>
-          <a:p>
-            <a:pPr>
-              <a:spcAft>
-                <a:spcPts val="600"/>
-              </a:spcAft>
-              <a:defRPr sz="1200">
-                <a:solidFill>
-                  <a:srgbClr val="F0F6FC"/>
-                </a:solidFill>
-              </a:defRPr>
-            </a:pPr>
-            <a:r>
-              <a:t>• Interactive Web Slides Deck:</a:t>
+              <a:t>presentation.html (Features speaker notes, timer &amp; live demo links)</a:t>
+            </a:r>
+          </a:p>
+          <a:p>
+            <a:pPr>
+              <a:spcAft>
+                <a:spcPts val="500"/>
+              </a:spcAft>
+              <a:defRPr sz="1100">
+                <a:solidFill>
+                  <a:srgbClr val="F0F6FC"/>
+                </a:solidFill>
+              </a:defRPr>
+            </a:pPr>
+            <a:r>
+              <a:t>• Local Instance:</a:t>
             </a:r>
             <a:br/>
             <a:r>
-              <a:t>presentation.html (Includes speaker notes, timer &amp; live demo links)</a:t>
-            </a:r>
-          </a:p>
-          <a:p>
-            <a:pPr>
-              <a:spcAft>
-                <a:spcPts val="600"/>
-              </a:spcAft>
-              <a:defRPr sz="1200">
-                <a:solidFill>
-                  <a:srgbClr val="F0F6FC"/>
-                </a:solidFill>
-              </a:defRPr>
-            </a:pPr>
-            <a:r>
-              <a:t>• Ready for Immediate National Deployment!</a:t>
+              <a:t>http://localhost:3000/ (REST API &amp; Frontend)</a:t>
+            </a:r>
+          </a:p>
+          <a:p>
+            <a:pPr>
+              <a:spcAft>
+                <a:spcPts val="500"/>
+              </a:spcAft>
+              <a:defRPr sz="1100">
+                <a:solidFill>
+                  <a:srgbClr val="F0F6FC"/>
+                </a:solidFill>
+              </a:defRPr>
+            </a:pPr>
+            <a:r>
+              <a:t>• Thank You! We are open for questions and technical evaluation from the Review Committee.</a:t>
             </a:r>
           </a:p>
         </p:txBody>
@@ -4203,14 +7093,57 @@
       </p:sp>
       <p:sp>
         <p:nvSpPr>
-          <p:cNvPr id="3" name="TextBox 2"/>
+          <p:cNvPr id="3" name="Rectangle 2"/>
+          <p:cNvSpPr/>
+          <p:nvPr/>
+        </p:nvSpPr>
+        <p:spPr>
+          <a:xfrm>
+            <a:off x="731520" y="320040"/>
+            <a:ext cx="10728655" cy="36576"/>
+          </a:xfrm>
+          <a:prstGeom prst="rect">
+            <a:avLst/>
+          </a:prstGeom>
+          <a:solidFill>
+            <a:srgbClr val="FF7A00"/>
+          </a:solidFill>
+          <a:ln>
+            <a:noFill/>
+          </a:ln>
+        </p:spPr>
+        <p:style>
+          <a:lnRef idx="1">
+            <a:schemeClr val="accent1"/>
+          </a:lnRef>
+          <a:fillRef idx="3">
+            <a:schemeClr val="accent1"/>
+          </a:fillRef>
+          <a:effectRef idx="2">
+            <a:schemeClr val="accent1"/>
+          </a:effectRef>
+          <a:fontRef idx="minor">
+            <a:schemeClr val="lt1"/>
+          </a:fontRef>
+        </p:style>
+        <p:txBody>
+          <a:bodyPr rtlCol="0" anchor="ctr"/>
+          <a:lstStyle/>
+          <a:p>
+            <a:pPr algn="ctr"/>
+          </a:p>
+        </p:txBody>
+      </p:sp>
+      <p:sp>
+        <p:nvSpPr>
+          <p:cNvPr id="4" name="TextBox 3"/>
           <p:cNvSpPr txBox="1"/>
           <p:nvPr/>
         </p:nvSpPr>
         <p:spPr>
           <a:xfrm>
-            <a:off x="731520" y="365760"/>
-            <a:ext cx="10698480" cy="365760"/>
+            <a:off x="731520" y="411480"/>
+            <a:ext cx="9144000" cy="320040"/>
           </a:xfrm>
           <a:prstGeom prst="rect">
             <a:avLst/>
@@ -4224,28 +7157,28 @@
           <a:lstStyle/>
           <a:p>
             <a:pPr>
-              <a:defRPr sz="1100" b="1">
+              <a:defRPr sz="1000" b="1">
                 <a:solidFill>
                   <a:srgbClr val="FF7A00"/>
                 </a:solidFill>
               </a:defRPr>
             </a:pPr>
             <a:r>
-              <a:t>PROBLEM STATEMENT #26016 | MORD &amp; DOLR</a:t>
-            </a:r>
-          </a:p>
-        </p:txBody>
-      </p:sp>
-      <p:sp>
-        <p:nvSpPr>
-          <p:cNvPr id="4" name="TextBox 3"/>
+              <a:t>TECHNICAL PROJECT REVIEW | GOV-TECH &amp; SPATIAL INFORMATICS</a:t>
+            </a:r>
+          </a:p>
+        </p:txBody>
+      </p:sp>
+      <p:sp>
+        <p:nvSpPr>
+          <p:cNvPr id="5" name="TextBox 4"/>
           <p:cNvSpPr txBox="1"/>
           <p:nvPr/>
         </p:nvSpPr>
         <p:spPr>
           <a:xfrm>
-            <a:off x="731520" y="640080"/>
-            <a:ext cx="10698480" cy="731520"/>
+            <a:off x="731520" y="685800"/>
+            <a:ext cx="9601200" cy="685800"/>
           </a:xfrm>
           <a:prstGeom prst="rect">
             <a:avLst/>
@@ -4259,28 +7192,63 @@
           <a:lstStyle/>
           <a:p>
             <a:pPr>
-              <a:defRPr sz="2400" b="1">
-                <a:solidFill>
-                  <a:srgbClr val="F0F6FC"/>
-                </a:solidFill>
-              </a:defRPr>
-            </a:pPr>
-            <a:r>
-              <a:t>The National Land Acquisition Challenge &amp; Pain Points</a:t>
-            </a:r>
-          </a:p>
-        </p:txBody>
-      </p:sp>
-      <p:sp>
-        <p:nvSpPr>
-          <p:cNvPr id="5" name="Rounded Rectangle 4"/>
+              <a:defRPr sz="2200" b="1">
+                <a:solidFill>
+                  <a:srgbClr val="F0F6FC"/>
+                </a:solidFill>
+              </a:defRPr>
+            </a:pPr>
+            <a:r>
+              <a:t>Project Overview &amp; Executive Summary</a:t>
+            </a:r>
+          </a:p>
+        </p:txBody>
+      </p:sp>
+      <p:sp>
+        <p:nvSpPr>
+          <p:cNvPr id="6" name="TextBox 5"/>
+          <p:cNvSpPr txBox="1"/>
+          <p:nvPr/>
+        </p:nvSpPr>
+        <p:spPr>
+          <a:xfrm>
+            <a:off x="10515600" y="411480"/>
+            <a:ext cx="914400" cy="365760"/>
+          </a:xfrm>
+          <a:prstGeom prst="rect">
+            <a:avLst/>
+          </a:prstGeom>
+          <a:noFill/>
+        </p:spPr>
+        <p:txBody>
+          <a:bodyPr wrap="none">
+            <a:spAutoFit/>
+          </a:bodyPr>
+          <a:lstStyle/>
+          <a:p>
+            <a:pPr algn="r">
+              <a:defRPr sz="1100" b="1">
+                <a:solidFill>
+                  <a:srgbClr val="8B949E"/>
+                </a:solidFill>
+              </a:defRPr>
+            </a:pPr>
+            <a:r>
+              <a:t>02 / 15</a:t>
+            </a:r>
+          </a:p>
+        </p:txBody>
+      </p:sp>
+      <p:sp>
+        <p:nvSpPr>
+          <p:cNvPr id="7" name="Rounded Rectangle 6"/>
           <p:cNvSpPr/>
           <p:nvPr/>
         </p:nvSpPr>
         <p:spPr>
           <a:xfrm>
             <a:off x="731520" y="1645920"/>
-            <a:ext cx="3291840" cy="4572000"/>
+            <a:ext cx="5120640" cy="4572000"/>
           </a:xfrm>
           <a:prstGeom prst="roundRect">
             <a:avLst/>
@@ -4318,14 +7286,14 @@
       </p:sp>
       <p:sp>
         <p:nvSpPr>
-          <p:cNvPr id="6" name="TextBox 5"/>
+          <p:cNvPr id="8" name="TextBox 7"/>
           <p:cNvSpPr txBox="1"/>
           <p:nvPr/>
         </p:nvSpPr>
         <p:spPr>
           <a:xfrm>
             <a:off x="914400" y="1783080"/>
-            <a:ext cx="2926080" cy="4297680"/>
+            <a:ext cx="4754880" cy="4297680"/>
           </a:xfrm>
           <a:prstGeom prst="rect">
             <a:avLst/>
@@ -4340,75 +7308,105 @@
           <a:p>
             <a:pPr>
               <a:spcAft>
-                <a:spcPts val="1000"/>
-              </a:spcAft>
-              <a:defRPr sz="1600" b="1">
-                <a:solidFill>
-                  <a:srgbClr val="EF4444"/>
-                </a:solidFill>
-              </a:defRPr>
-            </a:pPr>
-            <a:r>
-              <a:t>1. Severe Project Delays</a:t>
-            </a:r>
-          </a:p>
-          <a:p>
-            <a:pPr>
-              <a:spcAft>
-                <a:spcPts val="600"/>
-              </a:spcAft>
-              <a:defRPr sz="1200">
-                <a:solidFill>
-                  <a:srgbClr val="F0F6FC"/>
-                </a:solidFill>
-              </a:defRPr>
-            </a:pPr>
-            <a:r>
-              <a:t>• Infrastructure projects (Highways, Railways, Industrial Corridors, Metro) suffer 3-7 year delays solely due to land acquisition.</a:t>
-            </a:r>
-          </a:p>
-          <a:p>
-            <a:pPr>
-              <a:spcAft>
-                <a:spcPts val="600"/>
-              </a:spcAft>
-              <a:defRPr sz="1200">
-                <a:solidFill>
-                  <a:srgbClr val="F0F6FC"/>
-                </a:solidFill>
-              </a:defRPr>
-            </a:pPr>
-            <a:r>
-              <a:t>• Over ₹4.5 Lakh Crore in cumulative cost overruns across 1,800+ national projects (MOSPI reports).</a:t>
-            </a:r>
-          </a:p>
-          <a:p>
-            <a:pPr>
-              <a:spcAft>
-                <a:spcPts val="600"/>
-              </a:spcAft>
-              <a:defRPr sz="1200">
-                <a:solidFill>
-                  <a:srgbClr val="F0F6FC"/>
-                </a:solidFill>
-              </a:defRPr>
-            </a:pPr>
-            <a:r>
-              <a:t>• Physical file movements across Village, Taluk, District, and State headquarters take months.</a:t>
-            </a:r>
-          </a:p>
-        </p:txBody>
-      </p:sp>
-      <p:sp>
-        <p:nvSpPr>
-          <p:cNvPr id="7" name="Rounded Rectangle 6"/>
+                <a:spcPts val="800"/>
+              </a:spcAft>
+              <a:defRPr sz="1500" b="1">
+                <a:solidFill>
+                  <a:srgbClr val="FF7A00"/>
+                </a:solidFill>
+              </a:defRPr>
+            </a:pPr>
+            <a:r>
+              <a:t>📌 Project Abstract &amp; Context</a:t>
+            </a:r>
+          </a:p>
+          <a:p>
+            <a:pPr>
+              <a:spcAft>
+                <a:spcPts val="500"/>
+              </a:spcAft>
+              <a:defRPr sz="1100">
+                <a:solidFill>
+                  <a:srgbClr val="F0F6FC"/>
+                </a:solidFill>
+              </a:defRPr>
+            </a:pPr>
+            <a:r>
+              <a:t>• Land acquisition is the single biggest bottleneck for India's national infrastructure expansion (Highways, Railways, Industrial Corridors, Smart Cities).</a:t>
+            </a:r>
+          </a:p>
+          <a:p>
+            <a:pPr>
+              <a:spcAft>
+                <a:spcPts val="500"/>
+              </a:spcAft>
+              <a:defRPr sz="1100">
+                <a:solidFill>
+                  <a:srgbClr val="F0F6FC"/>
+                </a:solidFill>
+              </a:defRPr>
+            </a:pPr>
+            <a:r>
+              <a:t>• NLAMS (National Land Acquisition &amp; Management System) is an enterprise-grade digital portal engineered to unify all 28 States and 8 Union Territories under a single transparent monitoring framework.</a:t>
+            </a:r>
+          </a:p>
+          <a:p>
+            <a:pPr>
+              <a:spcAft>
+                <a:spcPts val="500"/>
+              </a:spcAft>
+              <a:defRPr sz="1100">
+                <a:solidFill>
+                  <a:srgbClr val="F0F6FC"/>
+                </a:solidFill>
+              </a:defRPr>
+            </a:pPr>
+            <a:r>
+              <a:t>• Strictly complies with the Right to Fair Compensation and Transparency in Land Acquisition, Rehabilitation and Resettlement (RFCTLARR) Act, 2013.</a:t>
+            </a:r>
+          </a:p>
+          <a:p>
+            <a:pPr>
+              <a:spcAft>
+                <a:spcPts val="500"/>
+              </a:spcAft>
+              <a:defRPr sz="1100">
+                <a:solidFill>
+                  <a:srgbClr val="F0F6FC"/>
+                </a:solidFill>
+              </a:defRPr>
+            </a:pPr>
+            <a:r>
+              <a:t>• Delivers end-to-end digitisation from initial Social Impact Assessment (SIA) proposal to Section 38 physical possession transfer.</a:t>
+            </a:r>
+          </a:p>
+          <a:p>
+            <a:pPr>
+              <a:spcAft>
+                <a:spcPts val="500"/>
+              </a:spcAft>
+              <a:defRPr sz="1100">
+                <a:solidFill>
+                  <a:srgbClr val="F0F6FC"/>
+                </a:solidFill>
+              </a:defRPr>
+            </a:pPr>
+            <a:r>
+              <a:t>• Integrates state revenue registries (UP Bhulekh, MahaBhumi, Bhoomi, Tamil Nilam, Webland) into a unified national standard.</a:t>
+            </a:r>
+          </a:p>
+        </p:txBody>
+      </p:sp>
+      <p:sp>
+        <p:nvSpPr>
+          <p:cNvPr id="9" name="Rounded Rectangle 8"/>
           <p:cNvSpPr/>
           <p:nvPr/>
         </p:nvSpPr>
         <p:spPr>
           <a:xfrm>
-            <a:off x="4389120" y="1645920"/>
-            <a:ext cx="3291840" cy="4572000"/>
+            <a:off x="6217920" y="1645920"/>
+            <a:ext cx="5212080" cy="4572000"/>
           </a:xfrm>
           <a:prstGeom prst="roundRect">
             <a:avLst/>
@@ -4446,14 +7444,14 @@
       </p:sp>
       <p:sp>
         <p:nvSpPr>
-          <p:cNvPr id="8" name="TextBox 7"/>
+          <p:cNvPr id="10" name="TextBox 9"/>
           <p:cNvSpPr txBox="1"/>
           <p:nvPr/>
         </p:nvSpPr>
         <p:spPr>
           <a:xfrm>
-            <a:off x="4572000" y="1783080"/>
-            <a:ext cx="2926080" cy="4297680"/>
+            <a:off x="6400800" y="1783080"/>
+            <a:ext cx="4846320" cy="4297680"/>
           </a:xfrm>
           <a:prstGeom prst="rect">
             <a:avLst/>
@@ -4468,189 +7466,91 @@
           <a:p>
             <a:pPr>
               <a:spcAft>
-                <a:spcPts val="1000"/>
-              </a:spcAft>
-              <a:defRPr sz="1600" b="1">
-                <a:solidFill>
-                  <a:srgbClr val="FF7A00"/>
-                </a:solidFill>
-              </a:defRPr>
-            </a:pPr>
-            <a:r>
-              <a:t>2. Section 25 Statutory Lapse Risk</a:t>
-            </a:r>
-          </a:p>
-          <a:p>
-            <a:pPr>
-              <a:spcAft>
-                <a:spcPts val="600"/>
-              </a:spcAft>
-              <a:defRPr sz="1200">
-                <a:solidFill>
-                  <a:srgbClr val="F0F6FC"/>
-                </a:solidFill>
-              </a:defRPr>
-            </a:pPr>
-            <a:r>
-              <a:t>• Under RFCTLARR Act 2013 (Section 25), if an Award under Sec 23 is not declared within 12 MONTHS of Sec 19 Declaration, the acquisition lapses completely.</a:t>
-            </a:r>
-          </a:p>
-          <a:p>
-            <a:pPr>
-              <a:spcAft>
-                <a:spcPts val="600"/>
-              </a:spcAft>
-              <a:defRPr sz="1200">
-                <a:solidFill>
-                  <a:srgbClr val="F0F6FC"/>
-                </a:solidFill>
-              </a:defRPr>
-            </a:pPr>
-            <a:r>
-              <a:t>• Lapse forces the government to restart from Section 4 SIA, losing crores and years.</a:t>
-            </a:r>
-          </a:p>
-          <a:p>
-            <a:pPr>
-              <a:spcAft>
-                <a:spcPts val="600"/>
-              </a:spcAft>
-              <a:defRPr sz="1200">
-                <a:solidFill>
-                  <a:srgbClr val="F0F6FC"/>
-                </a:solidFill>
-              </a:defRPr>
-            </a:pPr>
-            <a:r>
-              <a:t>• Existing manual monitoring lacks automated countdown triggers and early warning mechanisms.</a:t>
-            </a:r>
-          </a:p>
-        </p:txBody>
-      </p:sp>
-      <p:sp>
-        <p:nvSpPr>
-          <p:cNvPr id="9" name="Rounded Rectangle 8"/>
-          <p:cNvSpPr/>
-          <p:nvPr/>
-        </p:nvSpPr>
-        <p:spPr>
-          <a:xfrm>
-            <a:off x="8046720" y="1645920"/>
-            <a:ext cx="3383280" cy="4572000"/>
-          </a:xfrm>
-          <a:prstGeom prst="roundRect">
-            <a:avLst/>
-          </a:prstGeom>
-          <a:solidFill>
-            <a:srgbClr val="112240"/>
-          </a:solidFill>
-          <a:ln w="19050">
-            <a:solidFill>
-              <a:srgbClr val="233554"/>
-            </a:solidFill>
-          </a:ln>
-        </p:spPr>
-        <p:style>
-          <a:lnRef idx="1">
-            <a:schemeClr val="accent1"/>
-          </a:lnRef>
-          <a:fillRef idx="3">
-            <a:schemeClr val="accent1"/>
-          </a:fillRef>
-          <a:effectRef idx="2">
-            <a:schemeClr val="accent1"/>
-          </a:effectRef>
-          <a:fontRef idx="minor">
-            <a:schemeClr val="lt1"/>
-          </a:fontRef>
-        </p:style>
-        <p:txBody>
-          <a:bodyPr rtlCol="0" anchor="ctr"/>
-          <a:lstStyle/>
-          <a:p>
-            <a:pPr algn="ctr"/>
-          </a:p>
-        </p:txBody>
-      </p:sp>
-      <p:sp>
-        <p:nvSpPr>
-          <p:cNvPr id="10" name="TextBox 9"/>
-          <p:cNvSpPr txBox="1"/>
-          <p:nvPr/>
-        </p:nvSpPr>
-        <p:spPr>
-          <a:xfrm>
-            <a:off x="8229600" y="1783080"/>
-            <a:ext cx="3017520" cy="4297680"/>
-          </a:xfrm>
-          <a:prstGeom prst="rect">
-            <a:avLst/>
-          </a:prstGeom>
-          <a:noFill/>
-        </p:spPr>
-        <p:txBody>
-          <a:bodyPr wrap="square">
-            <a:spAutoFit/>
-          </a:bodyPr>
-          <a:lstStyle/>
-          <a:p>
-            <a:pPr>
-              <a:spcAft>
-                <a:spcPts val="1000"/>
-              </a:spcAft>
-              <a:defRPr sz="1600" b="1">
-                <a:solidFill>
-                  <a:srgbClr val="F5A623"/>
-                </a:solidFill>
-              </a:defRPr>
-            </a:pPr>
-            <a:r>
-              <a:t>3. Federal &amp; Spatial Blindspots</a:t>
-            </a:r>
-          </a:p>
-          <a:p>
-            <a:pPr>
-              <a:spcAft>
-                <a:spcPts val="600"/>
-              </a:spcAft>
-              <a:defRPr sz="1200">
-                <a:solidFill>
-                  <a:srgbClr val="F0F6FC"/>
-                </a:solidFill>
-              </a:defRPr>
-            </a:pPr>
-            <a:r>
-              <a:t>• Federal disconnect: Land is a State subject (Entry 18), while Mega Infrastructure is a Central/Union subject (Entry 23/24).</a:t>
-            </a:r>
-          </a:p>
-          <a:p>
-            <a:pPr>
-              <a:spcAft>
-                <a:spcPts val="600"/>
-              </a:spcAft>
-              <a:defRPr sz="1200">
-                <a:solidFill>
-                  <a:srgbClr val="F0F6FC"/>
-                </a:solidFill>
-              </a:defRPr>
-            </a:pPr>
-            <a:r>
-              <a:t>• Generic maps (Google/OSM pins) lack sub-meter cadastral boundaries, leading to boundary disputes and High Court stays.</a:t>
-            </a:r>
-          </a:p>
-          <a:p>
-            <a:pPr>
-              <a:spcAft>
-                <a:spcPts val="600"/>
-              </a:spcAft>
-              <a:defRPr sz="1200">
-                <a:solidFill>
-                  <a:srgbClr val="F0F6FC"/>
-                </a:solidFill>
-              </a:defRPr>
-            </a:pPr>
-            <a:r>
-              <a:t>• Opaque compensation disbursal creates farmer distress, litigation, and duplicate claims.</a:t>
+                <a:spcPts val="800"/>
+              </a:spcAft>
+              <a:defRPr sz="1500" b="1">
+                <a:solidFill>
+                  <a:srgbClr val="10B981"/>
+                </a:solidFill>
+              </a:defRPr>
+            </a:pPr>
+            <a:r>
+              <a:t>💡 Key Technical &amp; Operational Objectives</a:t>
+            </a:r>
+          </a:p>
+          <a:p>
+            <a:pPr>
+              <a:spcAft>
+                <a:spcPts val="500"/>
+              </a:spcAft>
+              <a:defRPr sz="1100">
+                <a:solidFill>
+                  <a:srgbClr val="F0F6FC"/>
+                </a:solidFill>
+              </a:defRPr>
+            </a:pPr>
+            <a:r>
+              <a:t>• Eliminate Statutory Lapses: Provide continuous countdown monitoring under Section 25 to prevent costly project collapses.</a:t>
+            </a:r>
+          </a:p>
+          <a:p>
+            <a:pPr>
+              <a:spcAft>
+                <a:spcPts val="500"/>
+              </a:spcAft>
+              <a:defRPr sz="1100">
+                <a:solidFill>
+                  <a:srgbClr val="F0F6FC"/>
+                </a:solidFill>
+              </a:defRPr>
+            </a:pPr>
+            <a:r>
+              <a:t>• Sub-Meter Spatial Intelligence: Move beyond inaccurate point markers by overlaying true cadastral survey plot polygons on high-res satellite imagery.</a:t>
+            </a:r>
+          </a:p>
+          <a:p>
+            <a:pPr>
+              <a:spcAft>
+                <a:spcPts val="500"/>
+              </a:spcAft>
+              <a:defRPr sz="1100">
+                <a:solidFill>
+                  <a:srgbClr val="F0F6FC"/>
+                </a:solidFill>
+              </a:defRPr>
+            </a:pPr>
+            <a:r>
+              <a:t>• Transparent Compensation: Automate statutory multiplication factors, asset valuations, and mandatory 100% Solatium (Section 30).</a:t>
+            </a:r>
+          </a:p>
+          <a:p>
+            <a:pPr>
+              <a:spcAft>
+                <a:spcPts val="500"/>
+              </a:spcAft>
+              <a:defRPr sz="1100">
+                <a:solidFill>
+                  <a:srgbClr val="F0F6FC"/>
+                </a:solidFill>
+              </a:defRPr>
+            </a:pPr>
+            <a:r>
+              <a:t>• Tamper-Proof e-Office Workflow: Digitize green-noting sheets and enforce cryptographic Digital Signature Certificate (DSC) / SHA-256 seals.</a:t>
+            </a:r>
+          </a:p>
+          <a:p>
+            <a:pPr>
+              <a:spcAft>
+                <a:spcPts val="500"/>
+              </a:spcAft>
+              <a:defRPr sz="1100">
+                <a:solidFill>
+                  <a:srgbClr val="F0F6FC"/>
+                </a:solidFill>
+              </a:defRPr>
+            </a:pPr>
+            <a:r>
+              <a:t>• Direct Benefit Transfer (DBT): Eliminate cash intermediaries by linking awards directly to Aadhaar &amp; bank accounts via PFMS integration.</a:t>
             </a:r>
           </a:p>
         </p:txBody>
@@ -4718,14 +7618,57 @@
       </p:sp>
       <p:sp>
         <p:nvSpPr>
-          <p:cNvPr id="3" name="TextBox 2"/>
+          <p:cNvPr id="3" name="Rectangle 2"/>
+          <p:cNvSpPr/>
+          <p:nvPr/>
+        </p:nvSpPr>
+        <p:spPr>
+          <a:xfrm>
+            <a:off x="731520" y="320040"/>
+            <a:ext cx="10728655" cy="36576"/>
+          </a:xfrm>
+          <a:prstGeom prst="rect">
+            <a:avLst/>
+          </a:prstGeom>
+          <a:solidFill>
+            <a:srgbClr val="FF7A00"/>
+          </a:solidFill>
+          <a:ln>
+            <a:noFill/>
+          </a:ln>
+        </p:spPr>
+        <p:style>
+          <a:lnRef idx="1">
+            <a:schemeClr val="accent1"/>
+          </a:lnRef>
+          <a:fillRef idx="3">
+            <a:schemeClr val="accent1"/>
+          </a:fillRef>
+          <a:effectRef idx="2">
+            <a:schemeClr val="accent1"/>
+          </a:effectRef>
+          <a:fontRef idx="minor">
+            <a:schemeClr val="lt1"/>
+          </a:fontRef>
+        </p:style>
+        <p:txBody>
+          <a:bodyPr rtlCol="0" anchor="ctr"/>
+          <a:lstStyle/>
+          <a:p>
+            <a:pPr algn="ctr"/>
+          </a:p>
+        </p:txBody>
+      </p:sp>
+      <p:sp>
+        <p:nvSpPr>
+          <p:cNvPr id="4" name="TextBox 3"/>
           <p:cNvSpPr txBox="1"/>
           <p:nvPr/>
         </p:nvSpPr>
         <p:spPr>
           <a:xfrm>
-            <a:off x="731520" y="365760"/>
-            <a:ext cx="10698480" cy="365760"/>
+            <a:off x="731520" y="411480"/>
+            <a:ext cx="9144000" cy="320040"/>
           </a:xfrm>
           <a:prstGeom prst="rect">
             <a:avLst/>
@@ -4739,28 +7682,28 @@
           <a:lstStyle/>
           <a:p>
             <a:pPr>
-              <a:defRPr sz="1100" b="1">
+              <a:defRPr sz="1000" b="1">
                 <a:solidFill>
                   <a:srgbClr val="FF7A00"/>
                 </a:solidFill>
               </a:defRPr>
             </a:pPr>
             <a:r>
-              <a:t>PROBLEM STATEMENT #26016 | MORD &amp; DOLR</a:t>
-            </a:r>
-          </a:p>
-        </p:txBody>
-      </p:sp>
-      <p:sp>
-        <p:nvSpPr>
-          <p:cNvPr id="4" name="TextBox 3"/>
+              <a:t>TECHNICAL PROJECT REVIEW | GOV-TECH &amp; SPATIAL INFORMATICS</a:t>
+            </a:r>
+          </a:p>
+        </p:txBody>
+      </p:sp>
+      <p:sp>
+        <p:nvSpPr>
+          <p:cNvPr id="5" name="TextBox 4"/>
           <p:cNvSpPr txBox="1"/>
           <p:nvPr/>
         </p:nvSpPr>
         <p:spPr>
           <a:xfrm>
-            <a:off x="731520" y="640080"/>
-            <a:ext cx="10698480" cy="731520"/>
+            <a:off x="731520" y="685800"/>
+            <a:ext cx="9601200" cy="685800"/>
           </a:xfrm>
           <a:prstGeom prst="rect">
             <a:avLst/>
@@ -4774,28 +7717,63 @@
           <a:lstStyle/>
           <a:p>
             <a:pPr>
-              <a:defRPr sz="2400" b="1">
-                <a:solidFill>
-                  <a:srgbClr val="F0F6FC"/>
-                </a:solidFill>
-              </a:defRPr>
-            </a:pPr>
-            <a:r>
-              <a:t>Statutory Alignment: 6-Stage RFCTLARR Act 2013 Lifecycle</a:t>
-            </a:r>
-          </a:p>
-        </p:txBody>
-      </p:sp>
-      <p:sp>
-        <p:nvSpPr>
-          <p:cNvPr id="5" name="Rounded Rectangle 4"/>
+              <a:defRPr sz="2200" b="1">
+                <a:solidFill>
+                  <a:srgbClr val="F0F6FC"/>
+                </a:solidFill>
+              </a:defRPr>
+            </a:pPr>
+            <a:r>
+              <a:t>The National Land Acquisition Challenge &amp; Pain Points</a:t>
+            </a:r>
+          </a:p>
+        </p:txBody>
+      </p:sp>
+      <p:sp>
+        <p:nvSpPr>
+          <p:cNvPr id="6" name="TextBox 5"/>
+          <p:cNvSpPr txBox="1"/>
+          <p:nvPr/>
+        </p:nvSpPr>
+        <p:spPr>
+          <a:xfrm>
+            <a:off x="10515600" y="411480"/>
+            <a:ext cx="914400" cy="365760"/>
+          </a:xfrm>
+          <a:prstGeom prst="rect">
+            <a:avLst/>
+          </a:prstGeom>
+          <a:noFill/>
+        </p:spPr>
+        <p:txBody>
+          <a:bodyPr wrap="none">
+            <a:spAutoFit/>
+          </a:bodyPr>
+          <a:lstStyle/>
+          <a:p>
+            <a:pPr algn="r">
+              <a:defRPr sz="1100" b="1">
+                <a:solidFill>
+                  <a:srgbClr val="8B949E"/>
+                </a:solidFill>
+              </a:defRPr>
+            </a:pPr>
+            <a:r>
+              <a:t>03 / 15</a:t>
+            </a:r>
+          </a:p>
+        </p:txBody>
+      </p:sp>
+      <p:sp>
+        <p:nvSpPr>
+          <p:cNvPr id="7" name="Rounded Rectangle 6"/>
           <p:cNvSpPr/>
           <p:nvPr/>
         </p:nvSpPr>
         <p:spPr>
           <a:xfrm>
             <a:off x="731520" y="1645920"/>
-            <a:ext cx="3383280" cy="2103120"/>
+            <a:ext cx="3291840" cy="4572000"/>
           </a:xfrm>
           <a:prstGeom prst="roundRect">
             <a:avLst/>
@@ -4833,14 +7811,14 @@
       </p:sp>
       <p:sp>
         <p:nvSpPr>
-          <p:cNvPr id="6" name="TextBox 5"/>
+          <p:cNvPr id="8" name="TextBox 7"/>
           <p:cNvSpPr txBox="1"/>
           <p:nvPr/>
         </p:nvSpPr>
         <p:spPr>
           <a:xfrm>
             <a:off x="914400" y="1783080"/>
-            <a:ext cx="3017520" cy="1828800"/>
+            <a:ext cx="2926080" cy="4297680"/>
           </a:xfrm>
           <a:prstGeom prst="rect">
             <a:avLst/>
@@ -4855,45 +7833,75 @@
           <a:p>
             <a:pPr>
               <a:spcAft>
-                <a:spcPts val="1000"/>
-              </a:spcAft>
-              <a:defRPr sz="1600" b="1">
-                <a:solidFill>
-                  <a:srgbClr val="F5A623"/>
-                </a:solidFill>
-              </a:defRPr>
-            </a:pPr>
-            <a:r>
-              <a:t>Stage 1: SIA (Sec 4-7)</a:t>
-            </a:r>
-          </a:p>
-          <a:p>
-            <a:pPr>
-              <a:spcAft>
-                <a:spcPts val="600"/>
-              </a:spcAft>
-              <a:defRPr sz="1200">
-                <a:solidFill>
-                  <a:srgbClr val="F0F6FC"/>
-                </a:solidFill>
-              </a:defRPr>
-            </a:pPr>
-            <a:r>
-              <a:t>• Social Impact Assessment, Gram Sabha public hearing, Multi-Disciplinary Expert Group appraisal.</a:t>
-            </a:r>
-          </a:p>
-        </p:txBody>
-      </p:sp>
-      <p:sp>
-        <p:nvSpPr>
-          <p:cNvPr id="7" name="Rounded Rectangle 6"/>
+                <a:spcPts val="800"/>
+              </a:spcAft>
+              <a:defRPr sz="1500" b="1">
+                <a:solidFill>
+                  <a:srgbClr val="EF4444"/>
+                </a:solidFill>
+              </a:defRPr>
+            </a:pPr>
+            <a:r>
+              <a:t>1. Multi-Year Delays &amp; Escalations</a:t>
+            </a:r>
+          </a:p>
+          <a:p>
+            <a:pPr>
+              <a:spcAft>
+                <a:spcPts val="500"/>
+              </a:spcAft>
+              <a:defRPr sz="1100">
+                <a:solidFill>
+                  <a:srgbClr val="F0F6FC"/>
+                </a:solidFill>
+              </a:defRPr>
+            </a:pPr>
+            <a:r>
+              <a:t>• MOSPI infrastructure data reveals over ₹4.5 Lakh Crore in cumulative cost overruns across 1,800+ national projects.</a:t>
+            </a:r>
+          </a:p>
+          <a:p>
+            <a:pPr>
+              <a:spcAft>
+                <a:spcPts val="500"/>
+              </a:spcAft>
+              <a:defRPr sz="1100">
+                <a:solidFill>
+                  <a:srgbClr val="F0F6FC"/>
+                </a:solidFill>
+              </a:defRPr>
+            </a:pPr>
+            <a:r>
+              <a:t>• Land acquisition and right-of-way disputes account for nearly 70% of all infrastructure project delays.</a:t>
+            </a:r>
+          </a:p>
+          <a:p>
+            <a:pPr>
+              <a:spcAft>
+                <a:spcPts val="500"/>
+              </a:spcAft>
+              <a:defRPr sz="1100">
+                <a:solidFill>
+                  <a:srgbClr val="F0F6FC"/>
+                </a:solidFill>
+              </a:defRPr>
+            </a:pPr>
+            <a:r>
+              <a:t>• Physical file movements between Village, Taluk, District, and State headquarters take 18-24 months on average.</a:t>
+            </a:r>
+          </a:p>
+        </p:txBody>
+      </p:sp>
+      <p:sp>
+        <p:nvSpPr>
+          <p:cNvPr id="9" name="Rounded Rectangle 8"/>
           <p:cNvSpPr/>
           <p:nvPr/>
         </p:nvSpPr>
         <p:spPr>
           <a:xfrm>
             <a:off x="4389120" y="1645920"/>
-            <a:ext cx="3383280" cy="2103120"/>
+            <a:ext cx="3291840" cy="4572000"/>
           </a:xfrm>
           <a:prstGeom prst="roundRect">
             <a:avLst/>
@@ -4931,14 +7939,14 @@
       </p:sp>
       <p:sp>
         <p:nvSpPr>
-          <p:cNvPr id="8" name="TextBox 7"/>
+          <p:cNvPr id="10" name="TextBox 9"/>
           <p:cNvSpPr txBox="1"/>
           <p:nvPr/>
         </p:nvSpPr>
         <p:spPr>
           <a:xfrm>
             <a:off x="4572000" y="1783080"/>
-            <a:ext cx="3017520" cy="1828800"/>
+            <a:ext cx="2926080" cy="4297680"/>
           </a:xfrm>
           <a:prstGeom prst="rect">
             <a:avLst/>
@@ -4953,45 +7961,75 @@
           <a:p>
             <a:pPr>
               <a:spcAft>
-                <a:spcPts val="1000"/>
-              </a:spcAft>
-              <a:defRPr sz="1600" b="1">
-                <a:solidFill>
-                  <a:srgbClr val="F5A623"/>
-                </a:solidFill>
-              </a:defRPr>
-            </a:pPr>
-            <a:r>
-              <a:t>Stage 2: Prelim (Sec 11)</a:t>
-            </a:r>
-          </a:p>
-          <a:p>
-            <a:pPr>
-              <a:spcAft>
-                <a:spcPts val="600"/>
-              </a:spcAft>
-              <a:defRPr sz="1200">
-                <a:solidFill>
-                  <a:srgbClr val="F0F6FC"/>
-                </a:solidFill>
-              </a:defRPr>
-            </a:pPr>
-            <a:r>
-              <a:t>• Gazette Notification, land survey, tree/structure census, bar on private land transactions.</a:t>
-            </a:r>
-          </a:p>
-        </p:txBody>
-      </p:sp>
-      <p:sp>
-        <p:nvSpPr>
-          <p:cNvPr id="9" name="Rounded Rectangle 8"/>
+                <a:spcPts val="800"/>
+              </a:spcAft>
+              <a:defRPr sz="1500" b="1">
+                <a:solidFill>
+                  <a:srgbClr val="FF7A00"/>
+                </a:solidFill>
+              </a:defRPr>
+            </a:pPr>
+            <a:r>
+              <a:t>2. The Fatal Section 25 Lapse Risk</a:t>
+            </a:r>
+          </a:p>
+          <a:p>
+            <a:pPr>
+              <a:spcAft>
+                <a:spcPts val="500"/>
+              </a:spcAft>
+              <a:defRPr sz="1100">
+                <a:solidFill>
+                  <a:srgbClr val="F0F6FC"/>
+                </a:solidFill>
+              </a:defRPr>
+            </a:pPr>
+            <a:r>
+              <a:t>• Under RFCTLARR Act 2013 (Section 25), an acquisition automatically lapses if an Award is not declared within 12 MONTHS of Section 19 publication.</a:t>
+            </a:r>
+          </a:p>
+          <a:p>
+            <a:pPr>
+              <a:spcAft>
+                <a:spcPts val="500"/>
+              </a:spcAft>
+              <a:defRPr sz="1100">
+                <a:solidFill>
+                  <a:srgbClr val="F0F6FC"/>
+                </a:solidFill>
+              </a:defRPr>
+            </a:pPr>
+            <a:r>
+              <a:t>• A lapse voids all prior steps, forcing administration to restart from Section 4 SIA, losing crores and years.</a:t>
+            </a:r>
+          </a:p>
+          <a:p>
+            <a:pPr>
+              <a:spcAft>
+                <a:spcPts val="500"/>
+              </a:spcAft>
+              <a:defRPr sz="1100">
+                <a:solidFill>
+                  <a:srgbClr val="F0F6FC"/>
+                </a:solidFill>
+              </a:defRPr>
+            </a:pPr>
+            <a:r>
+              <a:t>• Manual tracking lacks automated countdown clocks and early warning alerts for District Collectors.</a:t>
+            </a:r>
+          </a:p>
+        </p:txBody>
+      </p:sp>
+      <p:sp>
+        <p:nvSpPr>
+          <p:cNvPr id="11" name="Rounded Rectangle 10"/>
           <p:cNvSpPr/>
           <p:nvPr/>
         </p:nvSpPr>
         <p:spPr>
           <a:xfrm>
             <a:off x="8046720" y="1645920"/>
-            <a:ext cx="3383280" cy="2103120"/>
+            <a:ext cx="3383280" cy="4572000"/>
           </a:xfrm>
           <a:prstGeom prst="roundRect">
             <a:avLst/>
@@ -5029,14 +8067,14 @@
       </p:sp>
       <p:sp>
         <p:nvSpPr>
-          <p:cNvPr id="10" name="TextBox 9"/>
+          <p:cNvPr id="12" name="TextBox 11"/>
           <p:cNvSpPr txBox="1"/>
           <p:nvPr/>
         </p:nvSpPr>
         <p:spPr>
           <a:xfrm>
             <a:off x="8229600" y="1783080"/>
-            <a:ext cx="3017520" cy="1828800"/>
+            <a:ext cx="3017520" cy="4297680"/>
           </a:xfrm>
           <a:prstGeom prst="rect">
             <a:avLst/>
@@ -5051,325 +8089,61 @@
           <a:p>
             <a:pPr>
               <a:spcAft>
-                <a:spcPts val="1000"/>
-              </a:spcAft>
-              <a:defRPr sz="1600" b="1">
+                <a:spcPts val="800"/>
+              </a:spcAft>
+              <a:defRPr sz="1500" b="1">
                 <a:solidFill>
                   <a:srgbClr val="F5A623"/>
                 </a:solidFill>
               </a:defRPr>
             </a:pPr>
             <a:r>
-              <a:t>Stage 3: Objections (Sec 15)</a:t>
-            </a:r>
-          </a:p>
-          <a:p>
-            <a:pPr>
-              <a:spcAft>
-                <a:spcPts val="600"/>
-              </a:spcAft>
-              <a:defRPr sz="1200">
-                <a:solidFill>
-                  <a:srgbClr val="F0F6FC"/>
-                </a:solidFill>
-              </a:defRPr>
-            </a:pPr>
-            <a:r>
-              <a:t>• 60-day window for affected landowners; CALA quasi-judicial hearing &amp; formal speaking orders.</a:t>
-            </a:r>
-          </a:p>
-        </p:txBody>
-      </p:sp>
-      <p:sp>
-        <p:nvSpPr>
-          <p:cNvPr id="11" name="Rounded Rectangle 10"/>
-          <p:cNvSpPr/>
-          <p:nvPr/>
-        </p:nvSpPr>
-        <p:spPr>
-          <a:xfrm>
-            <a:off x="731520" y="4023360"/>
-            <a:ext cx="3383280" cy="2103120"/>
-          </a:xfrm>
-          <a:prstGeom prst="roundRect">
-            <a:avLst/>
-          </a:prstGeom>
-          <a:solidFill>
-            <a:srgbClr val="112240"/>
-          </a:solidFill>
-          <a:ln w="19050">
-            <a:solidFill>
-              <a:srgbClr val="FF7A00"/>
-            </a:solidFill>
-          </a:ln>
-        </p:spPr>
-        <p:style>
-          <a:lnRef idx="1">
-            <a:schemeClr val="accent1"/>
-          </a:lnRef>
-          <a:fillRef idx="3">
-            <a:schemeClr val="accent1"/>
-          </a:fillRef>
-          <a:effectRef idx="2">
-            <a:schemeClr val="accent1"/>
-          </a:effectRef>
-          <a:fontRef idx="minor">
-            <a:schemeClr val="lt1"/>
-          </a:fontRef>
-        </p:style>
-        <p:txBody>
-          <a:bodyPr rtlCol="0" anchor="ctr"/>
-          <a:lstStyle/>
-          <a:p>
-            <a:pPr algn="ctr"/>
-          </a:p>
-        </p:txBody>
-      </p:sp>
-      <p:sp>
-        <p:nvSpPr>
-          <p:cNvPr id="12" name="TextBox 11"/>
-          <p:cNvSpPr txBox="1"/>
-          <p:nvPr/>
-        </p:nvSpPr>
-        <p:spPr>
-          <a:xfrm>
-            <a:off x="914400" y="4160520"/>
-            <a:ext cx="3017520" cy="1828800"/>
-          </a:xfrm>
-          <a:prstGeom prst="rect">
-            <a:avLst/>
-          </a:prstGeom>
-          <a:noFill/>
-        </p:spPr>
-        <p:txBody>
-          <a:bodyPr wrap="square">
-            <a:spAutoFit/>
-          </a:bodyPr>
-          <a:lstStyle/>
-          <a:p>
-            <a:pPr>
-              <a:spcAft>
-                <a:spcPts val="1000"/>
-              </a:spcAft>
-              <a:defRPr sz="1600" b="1">
-                <a:solidFill>
-                  <a:srgbClr val="F5A623"/>
-                </a:solidFill>
-              </a:defRPr>
-            </a:pPr>
-            <a:r>
-              <a:t>Stage 4: Declaration (Sec 19)</a:t>
-            </a:r>
-          </a:p>
-          <a:p>
-            <a:pPr>
-              <a:spcAft>
-                <a:spcPts val="600"/>
-              </a:spcAft>
-              <a:defRPr sz="1200">
-                <a:solidFill>
-                  <a:srgbClr val="F0F6FC"/>
-                </a:solidFill>
-              </a:defRPr>
-            </a:pPr>
-            <a:r>
-              <a:t>• Final Declaration of Acquisition + R&amp;R summary publication; Sec 25 12-month clock begins.</a:t>
-            </a:r>
-          </a:p>
-        </p:txBody>
-      </p:sp>
-      <p:sp>
-        <p:nvSpPr>
-          <p:cNvPr id="13" name="Rounded Rectangle 12"/>
-          <p:cNvSpPr/>
-          <p:nvPr/>
-        </p:nvSpPr>
-        <p:spPr>
-          <a:xfrm>
-            <a:off x="4389120" y="4023360"/>
-            <a:ext cx="3383280" cy="2103120"/>
-          </a:xfrm>
-          <a:prstGeom prst="roundRect">
-            <a:avLst/>
-          </a:prstGeom>
-          <a:solidFill>
-            <a:srgbClr val="112240"/>
-          </a:solidFill>
-          <a:ln w="19050">
-            <a:solidFill>
-              <a:srgbClr val="FF7A00"/>
-            </a:solidFill>
-          </a:ln>
-        </p:spPr>
-        <p:style>
-          <a:lnRef idx="1">
-            <a:schemeClr val="accent1"/>
-          </a:lnRef>
-          <a:fillRef idx="3">
-            <a:schemeClr val="accent1"/>
-          </a:fillRef>
-          <a:effectRef idx="2">
-            <a:schemeClr val="accent1"/>
-          </a:effectRef>
-          <a:fontRef idx="minor">
-            <a:schemeClr val="lt1"/>
-          </a:fontRef>
-        </p:style>
-        <p:txBody>
-          <a:bodyPr rtlCol="0" anchor="ctr"/>
-          <a:lstStyle/>
-          <a:p>
-            <a:pPr algn="ctr"/>
-          </a:p>
-        </p:txBody>
-      </p:sp>
-      <p:sp>
-        <p:nvSpPr>
-          <p:cNvPr id="14" name="TextBox 13"/>
-          <p:cNvSpPr txBox="1"/>
-          <p:nvPr/>
-        </p:nvSpPr>
-        <p:spPr>
-          <a:xfrm>
-            <a:off x="4572000" y="4160520"/>
-            <a:ext cx="3017520" cy="1828800"/>
-          </a:xfrm>
-          <a:prstGeom prst="rect">
-            <a:avLst/>
-          </a:prstGeom>
-          <a:noFill/>
-        </p:spPr>
-        <p:txBody>
-          <a:bodyPr wrap="square">
-            <a:spAutoFit/>
-          </a:bodyPr>
-          <a:lstStyle/>
-          <a:p>
-            <a:pPr>
-              <a:spcAft>
-                <a:spcPts val="1000"/>
-              </a:spcAft>
-              <a:defRPr sz="1600" b="1">
-                <a:solidFill>
-                  <a:srgbClr val="FF7A00"/>
-                </a:solidFill>
-              </a:defRPr>
-            </a:pPr>
-            <a:r>
-              <a:t>Stage 5: Award (Sec 23)</a:t>
-            </a:r>
-          </a:p>
-          <a:p>
-            <a:pPr>
-              <a:spcAft>
-                <a:spcPts val="600"/>
-              </a:spcAft>
-              <a:defRPr sz="1200">
-                <a:solidFill>
-                  <a:srgbClr val="F0F6FC"/>
-                </a:solidFill>
-              </a:defRPr>
-            </a:pPr>
-            <a:r>
-              <a:t>• Determination of compensation: Market Value x Multiplier + 100% Solatium (Sec 30) + 12% interest.</a:t>
-            </a:r>
-          </a:p>
-        </p:txBody>
-      </p:sp>
-      <p:sp>
-        <p:nvSpPr>
-          <p:cNvPr id="15" name="Rounded Rectangle 14"/>
-          <p:cNvSpPr/>
-          <p:nvPr/>
-        </p:nvSpPr>
-        <p:spPr>
-          <a:xfrm>
-            <a:off x="8046720" y="4023360"/>
-            <a:ext cx="3383280" cy="2103120"/>
-          </a:xfrm>
-          <a:prstGeom prst="roundRect">
-            <a:avLst/>
-          </a:prstGeom>
-          <a:solidFill>
-            <a:srgbClr val="112240"/>
-          </a:solidFill>
-          <a:ln w="19050">
-            <a:solidFill>
-              <a:srgbClr val="233554"/>
-            </a:solidFill>
-          </a:ln>
-        </p:spPr>
-        <p:style>
-          <a:lnRef idx="1">
-            <a:schemeClr val="accent1"/>
-          </a:lnRef>
-          <a:fillRef idx="3">
-            <a:schemeClr val="accent1"/>
-          </a:fillRef>
-          <a:effectRef idx="2">
-            <a:schemeClr val="accent1"/>
-          </a:effectRef>
-          <a:fontRef idx="minor">
-            <a:schemeClr val="lt1"/>
-          </a:fontRef>
-        </p:style>
-        <p:txBody>
-          <a:bodyPr rtlCol="0" anchor="ctr"/>
-          <a:lstStyle/>
-          <a:p>
-            <a:pPr algn="ctr"/>
-          </a:p>
-        </p:txBody>
-      </p:sp>
-      <p:sp>
-        <p:nvSpPr>
-          <p:cNvPr id="16" name="TextBox 15"/>
-          <p:cNvSpPr txBox="1"/>
-          <p:nvPr/>
-        </p:nvSpPr>
-        <p:spPr>
-          <a:xfrm>
-            <a:off x="8229600" y="4160520"/>
-            <a:ext cx="3017520" cy="1828800"/>
-          </a:xfrm>
-          <a:prstGeom prst="rect">
-            <a:avLst/>
-          </a:prstGeom>
-          <a:noFill/>
-        </p:spPr>
-        <p:txBody>
-          <a:bodyPr wrap="square">
-            <a:spAutoFit/>
-          </a:bodyPr>
-          <a:lstStyle/>
-          <a:p>
-            <a:pPr>
-              <a:spcAft>
-                <a:spcPts val="1000"/>
-              </a:spcAft>
-              <a:defRPr sz="1600" b="1">
-                <a:solidFill>
-                  <a:srgbClr val="10B981"/>
-                </a:solidFill>
-              </a:defRPr>
-            </a:pPr>
-            <a:r>
-              <a:t>Stage 6: Possession (Sec 38)</a:t>
-            </a:r>
-          </a:p>
-          <a:p>
-            <a:pPr>
-              <a:spcAft>
-                <a:spcPts val="600"/>
-              </a:spcAft>
-              <a:defRPr sz="1200">
-                <a:solidFill>
-                  <a:srgbClr val="F0F6FC"/>
-                </a:solidFill>
-              </a:defRPr>
-            </a:pPr>
-            <a:r>
-              <a:t>• Physical possession handed over ONLY AFTER full compensation is deposited into farmer bank accounts.</a:t>
+              <a:t>3. Federal &amp; Spatial Blindspots</a:t>
+            </a:r>
+          </a:p>
+          <a:p>
+            <a:pPr>
+              <a:spcAft>
+                <a:spcPts val="500"/>
+              </a:spcAft>
+              <a:defRPr sz="1100">
+                <a:solidFill>
+                  <a:srgbClr val="F0F6FC"/>
+                </a:solidFill>
+              </a:defRPr>
+            </a:pPr>
+            <a:r>
+              <a:t>• Constitutional Disconnect: Land is a State subject (Entry 18), while Mega Infrastructure is a Central subject (Entry 23/24).</a:t>
+            </a:r>
+          </a:p>
+          <a:p>
+            <a:pPr>
+              <a:spcAft>
+                <a:spcPts val="500"/>
+              </a:spcAft>
+              <a:defRPr sz="1100">
+                <a:solidFill>
+                  <a:srgbClr val="F0F6FC"/>
+                </a:solidFill>
+              </a:defRPr>
+            </a:pPr>
+            <a:r>
+              <a:t>• Standard consumer maps (Google / OSM) only drop point pins; they have zero parcel boundary intelligence.</a:t>
+            </a:r>
+          </a:p>
+          <a:p>
+            <a:pPr>
+              <a:spcAft>
+                <a:spcPts val="500"/>
+              </a:spcAft>
+              <a:defRPr sz="1100">
+                <a:solidFill>
+                  <a:srgbClr val="F0F6FC"/>
+                </a:solidFill>
+              </a:defRPr>
+            </a:pPr>
+            <a:r>
+              <a:t>• Opaque compensation disbursals lead to farmer distress, litigation, and duplicate claims in Civil Courts.</a:t>
             </a:r>
           </a:p>
         </p:txBody>
@@ -5437,14 +8211,57 @@
       </p:sp>
       <p:sp>
         <p:nvSpPr>
-          <p:cNvPr id="3" name="TextBox 2"/>
+          <p:cNvPr id="3" name="Rectangle 2"/>
+          <p:cNvSpPr/>
+          <p:nvPr/>
+        </p:nvSpPr>
+        <p:spPr>
+          <a:xfrm>
+            <a:off x="731520" y="320040"/>
+            <a:ext cx="10728655" cy="36576"/>
+          </a:xfrm>
+          <a:prstGeom prst="rect">
+            <a:avLst/>
+          </a:prstGeom>
+          <a:solidFill>
+            <a:srgbClr val="FF7A00"/>
+          </a:solidFill>
+          <a:ln>
+            <a:noFill/>
+          </a:ln>
+        </p:spPr>
+        <p:style>
+          <a:lnRef idx="1">
+            <a:schemeClr val="accent1"/>
+          </a:lnRef>
+          <a:fillRef idx="3">
+            <a:schemeClr val="accent1"/>
+          </a:fillRef>
+          <a:effectRef idx="2">
+            <a:schemeClr val="accent1"/>
+          </a:effectRef>
+          <a:fontRef idx="minor">
+            <a:schemeClr val="lt1"/>
+          </a:fontRef>
+        </p:style>
+        <p:txBody>
+          <a:bodyPr rtlCol="0" anchor="ctr"/>
+          <a:lstStyle/>
+          <a:p>
+            <a:pPr algn="ctr"/>
+          </a:p>
+        </p:txBody>
+      </p:sp>
+      <p:sp>
+        <p:nvSpPr>
+          <p:cNvPr id="4" name="TextBox 3"/>
           <p:cNvSpPr txBox="1"/>
           <p:nvPr/>
         </p:nvSpPr>
         <p:spPr>
           <a:xfrm>
-            <a:off x="731520" y="365760"/>
-            <a:ext cx="10698480" cy="365760"/>
+            <a:off x="731520" y="411480"/>
+            <a:ext cx="9144000" cy="320040"/>
           </a:xfrm>
           <a:prstGeom prst="rect">
             <a:avLst/>
@@ -5458,28 +8275,28 @@
           <a:lstStyle/>
           <a:p>
             <a:pPr>
-              <a:defRPr sz="1100" b="1">
+              <a:defRPr sz="1000" b="1">
                 <a:solidFill>
                   <a:srgbClr val="FF7A00"/>
                 </a:solidFill>
               </a:defRPr>
             </a:pPr>
             <a:r>
-              <a:t>PROBLEM STATEMENT #26016 | MORD &amp; DOLR</a:t>
-            </a:r>
-          </a:p>
-        </p:txBody>
-      </p:sp>
-      <p:sp>
-        <p:nvSpPr>
-          <p:cNvPr id="4" name="TextBox 3"/>
+              <a:t>TECHNICAL PROJECT REVIEW | GOV-TECH &amp; SPATIAL INFORMATICS</a:t>
+            </a:r>
+          </a:p>
+        </p:txBody>
+      </p:sp>
+      <p:sp>
+        <p:nvSpPr>
+          <p:cNvPr id="5" name="TextBox 4"/>
           <p:cNvSpPr txBox="1"/>
           <p:nvPr/>
         </p:nvSpPr>
         <p:spPr>
           <a:xfrm>
-            <a:off x="731520" y="640080"/>
-            <a:ext cx="10698480" cy="731520"/>
+            <a:off x="731520" y="685800"/>
+            <a:ext cx="9601200" cy="685800"/>
           </a:xfrm>
           <a:prstGeom prst="rect">
             <a:avLst/>
@@ -5493,28 +8310,63 @@
           <a:lstStyle/>
           <a:p>
             <a:pPr>
-              <a:defRPr sz="2400" b="1">
-                <a:solidFill>
-                  <a:srgbClr val="F0F6FC"/>
-                </a:solidFill>
-              </a:defRPr>
-            </a:pPr>
-            <a:r>
-              <a:t>NLAMS Multi-Stakeholder Federal Architecture</a:t>
-            </a:r>
-          </a:p>
-        </p:txBody>
-      </p:sp>
-      <p:sp>
-        <p:nvSpPr>
-          <p:cNvPr id="5" name="Rounded Rectangle 4"/>
+              <a:defRPr sz="2200" b="1">
+                <a:solidFill>
+                  <a:srgbClr val="F0F6FC"/>
+                </a:solidFill>
+              </a:defRPr>
+            </a:pPr>
+            <a:r>
+              <a:t>Literature Survey &amp; Gap Analysis: Existing vs Proposed System</a:t>
+            </a:r>
+          </a:p>
+        </p:txBody>
+      </p:sp>
+      <p:sp>
+        <p:nvSpPr>
+          <p:cNvPr id="6" name="TextBox 5"/>
+          <p:cNvSpPr txBox="1"/>
+          <p:nvPr/>
+        </p:nvSpPr>
+        <p:spPr>
+          <a:xfrm>
+            <a:off x="10515600" y="411480"/>
+            <a:ext cx="914400" cy="365760"/>
+          </a:xfrm>
+          <a:prstGeom prst="rect">
+            <a:avLst/>
+          </a:prstGeom>
+          <a:noFill/>
+        </p:spPr>
+        <p:txBody>
+          <a:bodyPr wrap="none">
+            <a:spAutoFit/>
+          </a:bodyPr>
+          <a:lstStyle/>
+          <a:p>
+            <a:pPr algn="r">
+              <a:defRPr sz="1100" b="1">
+                <a:solidFill>
+                  <a:srgbClr val="8B949E"/>
+                </a:solidFill>
+              </a:defRPr>
+            </a:pPr>
+            <a:r>
+              <a:t>04 / 15</a:t>
+            </a:r>
+          </a:p>
+        </p:txBody>
+      </p:sp>
+      <p:sp>
+        <p:nvSpPr>
+          <p:cNvPr id="7" name="Rounded Rectangle 6"/>
           <p:cNvSpPr/>
           <p:nvPr/>
         </p:nvSpPr>
         <p:spPr>
           <a:xfrm>
             <a:off x="731520" y="1645920"/>
-            <a:ext cx="5120640" cy="2194560"/>
+            <a:ext cx="5120640" cy="4572000"/>
           </a:xfrm>
           <a:prstGeom prst="roundRect">
             <a:avLst/>
@@ -5552,14 +8404,14 @@
       </p:sp>
       <p:sp>
         <p:nvSpPr>
-          <p:cNvPr id="6" name="TextBox 5"/>
+          <p:cNvPr id="8" name="TextBox 7"/>
           <p:cNvSpPr txBox="1"/>
           <p:nvPr/>
         </p:nvSpPr>
         <p:spPr>
           <a:xfrm>
             <a:off x="914400" y="1783080"/>
-            <a:ext cx="4754880" cy="1920240"/>
+            <a:ext cx="4754880" cy="4297680"/>
           </a:xfrm>
           <a:prstGeom prst="rect">
             <a:avLst/>
@@ -5574,75 +8426,120 @@
           <a:p>
             <a:pPr>
               <a:spcAft>
-                <a:spcPts val="1000"/>
-              </a:spcAft>
-              <a:defRPr sz="1600" b="1">
-                <a:solidFill>
-                  <a:srgbClr val="FF7A00"/>
-                </a:solidFill>
-              </a:defRPr>
-            </a:pPr>
-            <a:r>
-              <a:t>🏛️ Central Ministries (MoRD, MoRTH, Railways)</a:t>
-            </a:r>
-          </a:p>
-          <a:p>
-            <a:pPr>
-              <a:spcAft>
-                <a:spcPts val="600"/>
-              </a:spcAft>
-              <a:defRPr sz="1200">
-                <a:solidFill>
-                  <a:srgbClr val="F0F6FC"/>
-                </a:solidFill>
-              </a:defRPr>
-            </a:pPr>
-            <a:r>
-              <a:t>• Pan-India national decision support covering all 28 States &amp; 8 Union Territories.</a:t>
-            </a:r>
-          </a:p>
-          <a:p>
-            <a:pPr>
-              <a:spcAft>
-                <a:spcPts val="600"/>
-              </a:spcAft>
-              <a:defRPr sz="1200">
-                <a:solidFill>
-                  <a:srgbClr val="F0F6FC"/>
-                </a:solidFill>
-              </a:defRPr>
-            </a:pPr>
-            <a:r>
-              <a:t>• Inter-ministerial budget sanction, union grant releases &amp; PFMS escrow monitoring.</a:t>
-            </a:r>
-          </a:p>
-          <a:p>
-            <a:pPr>
-              <a:spcAft>
-                <a:spcPts val="600"/>
-              </a:spcAft>
-              <a:defRPr sz="1200">
-                <a:solidFill>
-                  <a:srgbClr val="F0F6FC"/>
-                </a:solidFill>
-              </a:defRPr>
-            </a:pPr>
-            <a:r>
-              <a:t>• Parliamentary Question (PQ) generator &amp; Union Cabinet briefings.</a:t>
-            </a:r>
-          </a:p>
-        </p:txBody>
-      </p:sp>
-      <p:sp>
-        <p:nvSpPr>
-          <p:cNvPr id="7" name="Rounded Rectangle 6"/>
+                <a:spcPts val="800"/>
+              </a:spcAft>
+              <a:defRPr sz="1500" b="1">
+                <a:solidFill>
+                  <a:srgbClr val="EF4444"/>
+                </a:solidFill>
+              </a:defRPr>
+            </a:pPr>
+            <a:r>
+              <a:t>❌ Legacy / Existing Acquisition System</a:t>
+            </a:r>
+          </a:p>
+          <a:p>
+            <a:pPr>
+              <a:spcAft>
+                <a:spcPts val="500"/>
+              </a:spcAft>
+              <a:defRPr sz="1000">
+                <a:solidFill>
+                  <a:srgbClr val="F0F6FC"/>
+                </a:solidFill>
+              </a:defRPr>
+            </a:pPr>
+            <a:r>
+              <a:t>• Manual Paper Files: Physical files circulate through revenue hierarchy with zero auditability and high loss risks.</a:t>
+            </a:r>
+          </a:p>
+          <a:p>
+            <a:pPr>
+              <a:spcAft>
+                <a:spcPts val="500"/>
+              </a:spcAft>
+              <a:defRPr sz="1000">
+                <a:solidFill>
+                  <a:srgbClr val="F0F6FC"/>
+                </a:solidFill>
+              </a:defRPr>
+            </a:pPr>
+            <a:r>
+              <a:t>• Coarse Geospatial Data: Rely on paper village maps (village shajra) or static CAD drawings prone to manual tampering.</a:t>
+            </a:r>
+          </a:p>
+          <a:p>
+            <a:pPr>
+              <a:spcAft>
+                <a:spcPts val="500"/>
+              </a:spcAft>
+              <a:defRPr sz="1000">
+                <a:solidFill>
+                  <a:srgbClr val="F0F6FC"/>
+                </a:solidFill>
+              </a:defRPr>
+            </a:pPr>
+            <a:r>
+              <a:t>• High Lapse Vulnerability: Section 25 12-month limit tracked in manual registers, leading to inadvertent statutory lapses.</a:t>
+            </a:r>
+          </a:p>
+          <a:p>
+            <a:pPr>
+              <a:spcAft>
+                <a:spcPts val="500"/>
+              </a:spcAft>
+              <a:defRPr sz="1000">
+                <a:solidFill>
+                  <a:srgbClr val="F0F6FC"/>
+                </a:solidFill>
+              </a:defRPr>
+            </a:pPr>
+            <a:r>
+              <a:t>• Manual Compensation Worksheets: Arithmetic errors in rural multiplier factors and solatium calculations.</a:t>
+            </a:r>
+          </a:p>
+          <a:p>
+            <a:pPr>
+              <a:spcAft>
+                <a:spcPts val="500"/>
+              </a:spcAft>
+              <a:defRPr sz="1000">
+                <a:solidFill>
+                  <a:srgbClr val="F0F6FC"/>
+                </a:solidFill>
+              </a:defRPr>
+            </a:pPr>
+            <a:r>
+              <a:t>• Slow Disbursal &amp; Middlemen: Cheque or cash payouts prone to delays, commissions, and fraudulent impersonations.</a:t>
+            </a:r>
+          </a:p>
+          <a:p>
+            <a:pPr>
+              <a:spcAft>
+                <a:spcPts val="500"/>
+              </a:spcAft>
+              <a:defRPr sz="1000">
+                <a:solidFill>
+                  <a:srgbClr val="F0F6FC"/>
+                </a:solidFill>
+              </a:defRPr>
+            </a:pPr>
+            <a:r>
+              <a:t>• Opaque to Citizens: Affected farmers must visit collectorates physically to inspect notifications and award amounts.</a:t>
+            </a:r>
+          </a:p>
+        </p:txBody>
+      </p:sp>
+      <p:sp>
+        <p:nvSpPr>
+          <p:cNvPr id="9" name="Rounded Rectangle 8"/>
           <p:cNvSpPr/>
           <p:nvPr/>
         </p:nvSpPr>
         <p:spPr>
           <a:xfrm>
             <a:off x="6217920" y="1645920"/>
-            <a:ext cx="5212080" cy="2194560"/>
+            <a:ext cx="5212080" cy="4572000"/>
           </a:xfrm>
           <a:prstGeom prst="roundRect">
             <a:avLst/>
@@ -5680,14 +8577,14 @@
       </p:sp>
       <p:sp>
         <p:nvSpPr>
-          <p:cNvPr id="8" name="TextBox 7"/>
+          <p:cNvPr id="10" name="TextBox 9"/>
           <p:cNvSpPr txBox="1"/>
           <p:nvPr/>
         </p:nvSpPr>
         <p:spPr>
           <a:xfrm>
             <a:off x="6400800" y="1783080"/>
-            <a:ext cx="4846320" cy="1920240"/>
+            <a:ext cx="4846320" cy="4297680"/>
           </a:xfrm>
           <a:prstGeom prst="rect">
             <a:avLst/>
@@ -5702,317 +8599,106 @@
           <a:p>
             <a:pPr>
               <a:spcAft>
-                <a:spcPts val="1000"/>
-              </a:spcAft>
-              <a:defRPr sz="1600" b="1">
-                <a:solidFill>
-                  <a:srgbClr val="F5A623"/>
-                </a:solidFill>
-              </a:defRPr>
-            </a:pPr>
-            <a:r>
-              <a:t>🏢 State Nodal Departments (All 28 State Governments)</a:t>
-            </a:r>
-          </a:p>
-          <a:p>
-            <a:pPr>
-              <a:spcAft>
-                <a:spcPts val="600"/>
-              </a:spcAft>
-              <a:defRPr sz="1200">
-                <a:solidFill>
-                  <a:srgbClr val="F0F6FC"/>
-                </a:solidFill>
-              </a:defRPr>
-            </a:pPr>
-            <a:r>
-              <a:t>• State Gazette notification issuance &amp; e-Gazette integration across all States.</a:t>
-            </a:r>
-          </a:p>
-          <a:p>
-            <a:pPr>
-              <a:spcAft>
-                <a:spcPts val="600"/>
-              </a:spcAft>
-              <a:defRPr sz="1200">
-                <a:solidFill>
-                  <a:srgbClr val="F0F6FC"/>
-                </a:solidFill>
-              </a:defRPr>
-            </a:pPr>
-            <a:r>
-              <a:t>• Integrated with State Land Registries: UP Bhulekh, MahaBhumi, Bhoomi (KA), Tamil Nilam (TN), Webland (AP), AnyRoR (GJ), BanglarBhumi (WB), Dharitree (AS).</a:t>
-            </a:r>
-          </a:p>
-          <a:p>
-            <a:pPr>
-              <a:spcAft>
-                <a:spcPts val="600"/>
-              </a:spcAft>
-              <a:defRPr sz="1200">
-                <a:solidFill>
-                  <a:srgbClr val="F0F6FC"/>
-                </a:solidFill>
-              </a:defRPr>
-            </a:pPr>
-            <a:r>
-              <a:t>• Statewide CALA cycle time tracking &amp; statutory bottleneck escalation.</a:t>
-            </a:r>
-          </a:p>
-        </p:txBody>
-      </p:sp>
-      <p:sp>
-        <p:nvSpPr>
-          <p:cNvPr id="9" name="Rounded Rectangle 8"/>
-          <p:cNvSpPr/>
-          <p:nvPr/>
-        </p:nvSpPr>
-        <p:spPr>
-          <a:xfrm>
-            <a:off x="731520" y="4114800"/>
-            <a:ext cx="5120640" cy="2194560"/>
-          </a:xfrm>
-          <a:prstGeom prst="roundRect">
-            <a:avLst/>
-          </a:prstGeom>
-          <a:solidFill>
-            <a:srgbClr val="112240"/>
-          </a:solidFill>
-          <a:ln w="19050">
-            <a:solidFill>
-              <a:srgbClr val="233554"/>
-            </a:solidFill>
-          </a:ln>
-        </p:spPr>
-        <p:style>
-          <a:lnRef idx="1">
-            <a:schemeClr val="accent1"/>
-          </a:lnRef>
-          <a:fillRef idx="3">
-            <a:schemeClr val="accent1"/>
-          </a:fillRef>
-          <a:effectRef idx="2">
-            <a:schemeClr val="accent1"/>
-          </a:effectRef>
-          <a:fontRef idx="minor">
-            <a:schemeClr val="lt1"/>
-          </a:fontRef>
-        </p:style>
-        <p:txBody>
-          <a:bodyPr rtlCol="0" anchor="ctr"/>
-          <a:lstStyle/>
-          <a:p>
-            <a:pPr algn="ctr"/>
-          </a:p>
-        </p:txBody>
-      </p:sp>
-      <p:sp>
-        <p:nvSpPr>
-          <p:cNvPr id="10" name="TextBox 9"/>
-          <p:cNvSpPr txBox="1"/>
-          <p:nvPr/>
-        </p:nvSpPr>
-        <p:spPr>
-          <a:xfrm>
-            <a:off x="914400" y="4251960"/>
-            <a:ext cx="4754880" cy="1920240"/>
-          </a:xfrm>
-          <a:prstGeom prst="rect">
-            <a:avLst/>
-          </a:prstGeom>
-          <a:noFill/>
-        </p:spPr>
-        <p:txBody>
-          <a:bodyPr wrap="square">
-            <a:spAutoFit/>
-          </a:bodyPr>
-          <a:lstStyle/>
-          <a:p>
-            <a:pPr>
-              <a:spcAft>
-                <a:spcPts val="1000"/>
-              </a:spcAft>
-              <a:defRPr sz="1600" b="1">
+                <a:spcPts val="800"/>
+              </a:spcAft>
+              <a:defRPr sz="1500" b="1">
                 <a:solidFill>
                   <a:srgbClr val="10B981"/>
                 </a:solidFill>
               </a:defRPr>
             </a:pPr>
             <a:r>
-              <a:t>⚖️ District Administration (Collector / CALA across India)</a:t>
-            </a:r>
-          </a:p>
-          <a:p>
-            <a:pPr>
-              <a:spcAft>
-                <a:spcPts val="600"/>
-              </a:spcAft>
-              <a:defRPr sz="1200">
-                <a:solidFill>
-                  <a:srgbClr val="F0F6FC"/>
-                </a:solidFill>
-              </a:defRPr>
-            </a:pPr>
-            <a:r>
-              <a:t>• Quasi-judicial Section 15 citizen objection hearings &amp; speaking orders in all districts.</a:t>
-            </a:r>
-          </a:p>
-          <a:p>
-            <a:pPr>
-              <a:spcAft>
-                <a:spcPts val="600"/>
-              </a:spcAft>
-              <a:defRPr sz="1200">
-                <a:solidFill>
-                  <a:srgbClr val="F0F6FC"/>
-                </a:solidFill>
-              </a:defRPr>
-            </a:pPr>
-            <a:r>
-              <a:t>• Award formulation under Sec 23 with mandatory 100% solatium calculation.</a:t>
-            </a:r>
-          </a:p>
-          <a:p>
-            <a:pPr>
-              <a:spcAft>
-                <a:spcPts val="600"/>
-              </a:spcAft>
-              <a:defRPr sz="1200">
-                <a:solidFill>
-                  <a:srgbClr val="F0F6FC"/>
-                </a:solidFill>
-              </a:defRPr>
-            </a:pPr>
-            <a:r>
-              <a:t>• e-Office Green-Noting scrutinies &amp; Cryptographic e-Sign approvals.</a:t>
-            </a:r>
-          </a:p>
-        </p:txBody>
-      </p:sp>
-      <p:sp>
-        <p:nvSpPr>
-          <p:cNvPr id="11" name="Rounded Rectangle 10"/>
-          <p:cNvSpPr/>
-          <p:nvPr/>
-        </p:nvSpPr>
-        <p:spPr>
-          <a:xfrm>
-            <a:off x="6217920" y="4114800"/>
-            <a:ext cx="5212080" cy="2194560"/>
-          </a:xfrm>
-          <a:prstGeom prst="roundRect">
-            <a:avLst/>
-          </a:prstGeom>
-          <a:solidFill>
-            <a:srgbClr val="112240"/>
-          </a:solidFill>
-          <a:ln w="19050">
-            <a:solidFill>
-              <a:srgbClr val="233554"/>
-            </a:solidFill>
-          </a:ln>
-        </p:spPr>
-        <p:style>
-          <a:lnRef idx="1">
-            <a:schemeClr val="accent1"/>
-          </a:lnRef>
-          <a:fillRef idx="3">
-            <a:schemeClr val="accent1"/>
-          </a:fillRef>
-          <a:effectRef idx="2">
-            <a:schemeClr val="accent1"/>
-          </a:effectRef>
-          <a:fontRef idx="minor">
-            <a:schemeClr val="lt1"/>
-          </a:fontRef>
-        </p:style>
-        <p:txBody>
-          <a:bodyPr rtlCol="0" anchor="ctr"/>
-          <a:lstStyle/>
-          <a:p>
-            <a:pPr algn="ctr"/>
-          </a:p>
-        </p:txBody>
-      </p:sp>
-      <p:sp>
-        <p:nvSpPr>
-          <p:cNvPr id="12" name="TextBox 11"/>
-          <p:cNvSpPr txBox="1"/>
-          <p:nvPr/>
-        </p:nvSpPr>
-        <p:spPr>
-          <a:xfrm>
-            <a:off x="6400800" y="4251960"/>
-            <a:ext cx="4846320" cy="1920240"/>
-          </a:xfrm>
-          <a:prstGeom prst="rect">
-            <a:avLst/>
-          </a:prstGeom>
-          <a:noFill/>
-        </p:spPr>
-        <p:txBody>
-          <a:bodyPr wrap="square">
-            <a:spAutoFit/>
-          </a:bodyPr>
-          <a:lstStyle/>
-          <a:p>
-            <a:pPr>
-              <a:spcAft>
-                <a:spcPts val="1000"/>
-              </a:spcAft>
-              <a:defRPr sz="1600" b="1">
-                <a:solidFill>
-                  <a:srgbClr val="38BDF8"/>
-                </a:solidFill>
-              </a:defRPr>
-            </a:pPr>
-            <a:r>
-              <a:t>📐 Field Surveyor &amp; Project Implementing Agencies (NHAI/RVNL/DFCCIL)</a:t>
-            </a:r>
-          </a:p>
-          <a:p>
-            <a:pPr>
-              <a:spcAft>
-                <a:spcPts val="600"/>
-              </a:spcAft>
-              <a:defRPr sz="1200">
-                <a:solidFill>
-                  <a:srgbClr val="F0F6FC"/>
-                </a:solidFill>
-              </a:defRPr>
-            </a:pPr>
-            <a:r>
-              <a:t>• On-ground Joint Measurement Survey (JMS) with DGPS geo-tagging nationwide.</a:t>
-            </a:r>
-          </a:p>
-          <a:p>
-            <a:pPr>
-              <a:spcAft>
-                <a:spcPts val="600"/>
-              </a:spcAft>
-              <a:defRPr sz="1200">
-                <a:solidFill>
-                  <a:srgbClr val="F0F6FC"/>
-                </a:solidFill>
-              </a:defRPr>
-            </a:pPr>
-            <a:r>
-              <a:t>• Mobile plot boundary demarcation with instant acre/cent/hectare calculations.</a:t>
-            </a:r>
-          </a:p>
-          <a:p>
-            <a:pPr>
-              <a:spcAft>
-                <a:spcPts val="600"/>
-              </a:spcAft>
-              <a:defRPr sz="1200">
-                <a:solidFill>
-                  <a:srgbClr val="F0F6FC"/>
-                </a:solidFill>
-              </a:defRPr>
-            </a:pPr>
-            <a:r>
-              <a:t>• Physical possession certificate issuance and drone orthophoto verification.</a:t>
+              <a:t>✅ Proposed NLAMS Full-Stack Platform</a:t>
+            </a:r>
+          </a:p>
+          <a:p>
+            <a:pPr>
+              <a:spcAft>
+                <a:spcPts val="500"/>
+              </a:spcAft>
+              <a:defRPr sz="1000">
+                <a:solidFill>
+                  <a:srgbClr val="F0F6FC"/>
+                </a:solidFill>
+              </a:defRPr>
+            </a:pPr>
+            <a:r>
+              <a:t>• Authentic e-Office Noting: Green-tinted digital noting sheets with cryptographic DSC signatures and SHA-256 seals.</a:t>
+            </a:r>
+          </a:p>
+          <a:p>
+            <a:pPr>
+              <a:spcAft>
+                <a:spcPts val="500"/>
+              </a:spcAft>
+              <a:defRPr sz="1000">
+                <a:solidFill>
+                  <a:srgbClr val="F0F6FC"/>
+                </a:solidFill>
+              </a:defRPr>
+            </a:pPr>
+            <a:r>
+              <a:t>• Sub-Meter Cadastral GIS Engine: Multi-point GeoJSON parcel polygons with 60m right-of-way expressway overlays.</a:t>
+            </a:r>
+          </a:p>
+          <a:p>
+            <a:pPr>
+              <a:spcAft>
+                <a:spcPts val="500"/>
+              </a:spcAft>
+              <a:defRPr sz="1000">
+                <a:solidFill>
+                  <a:srgbClr val="F0F6FC"/>
+                </a:solidFill>
+              </a:defRPr>
+            </a:pPr>
+            <a:r>
+              <a:t>• Automated Statutory Lapse Radar: Real-time countdown engine with 3-tier automated SMS and email escalations.</a:t>
+            </a:r>
+          </a:p>
+          <a:p>
+            <a:pPr>
+              <a:spcAft>
+                <a:spcPts val="500"/>
+              </a:spcAft>
+              <a:defRPr sz="1000">
+                <a:solidFill>
+                  <a:srgbClr val="F0F6FC"/>
+                </a:solidFill>
+              </a:defRPr>
+            </a:pPr>
+            <a:r>
+              <a:t>• Automated Award Calculator: Strict mathematical implementation of Sec 26, Sec 30(1) Solatium, and Sec 30(3) interest.</a:t>
+            </a:r>
+          </a:p>
+          <a:p>
+            <a:pPr>
+              <a:spcAft>
+                <a:spcPts val="500"/>
+              </a:spcAft>
+              <a:defRPr sz="1000">
+                <a:solidFill>
+                  <a:srgbClr val="F0F6FC"/>
+                </a:solidFill>
+              </a:defRPr>
+            </a:pPr>
+            <a:r>
+              <a:t>• PFMS Direct Benefit Transfer: Zero-leakage escrow payout directly into Aadhaar-linked beneficiary bank accounts.</a:t>
+            </a:r>
+          </a:p>
+          <a:p>
+            <a:pPr>
+              <a:spcAft>
+                <a:spcPts val="500"/>
+              </a:spcAft>
+              <a:defRPr sz="1000">
+                <a:solidFill>
+                  <a:srgbClr val="F0F6FC"/>
+                </a:solidFill>
+              </a:defRPr>
+            </a:pPr>
+            <a:r>
+              <a:t>• Public Khasra Verification Portal: Privacy-masked citizen search enabling landowners to verify claim status instantly.</a:t>
             </a:r>
           </a:p>
         </p:txBody>
@@ -6080,14 +8766,57 @@
       </p:sp>
       <p:sp>
         <p:nvSpPr>
-          <p:cNvPr id="3" name="TextBox 2"/>
+          <p:cNvPr id="3" name="Rectangle 2"/>
+          <p:cNvSpPr/>
+          <p:nvPr/>
+        </p:nvSpPr>
+        <p:spPr>
+          <a:xfrm>
+            <a:off x="731520" y="320040"/>
+            <a:ext cx="10728655" cy="36576"/>
+          </a:xfrm>
+          <a:prstGeom prst="rect">
+            <a:avLst/>
+          </a:prstGeom>
+          <a:solidFill>
+            <a:srgbClr val="FF7A00"/>
+          </a:solidFill>
+          <a:ln>
+            <a:noFill/>
+          </a:ln>
+        </p:spPr>
+        <p:style>
+          <a:lnRef idx="1">
+            <a:schemeClr val="accent1"/>
+          </a:lnRef>
+          <a:fillRef idx="3">
+            <a:schemeClr val="accent1"/>
+          </a:fillRef>
+          <a:effectRef idx="2">
+            <a:schemeClr val="accent1"/>
+          </a:effectRef>
+          <a:fontRef idx="minor">
+            <a:schemeClr val="lt1"/>
+          </a:fontRef>
+        </p:style>
+        <p:txBody>
+          <a:bodyPr rtlCol="0" anchor="ctr"/>
+          <a:lstStyle/>
+          <a:p>
+            <a:pPr algn="ctr"/>
+          </a:p>
+        </p:txBody>
+      </p:sp>
+      <p:sp>
+        <p:nvSpPr>
+          <p:cNvPr id="4" name="TextBox 3"/>
           <p:cNvSpPr txBox="1"/>
           <p:nvPr/>
         </p:nvSpPr>
         <p:spPr>
           <a:xfrm>
-            <a:off x="731520" y="365760"/>
-            <a:ext cx="10698480" cy="365760"/>
+            <a:off x="731520" y="411480"/>
+            <a:ext cx="9144000" cy="320040"/>
           </a:xfrm>
           <a:prstGeom prst="rect">
             <a:avLst/>
@@ -6101,28 +8830,28 @@
           <a:lstStyle/>
           <a:p>
             <a:pPr>
-              <a:defRPr sz="1100" b="1">
+              <a:defRPr sz="1000" b="1">
                 <a:solidFill>
                   <a:srgbClr val="FF7A00"/>
                 </a:solidFill>
               </a:defRPr>
             </a:pPr>
             <a:r>
-              <a:t>PROBLEM STATEMENT #26016 | MORD &amp; DOLR</a:t>
-            </a:r>
-          </a:p>
-        </p:txBody>
-      </p:sp>
-      <p:sp>
-        <p:nvSpPr>
-          <p:cNvPr id="4" name="TextBox 3"/>
+              <a:t>TECHNICAL PROJECT REVIEW | GOV-TECH &amp; SPATIAL INFORMATICS</a:t>
+            </a:r>
+          </a:p>
+        </p:txBody>
+      </p:sp>
+      <p:sp>
+        <p:nvSpPr>
+          <p:cNvPr id="5" name="TextBox 4"/>
           <p:cNvSpPr txBox="1"/>
           <p:nvPr/>
         </p:nvSpPr>
         <p:spPr>
           <a:xfrm>
-            <a:off x="731520" y="640080"/>
-            <a:ext cx="10698480" cy="731520"/>
+            <a:off x="731520" y="685800"/>
+            <a:ext cx="9601200" cy="685800"/>
           </a:xfrm>
           <a:prstGeom prst="rect">
             <a:avLst/>
@@ -6136,28 +8865,63 @@
           <a:lstStyle/>
           <a:p>
             <a:pPr>
-              <a:defRPr sz="2400" b="1">
-                <a:solidFill>
-                  <a:srgbClr val="F0F6FC"/>
-                </a:solidFill>
-              </a:defRPr>
-            </a:pPr>
-            <a:r>
-              <a:t>High-Precision Cadastral GIS Engine (Pan-India Coverage)</a:t>
-            </a:r>
-          </a:p>
-        </p:txBody>
-      </p:sp>
-      <p:sp>
-        <p:nvSpPr>
-          <p:cNvPr id="5" name="Rounded Rectangle 4"/>
+              <a:defRPr sz="2200" b="1">
+                <a:solidFill>
+                  <a:srgbClr val="F0F6FC"/>
+                </a:solidFill>
+              </a:defRPr>
+            </a:pPr>
+            <a:r>
+              <a:t>Statutory Legal Framework: 6-Stage RFCTLARR Act 2013 Lifecycle</a:t>
+            </a:r>
+          </a:p>
+        </p:txBody>
+      </p:sp>
+      <p:sp>
+        <p:nvSpPr>
+          <p:cNvPr id="6" name="TextBox 5"/>
+          <p:cNvSpPr txBox="1"/>
+          <p:nvPr/>
+        </p:nvSpPr>
+        <p:spPr>
+          <a:xfrm>
+            <a:off x="10515600" y="411480"/>
+            <a:ext cx="914400" cy="365760"/>
+          </a:xfrm>
+          <a:prstGeom prst="rect">
+            <a:avLst/>
+          </a:prstGeom>
+          <a:noFill/>
+        </p:spPr>
+        <p:txBody>
+          <a:bodyPr wrap="none">
+            <a:spAutoFit/>
+          </a:bodyPr>
+          <a:lstStyle/>
+          <a:p>
+            <a:pPr algn="r">
+              <a:defRPr sz="1100" b="1">
+                <a:solidFill>
+                  <a:srgbClr val="8B949E"/>
+                </a:solidFill>
+              </a:defRPr>
+            </a:pPr>
+            <a:r>
+              <a:t>05 / 15</a:t>
+            </a:r>
+          </a:p>
+        </p:txBody>
+      </p:sp>
+      <p:sp>
+        <p:nvSpPr>
+          <p:cNvPr id="7" name="Rounded Rectangle 6"/>
           <p:cNvSpPr/>
           <p:nvPr/>
         </p:nvSpPr>
         <p:spPr>
           <a:xfrm>
             <a:off x="731520" y="1645920"/>
-            <a:ext cx="5120640" cy="4572000"/>
+            <a:ext cx="3383280" cy="2103120"/>
           </a:xfrm>
           <a:prstGeom prst="roundRect">
             <a:avLst/>
@@ -6195,14 +8959,14 @@
       </p:sp>
       <p:sp>
         <p:nvSpPr>
-          <p:cNvPr id="6" name="TextBox 5"/>
+          <p:cNvPr id="8" name="TextBox 7"/>
           <p:cNvSpPr txBox="1"/>
           <p:nvPr/>
         </p:nvSpPr>
         <p:spPr>
           <a:xfrm>
             <a:off x="914400" y="1783080"/>
-            <a:ext cx="4754880" cy="4297680"/>
+            <a:ext cx="3017520" cy="1828800"/>
           </a:xfrm>
           <a:prstGeom prst="rect">
             <a:avLst/>
@@ -6217,105 +8981,45 @@
           <a:p>
             <a:pPr>
               <a:spcAft>
-                <a:spcPts val="1000"/>
-              </a:spcAft>
-              <a:defRPr sz="1600" b="1">
-                <a:solidFill>
-                  <a:srgbClr val="FF7A00"/>
-                </a:solidFill>
-              </a:defRPr>
-            </a:pPr>
-            <a:r>
-              <a:t>🇮🇳 Pan-India National Multi-Zone Corridors</a:t>
-            </a:r>
-          </a:p>
-          <a:p>
-            <a:pPr>
-              <a:spcAft>
-                <a:spcPts val="600"/>
-              </a:spcAft>
-              <a:defRPr sz="1200">
-                <a:solidFill>
-                  <a:srgbClr val="F0F6FC"/>
-                </a:solidFill>
-              </a:defRPr>
-            </a:pPr>
-            <a:r>
-              <a:t>• Northern Zone (UP/NCR): Ganga Expressway &amp; Noida International Airport Jewar (Khasra #842/1, UP Bhulekh records).</a:t>
-            </a:r>
-          </a:p>
-          <a:p>
-            <a:pPr>
-              <a:spcAft>
-                <a:spcPts val="600"/>
-              </a:spcAft>
-              <a:defRPr sz="1200">
-                <a:solidFill>
-                  <a:srgbClr val="F0F6FC"/>
-                </a:solidFill>
-              </a:defRPr>
-            </a:pPr>
-            <a:r>
-              <a:t>• Western Zone (MH/GJ): Mumbai-Nagpur Samruddhi &amp; NE-4 Package 17 (7/12 Gat #142) + Dholera SIR Activation Zone (AnyRoR Block #312).</a:t>
-            </a:r>
-          </a:p>
-          <a:p>
-            <a:pPr>
-              <a:spcAft>
-                <a:spcPts val="600"/>
-              </a:spcAft>
-              <a:defRPr sz="1200">
-                <a:solidFill>
-                  <a:srgbClr val="F0F6FC"/>
-                </a:solidFill>
-              </a:defRPr>
-            </a:pPr>
-            <a:r>
-              <a:t>• Southern Zone (TN/AP/KA): Chennai Peripheral Ring Road (Patta #842) + Amaravati Seed Axis (Webland #204) + Bengaluru STRR NH-948A (Bhoomi RTC #58).</a:t>
-            </a:r>
-          </a:p>
-          <a:p>
-            <a:pPr>
-              <a:spcAft>
-                <a:spcPts val="600"/>
-              </a:spcAft>
-              <a:defRPr sz="1200">
-                <a:solidFill>
-                  <a:srgbClr val="F0F6FC"/>
-                </a:solidFill>
-              </a:defRPr>
-            </a:pPr>
-            <a:r>
-              <a:t>• Eastern &amp; NE Zone (WB/AS): Eastern Freight Corridor Dankuni (Dag #412) + Guwahati Ring Road Bypass (Dharitree Dag #105).</a:t>
-            </a:r>
-          </a:p>
-          <a:p>
-            <a:pPr>
-              <a:spcAft>
-                <a:spcPts val="600"/>
-              </a:spcAft>
-              <a:defRPr sz="1200">
-                <a:solidFill>
-                  <a:srgbClr val="F0F6FC"/>
-                </a:solidFill>
-              </a:defRPr>
-            </a:pPr>
-            <a:r>
-              <a:t>• State Land Registry Adapters: Built-in schema mapping for 28 state land records.</a:t>
-            </a:r>
-          </a:p>
-        </p:txBody>
-      </p:sp>
-      <p:sp>
-        <p:nvSpPr>
-          <p:cNvPr id="7" name="Rounded Rectangle 6"/>
+                <a:spcPts val="800"/>
+              </a:spcAft>
+              <a:defRPr sz="1500" b="1">
+                <a:solidFill>
+                  <a:srgbClr val="F5A623"/>
+                </a:solidFill>
+              </a:defRPr>
+            </a:pPr>
+            <a:r>
+              <a:t>Stage 1: SIA (Sec 4-7)</a:t>
+            </a:r>
+          </a:p>
+          <a:p>
+            <a:pPr>
+              <a:spcAft>
+                <a:spcPts val="500"/>
+              </a:spcAft>
+              <a:defRPr sz="1100">
+                <a:solidFill>
+                  <a:srgbClr val="F0F6FC"/>
+                </a:solidFill>
+              </a:defRPr>
+            </a:pPr>
+            <a:r>
+              <a:t>• Social Impact Assessment, Gram Sabha public hearing, appraisal by independent Multi-Disciplinary Expert Group.</a:t>
+            </a:r>
+          </a:p>
+        </p:txBody>
+      </p:sp>
+      <p:sp>
+        <p:nvSpPr>
+          <p:cNvPr id="9" name="Rounded Rectangle 8"/>
           <p:cNvSpPr/>
           <p:nvPr/>
         </p:nvSpPr>
         <p:spPr>
           <a:xfrm>
-            <a:off x="6217920" y="1645920"/>
-            <a:ext cx="5212080" cy="4572000"/>
+            <a:off x="4389120" y="1645920"/>
+            <a:ext cx="3383280" cy="2103120"/>
           </a:xfrm>
           <a:prstGeom prst="roundRect">
             <a:avLst/>
@@ -6353,14 +9057,14 @@
       </p:sp>
       <p:sp>
         <p:nvSpPr>
-          <p:cNvPr id="8" name="TextBox 7"/>
+          <p:cNvPr id="10" name="TextBox 9"/>
           <p:cNvSpPr txBox="1"/>
           <p:nvPr/>
         </p:nvSpPr>
         <p:spPr>
           <a:xfrm>
-            <a:off x="6400800" y="1783080"/>
-            <a:ext cx="4846320" cy="4297680"/>
+            <a:off x="4572000" y="1783080"/>
+            <a:ext cx="3017520" cy="1828800"/>
           </a:xfrm>
           <a:prstGeom prst="rect">
             <a:avLst/>
@@ -6375,91 +9079,423 @@
           <a:p>
             <a:pPr>
               <a:spcAft>
-                <a:spcPts val="1000"/>
-              </a:spcAft>
-              <a:defRPr sz="1600" b="1">
+                <a:spcPts val="800"/>
+              </a:spcAft>
+              <a:defRPr sz="1500" b="1">
                 <a:solidFill>
                   <a:srgbClr val="F5A623"/>
                 </a:solidFill>
               </a:defRPr>
             </a:pPr>
             <a:r>
-              <a:t>🛰️ Sub-Meter Cadastral Mapping Capabilities</a:t>
-            </a:r>
-          </a:p>
-          <a:p>
-            <a:pPr>
-              <a:spcAft>
-                <a:spcPts val="600"/>
-              </a:spcAft>
-              <a:defRPr sz="1200">
-                <a:solidFill>
-                  <a:srgbClr val="F0F6FC"/>
-                </a:solidFill>
-              </a:defRPr>
-            </a:pPr>
-            <a:r>
-              <a:t>• 36 States &amp; Union Territories: Interactive national heatmap and zoom-to-cadastre hubs for every State &amp; UT.</a:t>
-            </a:r>
-          </a:p>
-          <a:p>
-            <a:pPr>
-              <a:spcAft>
-                <a:spcPts val="600"/>
-              </a:spcAft>
-              <a:defRPr sz="1200">
-                <a:solidFill>
-                  <a:srgbClr val="F0F6FC"/>
-                </a:solidFill>
-              </a:defRPr>
-            </a:pPr>
-            <a:r>
-              <a:t>• True Parcel Boundary Polygons: Multi-point GeoJSON geometries reflecting real farm holdings instead of basic pins.</a:t>
-            </a:r>
-          </a:p>
-          <a:p>
-            <a:pPr>
-              <a:spcAft>
-                <a:spcPts val="600"/>
-              </a:spcAft>
-              <a:defRPr sz="1200">
-                <a:solidFill>
-                  <a:srgbClr val="F0F6FC"/>
-                </a:solidFill>
-              </a:defRPr>
-            </a:pPr>
-            <a:r>
-              <a:t>• 60-Meter Statutory Right-of-Way: Real-time expressway alignment overlay highlighting exact acquired slices.</a:t>
-            </a:r>
-          </a:p>
-          <a:p>
-            <a:pPr>
-              <a:spcAft>
-                <a:spcPts val="600"/>
-              </a:spcAft>
-              <a:defRPr sz="1200">
-                <a:solidFill>
-                  <a:srgbClr val="F0F6FC"/>
-                </a:solidFill>
-              </a:defRPr>
-            </a:pPr>
-            <a:r>
-              <a:t>• Mobile Surveyor DGPS Tool: Click-to-demarcate boundaries on satellite imagery with live Cent / Acre / Hectare calculations.</a:t>
-            </a:r>
-          </a:p>
-          <a:p>
-            <a:pPr>
-              <a:spcAft>
-                <a:spcPts val="600"/>
-              </a:spcAft>
-              <a:defRPr sz="1200">
-                <a:solidFill>
-                  <a:srgbClr val="F0F6FC"/>
-                </a:solidFill>
-              </a:defRPr>
-            </a:pPr>
-            <a:r>
-              <a:t>• Dynamic Tenure Inspector: Displays state-specific legal terminology (Patta, Khatauni, RTC, 7/12, Dag, Khatian).</a:t>
+              <a:t>Stage 2: Preliminary (Sec 11)</a:t>
+            </a:r>
+          </a:p>
+          <a:p>
+            <a:pPr>
+              <a:spcAft>
+                <a:spcPts val="500"/>
+              </a:spcAft>
+              <a:defRPr sz="1100">
+                <a:solidFill>
+                  <a:srgbClr val="F0F6FC"/>
+                </a:solidFill>
+              </a:defRPr>
+            </a:pPr>
+            <a:r>
+              <a:t>• Gazette Notification, land survey, tree/crop census, bar on private land registrations.</a:t>
+            </a:r>
+          </a:p>
+        </p:txBody>
+      </p:sp>
+      <p:sp>
+        <p:nvSpPr>
+          <p:cNvPr id="11" name="Rounded Rectangle 10"/>
+          <p:cNvSpPr/>
+          <p:nvPr/>
+        </p:nvSpPr>
+        <p:spPr>
+          <a:xfrm>
+            <a:off x="8046720" y="1645920"/>
+            <a:ext cx="3383280" cy="2103120"/>
+          </a:xfrm>
+          <a:prstGeom prst="roundRect">
+            <a:avLst/>
+          </a:prstGeom>
+          <a:solidFill>
+            <a:srgbClr val="112240"/>
+          </a:solidFill>
+          <a:ln w="19050">
+            <a:solidFill>
+              <a:srgbClr val="233554"/>
+            </a:solidFill>
+          </a:ln>
+        </p:spPr>
+        <p:style>
+          <a:lnRef idx="1">
+            <a:schemeClr val="accent1"/>
+          </a:lnRef>
+          <a:fillRef idx="3">
+            <a:schemeClr val="accent1"/>
+          </a:fillRef>
+          <a:effectRef idx="2">
+            <a:schemeClr val="accent1"/>
+          </a:effectRef>
+          <a:fontRef idx="minor">
+            <a:schemeClr val="lt1"/>
+          </a:fontRef>
+        </p:style>
+        <p:txBody>
+          <a:bodyPr rtlCol="0" anchor="ctr"/>
+          <a:lstStyle/>
+          <a:p>
+            <a:pPr algn="ctr"/>
+          </a:p>
+        </p:txBody>
+      </p:sp>
+      <p:sp>
+        <p:nvSpPr>
+          <p:cNvPr id="12" name="TextBox 11"/>
+          <p:cNvSpPr txBox="1"/>
+          <p:nvPr/>
+        </p:nvSpPr>
+        <p:spPr>
+          <a:xfrm>
+            <a:off x="8229600" y="1783080"/>
+            <a:ext cx="3017520" cy="1828800"/>
+          </a:xfrm>
+          <a:prstGeom prst="rect">
+            <a:avLst/>
+          </a:prstGeom>
+          <a:noFill/>
+        </p:spPr>
+        <p:txBody>
+          <a:bodyPr wrap="square">
+            <a:spAutoFit/>
+          </a:bodyPr>
+          <a:lstStyle/>
+          <a:p>
+            <a:pPr>
+              <a:spcAft>
+                <a:spcPts val="800"/>
+              </a:spcAft>
+              <a:defRPr sz="1500" b="1">
+                <a:solidFill>
+                  <a:srgbClr val="F5A623"/>
+                </a:solidFill>
+              </a:defRPr>
+            </a:pPr>
+            <a:r>
+              <a:t>Stage 3: Objections (Sec 15)</a:t>
+            </a:r>
+          </a:p>
+          <a:p>
+            <a:pPr>
+              <a:spcAft>
+                <a:spcPts val="500"/>
+              </a:spcAft>
+              <a:defRPr sz="1100">
+                <a:solidFill>
+                  <a:srgbClr val="F0F6FC"/>
+                </a:solidFill>
+              </a:defRPr>
+            </a:pPr>
+            <a:r>
+              <a:t>• 60-day window for affected landowners; CALA quasi-judicial hearings &amp; legally binding speaking orders.</a:t>
+            </a:r>
+          </a:p>
+        </p:txBody>
+      </p:sp>
+      <p:sp>
+        <p:nvSpPr>
+          <p:cNvPr id="13" name="Rounded Rectangle 12"/>
+          <p:cNvSpPr/>
+          <p:nvPr/>
+        </p:nvSpPr>
+        <p:spPr>
+          <a:xfrm>
+            <a:off x="731520" y="4023360"/>
+            <a:ext cx="3383280" cy="2103120"/>
+          </a:xfrm>
+          <a:prstGeom prst="roundRect">
+            <a:avLst/>
+          </a:prstGeom>
+          <a:solidFill>
+            <a:srgbClr val="112240"/>
+          </a:solidFill>
+          <a:ln w="19050">
+            <a:solidFill>
+              <a:srgbClr val="233554"/>
+            </a:solidFill>
+          </a:ln>
+        </p:spPr>
+        <p:style>
+          <a:lnRef idx="1">
+            <a:schemeClr val="accent1"/>
+          </a:lnRef>
+          <a:fillRef idx="3">
+            <a:schemeClr val="accent1"/>
+          </a:fillRef>
+          <a:effectRef idx="2">
+            <a:schemeClr val="accent1"/>
+          </a:effectRef>
+          <a:fontRef idx="minor">
+            <a:schemeClr val="lt1"/>
+          </a:fontRef>
+        </p:style>
+        <p:txBody>
+          <a:bodyPr rtlCol="0" anchor="ctr"/>
+          <a:lstStyle/>
+          <a:p>
+            <a:pPr algn="ctr"/>
+          </a:p>
+        </p:txBody>
+      </p:sp>
+      <p:sp>
+        <p:nvSpPr>
+          <p:cNvPr id="14" name="TextBox 13"/>
+          <p:cNvSpPr txBox="1"/>
+          <p:nvPr/>
+        </p:nvSpPr>
+        <p:spPr>
+          <a:xfrm>
+            <a:off x="914400" y="4160520"/>
+            <a:ext cx="3017520" cy="1828800"/>
+          </a:xfrm>
+          <a:prstGeom prst="rect">
+            <a:avLst/>
+          </a:prstGeom>
+          <a:noFill/>
+        </p:spPr>
+        <p:txBody>
+          <a:bodyPr wrap="square">
+            <a:spAutoFit/>
+          </a:bodyPr>
+          <a:lstStyle/>
+          <a:p>
+            <a:pPr>
+              <a:spcAft>
+                <a:spcPts val="800"/>
+              </a:spcAft>
+              <a:defRPr sz="1500" b="1">
+                <a:solidFill>
+                  <a:srgbClr val="F5A623"/>
+                </a:solidFill>
+              </a:defRPr>
+            </a:pPr>
+            <a:r>
+              <a:t>Stage 4: Declaration (Sec 19)</a:t>
+            </a:r>
+          </a:p>
+          <a:p>
+            <a:pPr>
+              <a:spcAft>
+                <a:spcPts val="500"/>
+              </a:spcAft>
+              <a:defRPr sz="1100">
+                <a:solidFill>
+                  <a:srgbClr val="F0F6FC"/>
+                </a:solidFill>
+              </a:defRPr>
+            </a:pPr>
+            <a:r>
+              <a:t>• Final Declaration of Acquisition + R&amp;R summary publication; statutory Section 25 12-month countdown commences.</a:t>
+            </a:r>
+          </a:p>
+        </p:txBody>
+      </p:sp>
+      <p:sp>
+        <p:nvSpPr>
+          <p:cNvPr id="15" name="Rounded Rectangle 14"/>
+          <p:cNvSpPr/>
+          <p:nvPr/>
+        </p:nvSpPr>
+        <p:spPr>
+          <a:xfrm>
+            <a:off x="4389120" y="4023360"/>
+            <a:ext cx="3383280" cy="2103120"/>
+          </a:xfrm>
+          <a:prstGeom prst="roundRect">
+            <a:avLst/>
+          </a:prstGeom>
+          <a:solidFill>
+            <a:srgbClr val="112240"/>
+          </a:solidFill>
+          <a:ln w="19050">
+            <a:solidFill>
+              <a:srgbClr val="FF7A00"/>
+            </a:solidFill>
+          </a:ln>
+        </p:spPr>
+        <p:style>
+          <a:lnRef idx="1">
+            <a:schemeClr val="accent1"/>
+          </a:lnRef>
+          <a:fillRef idx="3">
+            <a:schemeClr val="accent1"/>
+          </a:fillRef>
+          <a:effectRef idx="2">
+            <a:schemeClr val="accent1"/>
+          </a:effectRef>
+          <a:fontRef idx="minor">
+            <a:schemeClr val="lt1"/>
+          </a:fontRef>
+        </p:style>
+        <p:txBody>
+          <a:bodyPr rtlCol="0" anchor="ctr"/>
+          <a:lstStyle/>
+          <a:p>
+            <a:pPr algn="ctr"/>
+          </a:p>
+        </p:txBody>
+      </p:sp>
+      <p:sp>
+        <p:nvSpPr>
+          <p:cNvPr id="16" name="TextBox 15"/>
+          <p:cNvSpPr txBox="1"/>
+          <p:nvPr/>
+        </p:nvSpPr>
+        <p:spPr>
+          <a:xfrm>
+            <a:off x="4572000" y="4160520"/>
+            <a:ext cx="3017520" cy="1828800"/>
+          </a:xfrm>
+          <a:prstGeom prst="rect">
+            <a:avLst/>
+          </a:prstGeom>
+          <a:noFill/>
+        </p:spPr>
+        <p:txBody>
+          <a:bodyPr wrap="square">
+            <a:spAutoFit/>
+          </a:bodyPr>
+          <a:lstStyle/>
+          <a:p>
+            <a:pPr>
+              <a:spcAft>
+                <a:spcPts val="800"/>
+              </a:spcAft>
+              <a:defRPr sz="1500" b="1">
+                <a:solidFill>
+                  <a:srgbClr val="FF7A00"/>
+                </a:solidFill>
+              </a:defRPr>
+            </a:pPr>
+            <a:r>
+              <a:t>Stage 5: Award (Sec 23)</a:t>
+            </a:r>
+          </a:p>
+          <a:p>
+            <a:pPr>
+              <a:spcAft>
+                <a:spcPts val="500"/>
+              </a:spcAft>
+              <a:defRPr sz="1100">
+                <a:solidFill>
+                  <a:srgbClr val="F0F6FC"/>
+                </a:solidFill>
+              </a:defRPr>
+            </a:pPr>
+            <a:r>
+              <a:t>• Determination of compensation: Market Value x Multiplier + Mandatory 100% Solatium (Sec 30) + 12% Interest.</a:t>
+            </a:r>
+          </a:p>
+        </p:txBody>
+      </p:sp>
+      <p:sp>
+        <p:nvSpPr>
+          <p:cNvPr id="17" name="Rounded Rectangle 16"/>
+          <p:cNvSpPr/>
+          <p:nvPr/>
+        </p:nvSpPr>
+        <p:spPr>
+          <a:xfrm>
+            <a:off x="8046720" y="4023360"/>
+            <a:ext cx="3383280" cy="2103120"/>
+          </a:xfrm>
+          <a:prstGeom prst="roundRect">
+            <a:avLst/>
+          </a:prstGeom>
+          <a:solidFill>
+            <a:srgbClr val="112240"/>
+          </a:solidFill>
+          <a:ln w="19050">
+            <a:solidFill>
+              <a:srgbClr val="233554"/>
+            </a:solidFill>
+          </a:ln>
+        </p:spPr>
+        <p:style>
+          <a:lnRef idx="1">
+            <a:schemeClr val="accent1"/>
+          </a:lnRef>
+          <a:fillRef idx="3">
+            <a:schemeClr val="accent1"/>
+          </a:fillRef>
+          <a:effectRef idx="2">
+            <a:schemeClr val="accent1"/>
+          </a:effectRef>
+          <a:fontRef idx="minor">
+            <a:schemeClr val="lt1"/>
+          </a:fontRef>
+        </p:style>
+        <p:txBody>
+          <a:bodyPr rtlCol="0" anchor="ctr"/>
+          <a:lstStyle/>
+          <a:p>
+            <a:pPr algn="ctr"/>
+          </a:p>
+        </p:txBody>
+      </p:sp>
+      <p:sp>
+        <p:nvSpPr>
+          <p:cNvPr id="18" name="TextBox 17"/>
+          <p:cNvSpPr txBox="1"/>
+          <p:nvPr/>
+        </p:nvSpPr>
+        <p:spPr>
+          <a:xfrm>
+            <a:off x="8229600" y="4160520"/>
+            <a:ext cx="3017520" cy="1828800"/>
+          </a:xfrm>
+          <a:prstGeom prst="rect">
+            <a:avLst/>
+          </a:prstGeom>
+          <a:noFill/>
+        </p:spPr>
+        <p:txBody>
+          <a:bodyPr wrap="square">
+            <a:spAutoFit/>
+          </a:bodyPr>
+          <a:lstStyle/>
+          <a:p>
+            <a:pPr>
+              <a:spcAft>
+                <a:spcPts val="800"/>
+              </a:spcAft>
+              <a:defRPr sz="1500" b="1">
+                <a:solidFill>
+                  <a:srgbClr val="10B981"/>
+                </a:solidFill>
+              </a:defRPr>
+            </a:pPr>
+            <a:r>
+              <a:t>Stage 6: Possession (Sec 38)</a:t>
+            </a:r>
+          </a:p>
+          <a:p>
+            <a:pPr>
+              <a:spcAft>
+                <a:spcPts val="500"/>
+              </a:spcAft>
+              <a:defRPr sz="1100">
+                <a:solidFill>
+                  <a:srgbClr val="F0F6FC"/>
+                </a:solidFill>
+              </a:defRPr>
+            </a:pPr>
+            <a:r>
+              <a:t>• Physical handover of land to executing agency ONLY AFTER 100% compensation deposited into beneficiary bank accounts.</a:t>
             </a:r>
           </a:p>
         </p:txBody>
@@ -6527,14 +9563,57 @@
       </p:sp>
       <p:sp>
         <p:nvSpPr>
-          <p:cNvPr id="3" name="TextBox 2"/>
+          <p:cNvPr id="3" name="Rectangle 2"/>
+          <p:cNvSpPr/>
+          <p:nvPr/>
+        </p:nvSpPr>
+        <p:spPr>
+          <a:xfrm>
+            <a:off x="731520" y="320040"/>
+            <a:ext cx="10728655" cy="36576"/>
+          </a:xfrm>
+          <a:prstGeom prst="rect">
+            <a:avLst/>
+          </a:prstGeom>
+          <a:solidFill>
+            <a:srgbClr val="FF7A00"/>
+          </a:solidFill>
+          <a:ln>
+            <a:noFill/>
+          </a:ln>
+        </p:spPr>
+        <p:style>
+          <a:lnRef idx="1">
+            <a:schemeClr val="accent1"/>
+          </a:lnRef>
+          <a:fillRef idx="3">
+            <a:schemeClr val="accent1"/>
+          </a:fillRef>
+          <a:effectRef idx="2">
+            <a:schemeClr val="accent1"/>
+          </a:effectRef>
+          <a:fontRef idx="minor">
+            <a:schemeClr val="lt1"/>
+          </a:fontRef>
+        </p:style>
+        <p:txBody>
+          <a:bodyPr rtlCol="0" anchor="ctr"/>
+          <a:lstStyle/>
+          <a:p>
+            <a:pPr algn="ctr"/>
+          </a:p>
+        </p:txBody>
+      </p:sp>
+      <p:sp>
+        <p:nvSpPr>
+          <p:cNvPr id="4" name="TextBox 3"/>
           <p:cNvSpPr txBox="1"/>
           <p:nvPr/>
         </p:nvSpPr>
         <p:spPr>
           <a:xfrm>
-            <a:off x="731520" y="365760"/>
-            <a:ext cx="10698480" cy="365760"/>
+            <a:off x="731520" y="411480"/>
+            <a:ext cx="9144000" cy="320040"/>
           </a:xfrm>
           <a:prstGeom prst="rect">
             <a:avLst/>
@@ -6548,28 +9627,28 @@
           <a:lstStyle/>
           <a:p>
             <a:pPr>
-              <a:defRPr sz="1100" b="1">
+              <a:defRPr sz="1000" b="1">
                 <a:solidFill>
                   <a:srgbClr val="FF7A00"/>
                 </a:solidFill>
               </a:defRPr>
             </a:pPr>
             <a:r>
-              <a:t>PROBLEM STATEMENT #26016 | MORD &amp; DOLR</a:t>
-            </a:r>
-          </a:p>
-        </p:txBody>
-      </p:sp>
-      <p:sp>
-        <p:nvSpPr>
-          <p:cNvPr id="4" name="TextBox 3"/>
+              <a:t>TECHNICAL PROJECT REVIEW | GOV-TECH &amp; SPATIAL INFORMATICS</a:t>
+            </a:r>
+          </a:p>
+        </p:txBody>
+      </p:sp>
+      <p:sp>
+        <p:nvSpPr>
+          <p:cNvPr id="5" name="TextBox 4"/>
           <p:cNvSpPr txBox="1"/>
           <p:nvPr/>
         </p:nvSpPr>
         <p:spPr>
           <a:xfrm>
-            <a:off x="731520" y="640080"/>
-            <a:ext cx="10698480" cy="731520"/>
+            <a:off x="731520" y="685800"/>
+            <a:ext cx="9601200" cy="685800"/>
           </a:xfrm>
           <a:prstGeom prst="rect">
             <a:avLst/>
@@ -6583,28 +9662,63 @@
           <a:lstStyle/>
           <a:p>
             <a:pPr>
-              <a:defRPr sz="2400" b="1">
-                <a:solidFill>
-                  <a:srgbClr val="F0F6FC"/>
-                </a:solidFill>
-              </a:defRPr>
-            </a:pPr>
-            <a:r>
-              <a:t>e-Office Green-Noting &amp; Cryptographic e-Sign Engine</a:t>
-            </a:r>
-          </a:p>
-        </p:txBody>
-      </p:sp>
-      <p:sp>
-        <p:nvSpPr>
-          <p:cNvPr id="5" name="Rounded Rectangle 4"/>
+              <a:defRPr sz="2200" b="1">
+                <a:solidFill>
+                  <a:srgbClr val="F0F6FC"/>
+                </a:solidFill>
+              </a:defRPr>
+            </a:pPr>
+            <a:r>
+              <a:t>Full-Stack System Architecture &amp; Technology Stack</a:t>
+            </a:r>
+          </a:p>
+        </p:txBody>
+      </p:sp>
+      <p:sp>
+        <p:nvSpPr>
+          <p:cNvPr id="6" name="TextBox 5"/>
+          <p:cNvSpPr txBox="1"/>
+          <p:nvPr/>
+        </p:nvSpPr>
+        <p:spPr>
+          <a:xfrm>
+            <a:off x="10515600" y="411480"/>
+            <a:ext cx="914400" cy="365760"/>
+          </a:xfrm>
+          <a:prstGeom prst="rect">
+            <a:avLst/>
+          </a:prstGeom>
+          <a:noFill/>
+        </p:spPr>
+        <p:txBody>
+          <a:bodyPr wrap="none">
+            <a:spAutoFit/>
+          </a:bodyPr>
+          <a:lstStyle/>
+          <a:p>
+            <a:pPr algn="r">
+              <a:defRPr sz="1100" b="1">
+                <a:solidFill>
+                  <a:srgbClr val="8B949E"/>
+                </a:solidFill>
+              </a:defRPr>
+            </a:pPr>
+            <a:r>
+              <a:t>06 / 15</a:t>
+            </a:r>
+          </a:p>
+        </p:txBody>
+      </p:sp>
+      <p:sp>
+        <p:nvSpPr>
+          <p:cNvPr id="7" name="Rounded Rectangle 6"/>
           <p:cNvSpPr/>
           <p:nvPr/>
         </p:nvSpPr>
         <p:spPr>
           <a:xfrm>
             <a:off x="731520" y="1645920"/>
-            <a:ext cx="3291840" cy="4572000"/>
+            <a:ext cx="5120640" cy="4572000"/>
           </a:xfrm>
           <a:prstGeom prst="roundRect">
             <a:avLst/>
@@ -6642,14 +9756,14 @@
       </p:sp>
       <p:sp>
         <p:nvSpPr>
-          <p:cNvPr id="6" name="TextBox 5"/>
+          <p:cNvPr id="8" name="TextBox 7"/>
           <p:cNvSpPr txBox="1"/>
           <p:nvPr/>
         </p:nvSpPr>
         <p:spPr>
           <a:xfrm>
             <a:off x="914400" y="1783080"/>
-            <a:ext cx="2926080" cy="4297680"/>
+            <a:ext cx="4754880" cy="4297680"/>
           </a:xfrm>
           <a:prstGeom prst="rect">
             <a:avLst/>
@@ -6664,75 +9778,105 @@
           <a:p>
             <a:pPr>
               <a:spcAft>
-                <a:spcPts val="1000"/>
-              </a:spcAft>
-              <a:defRPr sz="1600" b="1">
-                <a:solidFill>
-                  <a:srgbClr val="10B981"/>
-                </a:solidFill>
-              </a:defRPr>
-            </a:pPr>
-            <a:r>
-              <a:t>📜 Authentic e-Office Experience</a:t>
-            </a:r>
-          </a:p>
-          <a:p>
-            <a:pPr>
-              <a:spcAft>
-                <a:spcPts val="600"/>
-              </a:spcAft>
-              <a:defRPr sz="1200">
-                <a:solidFill>
-                  <a:srgbClr val="F0F6FC"/>
-                </a:solidFill>
-              </a:defRPr>
-            </a:pPr>
-            <a:r>
-              <a:t>• Replaces lost physical files with authentic green-tinted e-Office Noting Sheets.</a:t>
-            </a:r>
-          </a:p>
-          <a:p>
-            <a:pPr>
-              <a:spcAft>
-                <a:spcPts val="600"/>
-              </a:spcAft>
-              <a:defRPr sz="1200">
-                <a:solidFill>
-                  <a:srgbClr val="F0F6FC"/>
-                </a:solidFill>
-              </a:defRPr>
-            </a:pPr>
-            <a:r>
-              <a:t>• Chronological audit trail recording every approving officer, designation, and timestamp.</a:t>
-            </a:r>
-          </a:p>
-          <a:p>
-            <a:pPr>
-              <a:spcAft>
-                <a:spcPts val="600"/>
-              </a:spcAft>
-              <a:defRPr sz="1200">
-                <a:solidFill>
-                  <a:srgbClr val="F0F6FC"/>
-                </a:solidFill>
-              </a:defRPr>
-            </a:pPr>
-            <a:r>
-              <a:t>• Statutory compliance checklist (Gram Sabha, SIA approval, Form 7/12, valuation certificate).</a:t>
-            </a:r>
-          </a:p>
-        </p:txBody>
-      </p:sp>
-      <p:sp>
-        <p:nvSpPr>
-          <p:cNvPr id="7" name="Rounded Rectangle 6"/>
+                <a:spcPts val="800"/>
+              </a:spcAft>
+              <a:defRPr sz="1500" b="1">
+                <a:solidFill>
+                  <a:srgbClr val="38BDF8"/>
+                </a:solidFill>
+              </a:defRPr>
+            </a:pPr>
+            <a:r>
+              <a:t>🏗️ Architectural Tiers &amp; Flow</a:t>
+            </a:r>
+          </a:p>
+          <a:p>
+            <a:pPr>
+              <a:spcAft>
+                <a:spcPts val="500"/>
+              </a:spcAft>
+              <a:defRPr sz="1100">
+                <a:solidFill>
+                  <a:srgbClr val="F0F6FC"/>
+                </a:solidFill>
+              </a:defRPr>
+            </a:pPr>
+            <a:r>
+              <a:t>• Client Tier: Lightweight semantic HTML5, Vanilla CSS3 (Custom Design System), ES6+ JavaScript modules with zero framework bloat.</a:t>
+            </a:r>
+          </a:p>
+          <a:p>
+            <a:pPr>
+              <a:spcAft>
+                <a:spcPts val="500"/>
+              </a:spcAft>
+              <a:defRPr sz="1100">
+                <a:solidFill>
+                  <a:srgbClr val="F0F6FC"/>
+                </a:solidFill>
+              </a:defRPr>
+            </a:pPr>
+            <a:r>
+              <a:t>• Application Tier: Node.js Express REST API (v1) with modular controller-service-repository pattern, route protection &amp; rate limiting.</a:t>
+            </a:r>
+          </a:p>
+          <a:p>
+            <a:pPr>
+              <a:spcAft>
+                <a:spcPts val="500"/>
+              </a:spcAft>
+              <a:defRPr sz="1100">
+                <a:solidFill>
+                  <a:srgbClr val="F0F6FC"/>
+                </a:solidFill>
+              </a:defRPr>
+            </a:pPr>
+            <a:r>
+              <a:t>• Database Tier: Adaptive dual-engine persistence — Enterprise MySQL 8.0 with automatic zero-configuration SQLite3 fallback.</a:t>
+            </a:r>
+          </a:p>
+          <a:p>
+            <a:pPr>
+              <a:spcAft>
+                <a:spcPts val="500"/>
+              </a:spcAft>
+              <a:defRPr sz="1100">
+                <a:solidFill>
+                  <a:srgbClr val="F0F6FC"/>
+                </a:solidFill>
+              </a:defRPr>
+            </a:pPr>
+            <a:r>
+              <a:t>• Spatial Tier: Leaflet.js mapping engine with GeoJSON cadastral vector layers, ESRI World Satellite imagery, and Carto tiles.</a:t>
+            </a:r>
+          </a:p>
+          <a:p>
+            <a:pPr>
+              <a:spcAft>
+                <a:spcPts val="500"/>
+              </a:spcAft>
+              <a:defRPr sz="1100">
+                <a:solidFill>
+                  <a:srgbClr val="F0F6FC"/>
+                </a:solidFill>
+              </a:defRPr>
+            </a:pPr>
+            <a:r>
+              <a:t>• Security Tier: Helmet security headers, CORS origin verification, JWT session tokens, and SHA-256 cryptographic document hashing.</a:t>
+            </a:r>
+          </a:p>
+        </p:txBody>
+      </p:sp>
+      <p:sp>
+        <p:nvSpPr>
+          <p:cNvPr id="9" name="Rounded Rectangle 8"/>
           <p:cNvSpPr/>
           <p:nvPr/>
         </p:nvSpPr>
         <p:spPr>
           <a:xfrm>
-            <a:off x="4389120" y="1645920"/>
-            <a:ext cx="3291840" cy="4572000"/>
+            <a:off x="6217920" y="1645920"/>
+            <a:ext cx="5212080" cy="4572000"/>
           </a:xfrm>
           <a:prstGeom prst="roundRect">
             <a:avLst/>
@@ -6770,14 +9914,14 @@
       </p:sp>
       <p:sp>
         <p:nvSpPr>
-          <p:cNvPr id="8" name="TextBox 7"/>
+          <p:cNvPr id="10" name="TextBox 9"/>
           <p:cNvSpPr txBox="1"/>
           <p:nvPr/>
         </p:nvSpPr>
         <p:spPr>
           <a:xfrm>
-            <a:off x="4572000" y="1783080"/>
-            <a:ext cx="2926080" cy="4297680"/>
+            <a:off x="6400800" y="1783080"/>
+            <a:ext cx="4846320" cy="4297680"/>
           </a:xfrm>
           <a:prstGeom prst="rect">
             <a:avLst/>
@@ -6792,189 +9936,106 @@
           <a:p>
             <a:pPr>
               <a:spcAft>
-                <a:spcPts val="1000"/>
-              </a:spcAft>
-              <a:defRPr sz="1600" b="1">
+                <a:spcPts val="800"/>
+              </a:spcAft>
+              <a:defRPr sz="1500" b="1">
                 <a:solidFill>
                   <a:srgbClr val="FF7A00"/>
                 </a:solidFill>
               </a:defRPr>
             </a:pPr>
             <a:r>
-              <a:t>✍️ Cryptographic DSC / e-Sign</a:t>
-            </a:r>
-          </a:p>
-          <a:p>
-            <a:pPr>
-              <a:spcAft>
-                <a:spcPts val="600"/>
-              </a:spcAft>
-              <a:defRPr sz="1200">
-                <a:solidFill>
-                  <a:srgbClr val="F0F6FC"/>
-                </a:solidFill>
-              </a:defRPr>
-            </a:pPr>
-            <a:r>
-              <a:t>• Officers approve files using Aadhaar OTP / Digital Signature Certificate (DSC).</a:t>
-            </a:r>
-          </a:p>
-          <a:p>
-            <a:pPr>
-              <a:spcAft>
-                <a:spcPts val="600"/>
-              </a:spcAft>
-              <a:defRPr sz="1200">
-                <a:solidFill>
-                  <a:srgbClr val="F0F6FC"/>
-                </a:solidFill>
-              </a:defRPr>
-            </a:pPr>
-            <a:r>
-              <a:t>• Generates SHA-256 tamper-evident cryptographic hash stamped on the notification.</a:t>
-            </a:r>
-          </a:p>
-          <a:p>
-            <a:pPr>
-              <a:spcAft>
-                <a:spcPts val="600"/>
-              </a:spcAft>
-              <a:defRPr sz="1200">
-                <a:solidFill>
-                  <a:srgbClr val="F0F6FC"/>
-                </a:solidFill>
-              </a:defRPr>
-            </a:pPr>
-            <a:r>
-              <a:t>• Instant automated file forwarding to next statutory stage (e.g., Sec 11 to Sec 15).</a:t>
-            </a:r>
-          </a:p>
-        </p:txBody>
-      </p:sp>
-      <p:sp>
-        <p:nvSpPr>
-          <p:cNvPr id="9" name="Rounded Rectangle 8"/>
-          <p:cNvSpPr/>
-          <p:nvPr/>
-        </p:nvSpPr>
-        <p:spPr>
-          <a:xfrm>
-            <a:off x="8046720" y="1645920"/>
-            <a:ext cx="3383280" cy="4572000"/>
-          </a:xfrm>
-          <a:prstGeom prst="roundRect">
-            <a:avLst/>
-          </a:prstGeom>
-          <a:solidFill>
-            <a:srgbClr val="112240"/>
-          </a:solidFill>
-          <a:ln w="19050">
-            <a:solidFill>
-              <a:srgbClr val="233554"/>
-            </a:solidFill>
-          </a:ln>
-        </p:spPr>
-        <p:style>
-          <a:lnRef idx="1">
-            <a:schemeClr val="accent1"/>
-          </a:lnRef>
-          <a:fillRef idx="3">
-            <a:schemeClr val="accent1"/>
-          </a:fillRef>
-          <a:effectRef idx="2">
-            <a:schemeClr val="accent1"/>
-          </a:effectRef>
-          <a:fontRef idx="minor">
-            <a:schemeClr val="lt1"/>
-          </a:fontRef>
-        </p:style>
-        <p:txBody>
-          <a:bodyPr rtlCol="0" anchor="ctr"/>
-          <a:lstStyle/>
-          <a:p>
-            <a:pPr algn="ctr"/>
-          </a:p>
-        </p:txBody>
-      </p:sp>
-      <p:sp>
-        <p:nvSpPr>
-          <p:cNvPr id="10" name="TextBox 9"/>
-          <p:cNvSpPr txBox="1"/>
-          <p:nvPr/>
-        </p:nvSpPr>
-        <p:spPr>
-          <a:xfrm>
-            <a:off x="8229600" y="1783080"/>
-            <a:ext cx="3017520" cy="4297680"/>
-          </a:xfrm>
-          <a:prstGeom prst="rect">
-            <a:avLst/>
-          </a:prstGeom>
-          <a:noFill/>
-        </p:spPr>
-        <p:txBody>
-          <a:bodyPr wrap="square">
-            <a:spAutoFit/>
-          </a:bodyPr>
-          <a:lstStyle/>
-          <a:p>
-            <a:pPr>
-              <a:spcAft>
-                <a:spcPts val="1000"/>
-              </a:spcAft>
-              <a:defRPr sz="1600" b="1">
-                <a:solidFill>
-                  <a:srgbClr val="F5A623"/>
-                </a:solidFill>
-              </a:defRPr>
-            </a:pPr>
-            <a:r>
-              <a:t>⚖️ Section 15 Hearing Docket</a:t>
-            </a:r>
-          </a:p>
-          <a:p>
-            <a:pPr>
-              <a:spcAft>
-                <a:spcPts val="600"/>
-              </a:spcAft>
-              <a:defRPr sz="1200">
-                <a:solidFill>
-                  <a:srgbClr val="F0F6FC"/>
-                </a:solidFill>
-              </a:defRPr>
-            </a:pPr>
-            <a:r>
-              <a:t>• Dedicated quasi-judicial docket for hearing citizen objections.</a:t>
-            </a:r>
-          </a:p>
-          <a:p>
-            <a:pPr>
-              <a:spcAft>
-                <a:spcPts val="600"/>
-              </a:spcAft>
-              <a:defRPr sz="1200">
-                <a:solidFill>
-                  <a:srgbClr val="F0F6FC"/>
-                </a:solidFill>
-              </a:defRPr>
-            </a:pPr>
-            <a:r>
-              <a:t>• Logs objection types (Boundary clash, compensation quantum, tenancy claims).</a:t>
-            </a:r>
-          </a:p>
-          <a:p>
-            <a:pPr>
-              <a:spcAft>
-                <a:spcPts val="600"/>
-              </a:spcAft>
-              <a:defRPr sz="1200">
-                <a:solidFill>
-                  <a:srgbClr val="F0F6FC"/>
-                </a:solidFill>
-              </a:defRPr>
-            </a:pPr>
-            <a:r>
-              <a:t>• Produces legally binding CALA Speaking Orders to withstand High Court judicial review.</a:t>
+              <a:t>💻 Production Technology Specifications</a:t>
+            </a:r>
+          </a:p>
+          <a:p>
+            <a:pPr>
+              <a:spcAft>
+                <a:spcPts val="500"/>
+              </a:spcAft>
+              <a:defRPr sz="1100">
+                <a:solidFill>
+                  <a:srgbClr val="F0F6FC"/>
+                </a:solidFill>
+              </a:defRPr>
+            </a:pPr>
+            <a:r>
+              <a:t>• Backend Runtime: Node.js v20+ / Express v5 (High concurrency, sub-millisecond route response time).</a:t>
+            </a:r>
+          </a:p>
+          <a:p>
+            <a:pPr>
+              <a:spcAft>
+                <a:spcPts val="500"/>
+              </a:spcAft>
+              <a:defRPr sz="1100">
+                <a:solidFill>
+                  <a:srgbClr val="F0F6FC"/>
+                </a:solidFill>
+              </a:defRPr>
+            </a:pPr>
+            <a:r>
+              <a:t>• Database Engines: better-sqlite3 v13 / mysql2 v3 (Auto-migrated schema, synthetic national corridors seed).</a:t>
+            </a:r>
+          </a:p>
+          <a:p>
+            <a:pPr>
+              <a:spcAft>
+                <a:spcPts val="500"/>
+              </a:spcAft>
+              <a:defRPr sz="1100">
+                <a:solidFill>
+                  <a:srgbClr val="F0F6FC"/>
+                </a:solidFill>
+              </a:defRPr>
+            </a:pPr>
+            <a:r>
+              <a:t>• Interactive API Docs: OpenAPI 3.0 / Swagger UI mounted at `/api/docs` with live endpoint testing.</a:t>
+            </a:r>
+          </a:p>
+          <a:p>
+            <a:pPr>
+              <a:spcAft>
+                <a:spcPts val="500"/>
+              </a:spcAft>
+              <a:defRPr sz="1100">
+                <a:solidFill>
+                  <a:srgbClr val="F0F6FC"/>
+                </a:solidFill>
+              </a:defRPr>
+            </a:pPr>
+            <a:r>
+              <a:t>• Authentication: JWT (JSON Web Tokens) with 24-hour expiration and role-based access control (RBAC).</a:t>
+            </a:r>
+          </a:p>
+          <a:p>
+            <a:pPr>
+              <a:spcAft>
+                <a:spcPts val="500"/>
+              </a:spcAft>
+              <a:defRPr sz="1100">
+                <a:solidFill>
+                  <a:srgbClr val="F0F6FC"/>
+                </a:solidFill>
+              </a:defRPr>
+            </a:pPr>
+            <a:r>
+              <a:t>• Integrations: NIC DSC digital signature adapter, PFMS sandbox payment gateway, SMS/Email notification dispatcher.</a:t>
+            </a:r>
+          </a:p>
+          <a:p>
+            <a:pPr>
+              <a:spcAft>
+                <a:spcPts val="500"/>
+              </a:spcAft>
+              <a:defRPr sz="1100">
+                <a:solidFill>
+                  <a:srgbClr val="F0F6FC"/>
+                </a:solidFill>
+              </a:defRPr>
+            </a:pPr>
+            <a:r>
+              <a:t>• Test Automation: Jest v30 &amp; Supertest suite covering authentication, compensation math, and workflow transitions.</a:t>
             </a:r>
           </a:p>
         </p:txBody>
@@ -7042,14 +10103,57 @@
       </p:sp>
       <p:sp>
         <p:nvSpPr>
-          <p:cNvPr id="3" name="TextBox 2"/>
+          <p:cNvPr id="3" name="Rectangle 2"/>
+          <p:cNvSpPr/>
+          <p:nvPr/>
+        </p:nvSpPr>
+        <p:spPr>
+          <a:xfrm>
+            <a:off x="731520" y="320040"/>
+            <a:ext cx="10728655" cy="36576"/>
+          </a:xfrm>
+          <a:prstGeom prst="rect">
+            <a:avLst/>
+          </a:prstGeom>
+          <a:solidFill>
+            <a:srgbClr val="FF7A00"/>
+          </a:solidFill>
+          <a:ln>
+            <a:noFill/>
+          </a:ln>
+        </p:spPr>
+        <p:style>
+          <a:lnRef idx="1">
+            <a:schemeClr val="accent1"/>
+          </a:lnRef>
+          <a:fillRef idx="3">
+            <a:schemeClr val="accent1"/>
+          </a:fillRef>
+          <a:effectRef idx="2">
+            <a:schemeClr val="accent1"/>
+          </a:effectRef>
+          <a:fontRef idx="minor">
+            <a:schemeClr val="lt1"/>
+          </a:fontRef>
+        </p:style>
+        <p:txBody>
+          <a:bodyPr rtlCol="0" anchor="ctr"/>
+          <a:lstStyle/>
+          <a:p>
+            <a:pPr algn="ctr"/>
+          </a:p>
+        </p:txBody>
+      </p:sp>
+      <p:sp>
+        <p:nvSpPr>
+          <p:cNvPr id="4" name="TextBox 3"/>
           <p:cNvSpPr txBox="1"/>
           <p:nvPr/>
         </p:nvSpPr>
         <p:spPr>
           <a:xfrm>
-            <a:off x="731520" y="365760"/>
-            <a:ext cx="10698480" cy="365760"/>
+            <a:off x="731520" y="411480"/>
+            <a:ext cx="9144000" cy="320040"/>
           </a:xfrm>
           <a:prstGeom prst="rect">
             <a:avLst/>
@@ -7063,28 +10167,28 @@
           <a:lstStyle/>
           <a:p>
             <a:pPr>
-              <a:defRPr sz="1100" b="1">
+              <a:defRPr sz="1000" b="1">
                 <a:solidFill>
                   <a:srgbClr val="FF7A00"/>
                 </a:solidFill>
               </a:defRPr>
             </a:pPr>
             <a:r>
-              <a:t>PROBLEM STATEMENT #26016 | MORD &amp; DOLR</a:t>
-            </a:r>
-          </a:p>
-        </p:txBody>
-      </p:sp>
-      <p:sp>
-        <p:nvSpPr>
-          <p:cNvPr id="4" name="TextBox 3"/>
+              <a:t>TECHNICAL PROJECT REVIEW | GOV-TECH &amp; SPATIAL INFORMATICS</a:t>
+            </a:r>
+          </a:p>
+        </p:txBody>
+      </p:sp>
+      <p:sp>
+        <p:nvSpPr>
+          <p:cNvPr id="5" name="TextBox 4"/>
           <p:cNvSpPr txBox="1"/>
           <p:nvPr/>
         </p:nvSpPr>
         <p:spPr>
           <a:xfrm>
-            <a:off x="731520" y="640080"/>
-            <a:ext cx="10698480" cy="731520"/>
+            <a:off x="731520" y="685800"/>
+            <a:ext cx="9601200" cy="685800"/>
           </a:xfrm>
           <a:prstGeom prst="rect">
             <a:avLst/>
@@ -7098,28 +10202,63 @@
           <a:lstStyle/>
           <a:p>
             <a:pPr>
-              <a:defRPr sz="2400" b="1">
-                <a:solidFill>
-                  <a:srgbClr val="F0F6FC"/>
-                </a:solidFill>
-              </a:defRPr>
-            </a:pPr>
-            <a:r>
-              <a:t>Section 25 Statutory Lapse Alarm &amp; Early Warning System</a:t>
-            </a:r>
-          </a:p>
-        </p:txBody>
-      </p:sp>
-      <p:sp>
-        <p:nvSpPr>
-          <p:cNvPr id="5" name="Rounded Rectangle 4"/>
+              <a:defRPr sz="2200" b="1">
+                <a:solidFill>
+                  <a:srgbClr val="F0F6FC"/>
+                </a:solidFill>
+              </a:defRPr>
+            </a:pPr>
+            <a:r>
+              <a:t>Multi-Stakeholder Federal Governance &amp; RBAC Personas</a:t>
+            </a:r>
+          </a:p>
+        </p:txBody>
+      </p:sp>
+      <p:sp>
+        <p:nvSpPr>
+          <p:cNvPr id="6" name="TextBox 5"/>
+          <p:cNvSpPr txBox="1"/>
+          <p:nvPr/>
+        </p:nvSpPr>
+        <p:spPr>
+          <a:xfrm>
+            <a:off x="10515600" y="411480"/>
+            <a:ext cx="914400" cy="365760"/>
+          </a:xfrm>
+          <a:prstGeom prst="rect">
+            <a:avLst/>
+          </a:prstGeom>
+          <a:noFill/>
+        </p:spPr>
+        <p:txBody>
+          <a:bodyPr wrap="none">
+            <a:spAutoFit/>
+          </a:bodyPr>
+          <a:lstStyle/>
+          <a:p>
+            <a:pPr algn="r">
+              <a:defRPr sz="1100" b="1">
+                <a:solidFill>
+                  <a:srgbClr val="8B949E"/>
+                </a:solidFill>
+              </a:defRPr>
+            </a:pPr>
+            <a:r>
+              <a:t>07 / 15</a:t>
+            </a:r>
+          </a:p>
+        </p:txBody>
+      </p:sp>
+      <p:sp>
+        <p:nvSpPr>
+          <p:cNvPr id="7" name="Rounded Rectangle 6"/>
           <p:cNvSpPr/>
           <p:nvPr/>
         </p:nvSpPr>
         <p:spPr>
           <a:xfrm>
             <a:off x="731520" y="1645920"/>
-            <a:ext cx="5120640" cy="4572000"/>
+            <a:ext cx="5120640" cy="2194560"/>
           </a:xfrm>
           <a:prstGeom prst="roundRect">
             <a:avLst/>
@@ -7157,14 +10296,14 @@
       </p:sp>
       <p:sp>
         <p:nvSpPr>
-          <p:cNvPr id="6" name="TextBox 5"/>
+          <p:cNvPr id="8" name="TextBox 7"/>
           <p:cNvSpPr txBox="1"/>
           <p:nvPr/>
         </p:nvSpPr>
         <p:spPr>
           <a:xfrm>
             <a:off x="914400" y="1783080"/>
-            <a:ext cx="4754880" cy="4297680"/>
+            <a:ext cx="4754880" cy="1920240"/>
           </a:xfrm>
           <a:prstGeom prst="rect">
             <a:avLst/>
@@ -7179,75 +10318,75 @@
           <a:p>
             <a:pPr>
               <a:spcAft>
-                <a:spcPts val="1000"/>
-              </a:spcAft>
-              <a:defRPr sz="1600" b="1">
-                <a:solidFill>
-                  <a:srgbClr val="EF4444"/>
-                </a:solidFill>
-              </a:defRPr>
-            </a:pPr>
-            <a:r>
-              <a:t>🚨 The Critical Statutory Clause</a:t>
-            </a:r>
-          </a:p>
-          <a:p>
-            <a:pPr>
-              <a:spcAft>
-                <a:spcPts val="600"/>
-              </a:spcAft>
-              <a:defRPr sz="1200">
-                <a:solidFill>
-                  <a:srgbClr val="F0F6FC"/>
-                </a:solidFill>
-              </a:defRPr>
-            </a:pPr>
-            <a:r>
-              <a:t>• Section 25 of RFCTLARR Act 2013 is strict and non-negotiable: The Collector MUST make an award under Section 23 within 12 months from the date of publication of the Section 19 declaration.</a:t>
-            </a:r>
-          </a:p>
-          <a:p>
-            <a:pPr>
-              <a:spcAft>
-                <a:spcPts val="600"/>
-              </a:spcAft>
-              <a:defRPr sz="1200">
-                <a:solidFill>
-                  <a:srgbClr val="F0F6FC"/>
-                </a:solidFill>
-              </a:defRPr>
-            </a:pPr>
-            <a:r>
-              <a:t>• Consequence of failure: The ENTIRE proceedings for acquisition shall LAPSE, wasting hundreds of crores and causing years of delay.</a:t>
-            </a:r>
-          </a:p>
-          <a:p>
-            <a:pPr>
-              <a:spcAft>
-                <a:spcPts val="600"/>
-              </a:spcAft>
-              <a:defRPr sz="1200">
-                <a:solidFill>
-                  <a:srgbClr val="F0F6FC"/>
-                </a:solidFill>
-              </a:defRPr>
-            </a:pPr>
-            <a:r>
-              <a:t>• NLAMS Solution: An active, real-time countdown engine that calculates exact elapsed days and remaining calendar days for every active project.</a:t>
-            </a:r>
-          </a:p>
-        </p:txBody>
-      </p:sp>
-      <p:sp>
-        <p:nvSpPr>
-          <p:cNvPr id="7" name="Rounded Rectangle 6"/>
+                <a:spcPts val="800"/>
+              </a:spcAft>
+              <a:defRPr sz="1500" b="1">
+                <a:solidFill>
+                  <a:srgbClr val="FF7A00"/>
+                </a:solidFill>
+              </a:defRPr>
+            </a:pPr>
+            <a:r>
+              <a:t>🏛️ Central Ministries (MoRD, MoRTH, Railways)</a:t>
+            </a:r>
+          </a:p>
+          <a:p>
+            <a:pPr>
+              <a:spcAft>
+                <a:spcPts val="500"/>
+              </a:spcAft>
+              <a:defRPr sz="1100">
+                <a:solidFill>
+                  <a:srgbClr val="F0F6FC"/>
+                </a:solidFill>
+              </a:defRPr>
+            </a:pPr>
+            <a:r>
+              <a:t>• Pan-India decision support covering all 28 States &amp; 8 Union Territories.</a:t>
+            </a:r>
+          </a:p>
+          <a:p>
+            <a:pPr>
+              <a:spcAft>
+                <a:spcPts val="500"/>
+              </a:spcAft>
+              <a:defRPr sz="1100">
+                <a:solidFill>
+                  <a:srgbClr val="F0F6FC"/>
+                </a:solidFill>
+              </a:defRPr>
+            </a:pPr>
+            <a:r>
+              <a:t>• Inter-ministerial budget sanction, national grant releases &amp; PFMS escrow monitoring.</a:t>
+            </a:r>
+          </a:p>
+          <a:p>
+            <a:pPr>
+              <a:spcAft>
+                <a:spcPts val="500"/>
+              </a:spcAft>
+              <a:defRPr sz="1100">
+                <a:solidFill>
+                  <a:srgbClr val="F0F6FC"/>
+                </a:solidFill>
+              </a:defRPr>
+            </a:pPr>
+            <a:r>
+              <a:t>• Parliamentary Question (PQ) generator for Lok Sabha &amp; Rajya Sabha briefings.</a:t>
+            </a:r>
+          </a:p>
+        </p:txBody>
+      </p:sp>
+      <p:sp>
+        <p:nvSpPr>
+          <p:cNvPr id="9" name="Rounded Rectangle 8"/>
           <p:cNvSpPr/>
           <p:nvPr/>
         </p:nvSpPr>
         <p:spPr>
           <a:xfrm>
             <a:off x="6217920" y="1645920"/>
-            <a:ext cx="5212080" cy="4572000"/>
+            <a:ext cx="5212080" cy="2194560"/>
           </a:xfrm>
           <a:prstGeom prst="roundRect">
             <a:avLst/>
@@ -7285,14 +10424,14 @@
       </p:sp>
       <p:sp>
         <p:nvSpPr>
-          <p:cNvPr id="8" name="TextBox 7"/>
+          <p:cNvPr id="10" name="TextBox 9"/>
           <p:cNvSpPr txBox="1"/>
           <p:nvPr/>
         </p:nvSpPr>
         <p:spPr>
           <a:xfrm>
             <a:off x="6400800" y="1783080"/>
-            <a:ext cx="4846320" cy="4297680"/>
+            <a:ext cx="4846320" cy="1920240"/>
           </a:xfrm>
           <a:prstGeom prst="rect">
             <a:avLst/>
@@ -7307,76 +10446,317 @@
           <a:p>
             <a:pPr>
               <a:spcAft>
-                <a:spcPts val="1000"/>
-              </a:spcAft>
-              <a:defRPr sz="1600" b="1">
+                <a:spcPts val="800"/>
+              </a:spcAft>
+              <a:defRPr sz="1500" b="1">
                 <a:solidFill>
                   <a:srgbClr val="F5A623"/>
                 </a:solidFill>
               </a:defRPr>
             </a:pPr>
             <a:r>
-              <a:t>⚡ Automated Escalation Protocol</a:t>
-            </a:r>
-          </a:p>
-          <a:p>
-            <a:pPr>
-              <a:spcAft>
-                <a:spcPts val="600"/>
-              </a:spcAft>
-              <a:defRPr sz="1200">
-                <a:solidFill>
-                  <a:srgbClr val="F0F6FC"/>
-                </a:solidFill>
-              </a:defRPr>
-            </a:pPr>
-            <a:r>
-              <a:t>• 🟢 Normal Phase (&gt;90 Days): Routine weekly status digest sent to District Collector.</a:t>
-            </a:r>
-          </a:p>
-          <a:p>
-            <a:pPr>
-              <a:spcAft>
-                <a:spcPts val="600"/>
-              </a:spcAft>
-              <a:defRPr sz="1200">
-                <a:solidFill>
-                  <a:srgbClr val="F0F6FC"/>
-                </a:solidFill>
-              </a:defRPr>
-            </a:pPr>
-            <a:r>
-              <a:t>• 🟡 Warning Phase (31-90 Days): Amber alert flagged on State Principal Secretary dashboard.</a:t>
-            </a:r>
-          </a:p>
-          <a:p>
-            <a:pPr>
-              <a:spcAft>
-                <a:spcPts val="600"/>
-              </a:spcAft>
-              <a:defRPr sz="1200">
-                <a:solidFill>
-                  <a:srgbClr val="F0F6FC"/>
-                </a:solidFill>
-              </a:defRPr>
-            </a:pPr>
-            <a:r>
-              <a:t>• 🔴 Critical Breach Danger (&lt;=30 Days): High-priority red banner, SMS alerts to CALA, and automated draft of Ministerial Show-Cause Notice.</a:t>
-            </a:r>
-          </a:p>
-          <a:p>
-            <a:pPr>
-              <a:spcAft>
-                <a:spcPts val="600"/>
-              </a:spcAft>
-              <a:defRPr sz="1200">
-                <a:solidFill>
-                  <a:srgbClr val="F0F6FC"/>
-                </a:solidFill>
-              </a:defRPr>
-            </a:pPr>
-            <a:r>
-              <a:t>• One-Click Intervention: Central Ministry can issue emergency fast-track directions or sanction additional valuation officers to prevent lapse.</a:t>
+              <a:t>🏢 State Nodal Departments (All 28 State Governments)</a:t>
+            </a:r>
+          </a:p>
+          <a:p>
+            <a:pPr>
+              <a:spcAft>
+                <a:spcPts val="500"/>
+              </a:spcAft>
+              <a:defRPr sz="1100">
+                <a:solidFill>
+                  <a:srgbClr val="F0F6FC"/>
+                </a:solidFill>
+              </a:defRPr>
+            </a:pPr>
+            <a:r>
+              <a:t>• State Gazette notification issuance &amp; e-Gazette integration across all States.</a:t>
+            </a:r>
+          </a:p>
+          <a:p>
+            <a:pPr>
+              <a:spcAft>
+                <a:spcPts val="500"/>
+              </a:spcAft>
+              <a:defRPr sz="1100">
+                <a:solidFill>
+                  <a:srgbClr val="F0F6FC"/>
+                </a:solidFill>
+              </a:defRPr>
+            </a:pPr>
+            <a:r>
+              <a:t>• Sync with State Land Registries: UP Bhulekh, MahaBhumi, Bhoomi (KA), Tamil Nilam (TN), Webland (AP).</a:t>
+            </a:r>
+          </a:p>
+          <a:p>
+            <a:pPr>
+              <a:spcAft>
+                <a:spcPts val="500"/>
+              </a:spcAft>
+              <a:defRPr sz="1100">
+                <a:solidFill>
+                  <a:srgbClr val="F0F6FC"/>
+                </a:solidFill>
+              </a:defRPr>
+            </a:pPr>
+            <a:r>
+              <a:t>• Statewide CALA cycle time tracking &amp; statutory bottleneck escalation.</a:t>
+            </a:r>
+          </a:p>
+        </p:txBody>
+      </p:sp>
+      <p:sp>
+        <p:nvSpPr>
+          <p:cNvPr id="11" name="Rounded Rectangle 10"/>
+          <p:cNvSpPr/>
+          <p:nvPr/>
+        </p:nvSpPr>
+        <p:spPr>
+          <a:xfrm>
+            <a:off x="731520" y="4114800"/>
+            <a:ext cx="5120640" cy="2194560"/>
+          </a:xfrm>
+          <a:prstGeom prst="roundRect">
+            <a:avLst/>
+          </a:prstGeom>
+          <a:solidFill>
+            <a:srgbClr val="112240"/>
+          </a:solidFill>
+          <a:ln w="19050">
+            <a:solidFill>
+              <a:srgbClr val="233554"/>
+            </a:solidFill>
+          </a:ln>
+        </p:spPr>
+        <p:style>
+          <a:lnRef idx="1">
+            <a:schemeClr val="accent1"/>
+          </a:lnRef>
+          <a:fillRef idx="3">
+            <a:schemeClr val="accent1"/>
+          </a:fillRef>
+          <a:effectRef idx="2">
+            <a:schemeClr val="accent1"/>
+          </a:effectRef>
+          <a:fontRef idx="minor">
+            <a:schemeClr val="lt1"/>
+          </a:fontRef>
+        </p:style>
+        <p:txBody>
+          <a:bodyPr rtlCol="0" anchor="ctr"/>
+          <a:lstStyle/>
+          <a:p>
+            <a:pPr algn="ctr"/>
+          </a:p>
+        </p:txBody>
+      </p:sp>
+      <p:sp>
+        <p:nvSpPr>
+          <p:cNvPr id="12" name="TextBox 11"/>
+          <p:cNvSpPr txBox="1"/>
+          <p:nvPr/>
+        </p:nvSpPr>
+        <p:spPr>
+          <a:xfrm>
+            <a:off x="914400" y="4251960"/>
+            <a:ext cx="4754880" cy="1920240"/>
+          </a:xfrm>
+          <a:prstGeom prst="rect">
+            <a:avLst/>
+          </a:prstGeom>
+          <a:noFill/>
+        </p:spPr>
+        <p:txBody>
+          <a:bodyPr wrap="square">
+            <a:spAutoFit/>
+          </a:bodyPr>
+          <a:lstStyle/>
+          <a:p>
+            <a:pPr>
+              <a:spcAft>
+                <a:spcPts val="800"/>
+              </a:spcAft>
+              <a:defRPr sz="1500" b="1">
+                <a:solidFill>
+                  <a:srgbClr val="10B981"/>
+                </a:solidFill>
+              </a:defRPr>
+            </a:pPr>
+            <a:r>
+              <a:t>⚖️ District Administration (Collector / CALA)</a:t>
+            </a:r>
+          </a:p>
+          <a:p>
+            <a:pPr>
+              <a:spcAft>
+                <a:spcPts val="500"/>
+              </a:spcAft>
+              <a:defRPr sz="1100">
+                <a:solidFill>
+                  <a:srgbClr val="F0F6FC"/>
+                </a:solidFill>
+              </a:defRPr>
+            </a:pPr>
+            <a:r>
+              <a:t>• Quasi-judicial Section 15 citizen objection hearings &amp; speaking orders in all districts.</a:t>
+            </a:r>
+          </a:p>
+          <a:p>
+            <a:pPr>
+              <a:spcAft>
+                <a:spcPts val="500"/>
+              </a:spcAft>
+              <a:defRPr sz="1100">
+                <a:solidFill>
+                  <a:srgbClr val="F0F6FC"/>
+                </a:solidFill>
+              </a:defRPr>
+            </a:pPr>
+            <a:r>
+              <a:t>• Award formulation under Sec 23 with mandatory 100% solatium calculation.</a:t>
+            </a:r>
+          </a:p>
+          <a:p>
+            <a:pPr>
+              <a:spcAft>
+                <a:spcPts val="500"/>
+              </a:spcAft>
+              <a:defRPr sz="1100">
+                <a:solidFill>
+                  <a:srgbClr val="F0F6FC"/>
+                </a:solidFill>
+              </a:defRPr>
+            </a:pPr>
+            <a:r>
+              <a:t>• e-Office Green-Noting scrutinies &amp; Cryptographic e-Sign approvals.</a:t>
+            </a:r>
+          </a:p>
+        </p:txBody>
+      </p:sp>
+      <p:sp>
+        <p:nvSpPr>
+          <p:cNvPr id="13" name="Rounded Rectangle 12"/>
+          <p:cNvSpPr/>
+          <p:nvPr/>
+        </p:nvSpPr>
+        <p:spPr>
+          <a:xfrm>
+            <a:off x="6217920" y="4114800"/>
+            <a:ext cx="5212080" cy="2194560"/>
+          </a:xfrm>
+          <a:prstGeom prst="roundRect">
+            <a:avLst/>
+          </a:prstGeom>
+          <a:solidFill>
+            <a:srgbClr val="112240"/>
+          </a:solidFill>
+          <a:ln w="19050">
+            <a:solidFill>
+              <a:srgbClr val="233554"/>
+            </a:solidFill>
+          </a:ln>
+        </p:spPr>
+        <p:style>
+          <a:lnRef idx="1">
+            <a:schemeClr val="accent1"/>
+          </a:lnRef>
+          <a:fillRef idx="3">
+            <a:schemeClr val="accent1"/>
+          </a:fillRef>
+          <a:effectRef idx="2">
+            <a:schemeClr val="accent1"/>
+          </a:effectRef>
+          <a:fontRef idx="minor">
+            <a:schemeClr val="lt1"/>
+          </a:fontRef>
+        </p:style>
+        <p:txBody>
+          <a:bodyPr rtlCol="0" anchor="ctr"/>
+          <a:lstStyle/>
+          <a:p>
+            <a:pPr algn="ctr"/>
+          </a:p>
+        </p:txBody>
+      </p:sp>
+      <p:sp>
+        <p:nvSpPr>
+          <p:cNvPr id="14" name="TextBox 13"/>
+          <p:cNvSpPr txBox="1"/>
+          <p:nvPr/>
+        </p:nvSpPr>
+        <p:spPr>
+          <a:xfrm>
+            <a:off x="6400800" y="4251960"/>
+            <a:ext cx="4846320" cy="1920240"/>
+          </a:xfrm>
+          <a:prstGeom prst="rect">
+            <a:avLst/>
+          </a:prstGeom>
+          <a:noFill/>
+        </p:spPr>
+        <p:txBody>
+          <a:bodyPr wrap="square">
+            <a:spAutoFit/>
+          </a:bodyPr>
+          <a:lstStyle/>
+          <a:p>
+            <a:pPr>
+              <a:spcAft>
+                <a:spcPts val="800"/>
+              </a:spcAft>
+              <a:defRPr sz="1500" b="1">
+                <a:solidFill>
+                  <a:srgbClr val="38BDF8"/>
+                </a:solidFill>
+              </a:defRPr>
+            </a:pPr>
+            <a:r>
+              <a:t>📐 Field Surveyor &amp; Executing Agencies (NHAI/RVNL)</a:t>
+            </a:r>
+          </a:p>
+          <a:p>
+            <a:pPr>
+              <a:spcAft>
+                <a:spcPts val="500"/>
+              </a:spcAft>
+              <a:defRPr sz="1100">
+                <a:solidFill>
+                  <a:srgbClr val="F0F6FC"/>
+                </a:solidFill>
+              </a:defRPr>
+            </a:pPr>
+            <a:r>
+              <a:t>• On-ground Joint Measurement Survey (JMS) with DGPS geo-tagging nationwide.</a:t>
+            </a:r>
+          </a:p>
+          <a:p>
+            <a:pPr>
+              <a:spcAft>
+                <a:spcPts val="500"/>
+              </a:spcAft>
+              <a:defRPr sz="1100">
+                <a:solidFill>
+                  <a:srgbClr val="F0F6FC"/>
+                </a:solidFill>
+              </a:defRPr>
+            </a:pPr>
+            <a:r>
+              <a:t>• Mobile plot boundary demarcation with instant acre/cent/hectare calculations.</a:t>
+            </a:r>
+          </a:p>
+          <a:p>
+            <a:pPr>
+              <a:spcAft>
+                <a:spcPts val="500"/>
+              </a:spcAft>
+              <a:defRPr sz="1100">
+                <a:solidFill>
+                  <a:srgbClr val="F0F6FC"/>
+                </a:solidFill>
+              </a:defRPr>
+            </a:pPr>
+            <a:r>
+              <a:t>• Physical possession certificate issuance and drone orthophoto verification.</a:t>
             </a:r>
           </a:p>
         </p:txBody>
@@ -7444,14 +10824,57 @@
       </p:sp>
       <p:sp>
         <p:nvSpPr>
-          <p:cNvPr id="3" name="TextBox 2"/>
+          <p:cNvPr id="3" name="Rectangle 2"/>
+          <p:cNvSpPr/>
+          <p:nvPr/>
+        </p:nvSpPr>
+        <p:spPr>
+          <a:xfrm>
+            <a:off x="731520" y="320040"/>
+            <a:ext cx="10728655" cy="36576"/>
+          </a:xfrm>
+          <a:prstGeom prst="rect">
+            <a:avLst/>
+          </a:prstGeom>
+          <a:solidFill>
+            <a:srgbClr val="FF7A00"/>
+          </a:solidFill>
+          <a:ln>
+            <a:noFill/>
+          </a:ln>
+        </p:spPr>
+        <p:style>
+          <a:lnRef idx="1">
+            <a:schemeClr val="accent1"/>
+          </a:lnRef>
+          <a:fillRef idx="3">
+            <a:schemeClr val="accent1"/>
+          </a:fillRef>
+          <a:effectRef idx="2">
+            <a:schemeClr val="accent1"/>
+          </a:effectRef>
+          <a:fontRef idx="minor">
+            <a:schemeClr val="lt1"/>
+          </a:fontRef>
+        </p:style>
+        <p:txBody>
+          <a:bodyPr rtlCol="0" anchor="ctr"/>
+          <a:lstStyle/>
+          <a:p>
+            <a:pPr algn="ctr"/>
+          </a:p>
+        </p:txBody>
+      </p:sp>
+      <p:sp>
+        <p:nvSpPr>
+          <p:cNvPr id="4" name="TextBox 3"/>
           <p:cNvSpPr txBox="1"/>
           <p:nvPr/>
         </p:nvSpPr>
         <p:spPr>
           <a:xfrm>
-            <a:off x="731520" y="365760"/>
-            <a:ext cx="10698480" cy="365760"/>
+            <a:off x="731520" y="411480"/>
+            <a:ext cx="9144000" cy="320040"/>
           </a:xfrm>
           <a:prstGeom prst="rect">
             <a:avLst/>
@@ -7465,28 +10888,28 @@
           <a:lstStyle/>
           <a:p>
             <a:pPr>
-              <a:defRPr sz="1100" b="1">
+              <a:defRPr sz="1000" b="1">
                 <a:solidFill>
                   <a:srgbClr val="FF7A00"/>
                 </a:solidFill>
               </a:defRPr>
             </a:pPr>
             <a:r>
-              <a:t>PROBLEM STATEMENT #26016 | MORD &amp; DOLR</a:t>
-            </a:r>
-          </a:p>
-        </p:txBody>
-      </p:sp>
-      <p:sp>
-        <p:nvSpPr>
-          <p:cNvPr id="4" name="TextBox 3"/>
+              <a:t>TECHNICAL PROJECT REVIEW | GOV-TECH &amp; SPATIAL INFORMATICS</a:t>
+            </a:r>
+          </a:p>
+        </p:txBody>
+      </p:sp>
+      <p:sp>
+        <p:nvSpPr>
+          <p:cNvPr id="5" name="TextBox 4"/>
           <p:cNvSpPr txBox="1"/>
           <p:nvPr/>
         </p:nvSpPr>
         <p:spPr>
           <a:xfrm>
-            <a:off x="731520" y="640080"/>
-            <a:ext cx="10698480" cy="731520"/>
+            <a:off x="731520" y="685800"/>
+            <a:ext cx="9601200" cy="685800"/>
           </a:xfrm>
           <a:prstGeom prst="rect">
             <a:avLst/>
@@ -7500,21 +10923,56 @@
           <a:lstStyle/>
           <a:p>
             <a:pPr>
-              <a:defRPr sz="2400" b="1">
-                <a:solidFill>
-                  <a:srgbClr val="F0F6FC"/>
-                </a:solidFill>
-              </a:defRPr>
-            </a:pPr>
-            <a:r>
-              <a:t>Fair Compensation &amp; Direct Benefit Transfer (PFMS / DBT)</a:t>
-            </a:r>
-          </a:p>
-        </p:txBody>
-      </p:sp>
-      <p:sp>
-        <p:nvSpPr>
-          <p:cNvPr id="5" name="Rounded Rectangle 4"/>
+              <a:defRPr sz="2200" b="1">
+                <a:solidFill>
+                  <a:srgbClr val="F0F6FC"/>
+                </a:solidFill>
+              </a:defRPr>
+            </a:pPr>
+            <a:r>
+              <a:t>High-Precision Cadastral GIS Engine &amp; Multi-Zone Corridors</a:t>
+            </a:r>
+          </a:p>
+        </p:txBody>
+      </p:sp>
+      <p:sp>
+        <p:nvSpPr>
+          <p:cNvPr id="6" name="TextBox 5"/>
+          <p:cNvSpPr txBox="1"/>
+          <p:nvPr/>
+        </p:nvSpPr>
+        <p:spPr>
+          <a:xfrm>
+            <a:off x="10515600" y="411480"/>
+            <a:ext cx="914400" cy="365760"/>
+          </a:xfrm>
+          <a:prstGeom prst="rect">
+            <a:avLst/>
+          </a:prstGeom>
+          <a:noFill/>
+        </p:spPr>
+        <p:txBody>
+          <a:bodyPr wrap="none">
+            <a:spAutoFit/>
+          </a:bodyPr>
+          <a:lstStyle/>
+          <a:p>
+            <a:pPr algn="r">
+              <a:defRPr sz="1100" b="1">
+                <a:solidFill>
+                  <a:srgbClr val="8B949E"/>
+                </a:solidFill>
+              </a:defRPr>
+            </a:pPr>
+            <a:r>
+              <a:t>08 / 15</a:t>
+            </a:r>
+          </a:p>
+        </p:txBody>
+      </p:sp>
+      <p:sp>
+        <p:nvSpPr>
+          <p:cNvPr id="7" name="Rounded Rectangle 6"/>
           <p:cNvSpPr/>
           <p:nvPr/>
         </p:nvSpPr>
@@ -7559,7 +11017,7 @@
       </p:sp>
       <p:sp>
         <p:nvSpPr>
-          <p:cNvPr id="6" name="TextBox 5"/>
+          <p:cNvPr id="8" name="TextBox 7"/>
           <p:cNvSpPr txBox="1"/>
           <p:nvPr/>
         </p:nvSpPr>
@@ -7581,98 +11039,98 @@
           <a:p>
             <a:pPr>
               <a:spcAft>
-                <a:spcPts val="1000"/>
-              </a:spcAft>
-              <a:defRPr sz="1600" b="1">
-                <a:solidFill>
-                  <a:srgbClr val="10B981"/>
-                </a:solidFill>
-              </a:defRPr>
-            </a:pPr>
-            <a:r>
-              <a:t>💰 Statutory Compensation Formula</a:t>
-            </a:r>
-          </a:p>
-          <a:p>
-            <a:pPr>
-              <a:spcAft>
-                <a:spcPts val="600"/>
-              </a:spcAft>
-              <a:defRPr sz="1200">
-                <a:solidFill>
-                  <a:srgbClr val="F0F6FC"/>
-                </a:solidFill>
-              </a:defRPr>
-            </a:pPr>
-            <a:r>
-              <a:t>• Base Market Value: Derived from registered sale deeds or state guideline rates (whichever is higher).</a:t>
-            </a:r>
-          </a:p>
-          <a:p>
-            <a:pPr>
-              <a:spcAft>
-                <a:spcPts val="600"/>
-              </a:spcAft>
-              <a:defRPr sz="1200">
-                <a:solidFill>
-                  <a:srgbClr val="F0F6FC"/>
-                </a:solidFill>
-              </a:defRPr>
-            </a:pPr>
-            <a:r>
-              <a:t>• Rural Multiplier: 1.25x to 2.0x factor applied for rural agricultural holdings under Section 26.</a:t>
-            </a:r>
-          </a:p>
-          <a:p>
-            <a:pPr>
-              <a:spcAft>
-                <a:spcPts val="600"/>
-              </a:spcAft>
-              <a:defRPr sz="1200">
-                <a:solidFill>
-                  <a:srgbClr val="F0F6FC"/>
-                </a:solidFill>
-              </a:defRPr>
-            </a:pPr>
-            <a:r>
-              <a:t>• Asset Valuation: Tree &amp; structural damage assessed by PWD/Horticulture departments.</a:t>
-            </a:r>
-          </a:p>
-          <a:p>
-            <a:pPr>
-              <a:spcAft>
-                <a:spcPts val="600"/>
-              </a:spcAft>
-              <a:defRPr sz="1200">
-                <a:solidFill>
-                  <a:srgbClr val="F0F6FC"/>
-                </a:solidFill>
-              </a:defRPr>
-            </a:pPr>
-            <a:r>
-              <a:t>• Mandatory 100% Solatium: Section 30(1) automatically doubles the total compensation amount.</a:t>
-            </a:r>
-          </a:p>
-          <a:p>
-            <a:pPr>
-              <a:spcAft>
-                <a:spcPts val="600"/>
-              </a:spcAft>
-              <a:defRPr sz="1200">
-                <a:solidFill>
-                  <a:srgbClr val="F0F6FC"/>
-                </a:solidFill>
-              </a:defRPr>
-            </a:pPr>
-            <a:r>
-              <a:t>• 12% Additional Interest: Section 30(3) accrues 12% p.a. from Section 11 notice to Award date.</a:t>
-            </a:r>
-          </a:p>
-        </p:txBody>
-      </p:sp>
-      <p:sp>
-        <p:nvSpPr>
-          <p:cNvPr id="7" name="Rounded Rectangle 6"/>
+                <a:spcPts val="800"/>
+              </a:spcAft>
+              <a:defRPr sz="1500" b="1">
+                <a:solidFill>
+                  <a:srgbClr val="FF7A00"/>
+                </a:solidFill>
+              </a:defRPr>
+            </a:pPr>
+            <a:r>
+              <a:t>🇮🇳 Pan-India Multi-Zone Corridor Coverage</a:t>
+            </a:r>
+          </a:p>
+          <a:p>
+            <a:pPr>
+              <a:spcAft>
+                <a:spcPts val="500"/>
+              </a:spcAft>
+              <a:defRPr sz="1100">
+                <a:solidFill>
+                  <a:srgbClr val="F0F6FC"/>
+                </a:solidFill>
+              </a:defRPr>
+            </a:pPr>
+            <a:r>
+              <a:t>• Northern Zone (UP/NCR): Ganga Expressway &amp; Jewar International Airport (Khasra #842/1, UP Bhulekh records).</a:t>
+            </a:r>
+          </a:p>
+          <a:p>
+            <a:pPr>
+              <a:spcAft>
+                <a:spcPts val="500"/>
+              </a:spcAft>
+              <a:defRPr sz="1100">
+                <a:solidFill>
+                  <a:srgbClr val="F0F6FC"/>
+                </a:solidFill>
+              </a:defRPr>
+            </a:pPr>
+            <a:r>
+              <a:t>• Western Zone (MH/GJ): Mumbai-Nagpur Samruddhi Mahamarg (7/12 Gat #142) + Dholera SIR Activation Zone (AnyRoR Block #312).</a:t>
+            </a:r>
+          </a:p>
+          <a:p>
+            <a:pPr>
+              <a:spcAft>
+                <a:spcPts val="500"/>
+              </a:spcAft>
+              <a:defRPr sz="1100">
+                <a:solidFill>
+                  <a:srgbClr val="F0F6FC"/>
+                </a:solidFill>
+              </a:defRPr>
+            </a:pPr>
+            <a:r>
+              <a:t>• Southern Zone (TN/AP/KA): Chennai Peripheral Ring Road (Patta #842) + Amaravati Seed Axis (Webland #204) + Bengaluru STRR (Bhoomi RTC #58).</a:t>
+            </a:r>
+          </a:p>
+          <a:p>
+            <a:pPr>
+              <a:spcAft>
+                <a:spcPts val="500"/>
+              </a:spcAft>
+              <a:defRPr sz="1100">
+                <a:solidFill>
+                  <a:srgbClr val="F0F6FC"/>
+                </a:solidFill>
+              </a:defRPr>
+            </a:pPr>
+            <a:r>
+              <a:t>• Eastern &amp; NE Zone (WB/AS): Eastern Freight Corridor Dankuni (Dag #412) + Guwahati Ring Road Bypass (Dharitree Dag #105).</a:t>
+            </a:r>
+          </a:p>
+          <a:p>
+            <a:pPr>
+              <a:spcAft>
+                <a:spcPts val="500"/>
+              </a:spcAft>
+              <a:defRPr sz="1100">
+                <a:solidFill>
+                  <a:srgbClr val="F0F6FC"/>
+                </a:solidFill>
+              </a:defRPr>
+            </a:pPr>
+            <a:r>
+              <a:t>• State Land Registry Adapters: Built-in schema mapping for 28 state land records.</a:t>
+            </a:r>
+          </a:p>
+        </p:txBody>
+      </p:sp>
+      <p:sp>
+        <p:nvSpPr>
+          <p:cNvPr id="9" name="Rounded Rectangle 8"/>
           <p:cNvSpPr/>
           <p:nvPr/>
         </p:nvSpPr>
@@ -7717,7 +11175,7 @@
       </p:sp>
       <p:sp>
         <p:nvSpPr>
-          <p:cNvPr id="8" name="TextBox 7"/>
+          <p:cNvPr id="10" name="TextBox 9"/>
           <p:cNvSpPr txBox="1"/>
           <p:nvPr/>
         </p:nvSpPr>
@@ -7739,76 +11197,91 @@
           <a:p>
             <a:pPr>
               <a:spcAft>
-                <a:spcPts val="1000"/>
-              </a:spcAft>
-              <a:defRPr sz="1600" b="1">
-                <a:solidFill>
-                  <a:srgbClr val="FF7A00"/>
-                </a:solidFill>
-              </a:defRPr>
-            </a:pPr>
-            <a:r>
-              <a:t>🏦 Aadhaar-Linked DBT &amp; R&amp;R Ledger</a:t>
-            </a:r>
-          </a:p>
-          <a:p>
-            <a:pPr>
-              <a:spcAft>
-                <a:spcPts val="600"/>
-              </a:spcAft>
-              <a:defRPr sz="1200">
-                <a:solidFill>
-                  <a:srgbClr val="F0F6FC"/>
-                </a:solidFill>
-              </a:defRPr>
-            </a:pPr>
-            <a:r>
-              <a:t>• Zero Cash / Zero Middlemen: Payouts transferred directly into bank accounts via PFMS / CFMS / State IFMIS.</a:t>
-            </a:r>
-          </a:p>
-          <a:p>
-            <a:pPr>
-              <a:spcAft>
-                <a:spcPts val="600"/>
-              </a:spcAft>
-              <a:defRPr sz="1200">
-                <a:solidFill>
-                  <a:srgbClr val="F0F6FC"/>
-                </a:solidFill>
-              </a:defRPr>
-            </a:pPr>
-            <a:r>
-              <a:t>• Individual Landowner &amp; Family Ledger: Records joint patta shares, Aadhaar numbers, and bank UTRs.</a:t>
-            </a:r>
-          </a:p>
-          <a:p>
-            <a:pPr>
-              <a:spcAft>
-                <a:spcPts val="600"/>
-              </a:spcAft>
-              <a:defRPr sz="1200">
-                <a:solidFill>
-                  <a:srgbClr val="F0F6FC"/>
-                </a:solidFill>
-              </a:defRPr>
-            </a:pPr>
-            <a:r>
-              <a:t>• R&amp;R Entitlements: Monitors mandatory rehabilitation package under Second Schedule (one-time resettlement allowance, alternative house site, cattle shed grant).</a:t>
-            </a:r>
-          </a:p>
-          <a:p>
-            <a:pPr>
-              <a:spcAft>
-                <a:spcPts val="600"/>
-              </a:spcAft>
-              <a:defRPr sz="1200">
-                <a:solidFill>
-                  <a:srgbClr val="F0F6FC"/>
-                </a:solidFill>
-              </a:defRPr>
-            </a:pPr>
-            <a:r>
-              <a:t>• Dispute Escrow: Disputed amounts deposited in Court under Section 77 without halting highway construction.</a:t>
+                <a:spcPts val="800"/>
+              </a:spcAft>
+              <a:defRPr sz="1500" b="1">
+                <a:solidFill>
+                  <a:srgbClr val="38BDF8"/>
+                </a:solidFill>
+              </a:defRPr>
+            </a:pPr>
+            <a:r>
+              <a:t>🛰️ Advanced Spatial Intelligence Features</a:t>
+            </a:r>
+          </a:p>
+          <a:p>
+            <a:pPr>
+              <a:spcAft>
+                <a:spcPts val="500"/>
+              </a:spcAft>
+              <a:defRPr sz="1100">
+                <a:solidFill>
+                  <a:srgbClr val="F0F6FC"/>
+                </a:solidFill>
+              </a:defRPr>
+            </a:pPr>
+            <a:r>
+              <a:t>• True Parcel Boundary Polygons: Multi-point GeoJSON geometries reflecting real farm holdings instead of basic pins.</a:t>
+            </a:r>
+          </a:p>
+          <a:p>
+            <a:pPr>
+              <a:spcAft>
+                <a:spcPts val="500"/>
+              </a:spcAft>
+              <a:defRPr sz="1100">
+                <a:solidFill>
+                  <a:srgbClr val="F0F6FC"/>
+                </a:solidFill>
+              </a:defRPr>
+            </a:pPr>
+            <a:r>
+              <a:t>• 60-Meter Statutory Right-of-Way: Real-time expressway alignment overlay highlighting exact acquired slices.</a:t>
+            </a:r>
+          </a:p>
+          <a:p>
+            <a:pPr>
+              <a:spcAft>
+                <a:spcPts val="500"/>
+              </a:spcAft>
+              <a:defRPr sz="1100">
+                <a:solidFill>
+                  <a:srgbClr val="F0F6FC"/>
+                </a:solidFill>
+              </a:defRPr>
+            </a:pPr>
+            <a:r>
+              <a:t>• Mobile Surveyor DGPS Tool: Click-to-demarcate boundaries on satellite imagery with live Cent / Acre / Hectare calculations.</a:t>
+            </a:r>
+          </a:p>
+          <a:p>
+            <a:pPr>
+              <a:spcAft>
+                <a:spcPts val="500"/>
+              </a:spcAft>
+              <a:defRPr sz="1100">
+                <a:solidFill>
+                  <a:srgbClr val="F0F6FC"/>
+                </a:solidFill>
+              </a:defRPr>
+            </a:pPr>
+            <a:r>
+              <a:t>• Dynamic Tenure Inspector: Displays state-specific legal terminology (Patta, Khatauni, RTC, 7/12, Dag, Khatian).</a:t>
+            </a:r>
+          </a:p>
+          <a:p>
+            <a:pPr>
+              <a:spcAft>
+                <a:spcPts val="500"/>
+              </a:spcAft>
+              <a:defRPr sz="1100">
+                <a:solidFill>
+                  <a:srgbClr val="F0F6FC"/>
+                </a:solidFill>
+              </a:defRPr>
+            </a:pPr>
+            <a:r>
+              <a:t>• Tri-Layer Base Switcher: Seamless switching between Street Carto, High-Resolution ESRI Satellite, and Cadastral Overlays.</a:t>
             </a:r>
           </a:p>
         </p:txBody>
@@ -7876,14 +11349,57 @@
       </p:sp>
       <p:sp>
         <p:nvSpPr>
-          <p:cNvPr id="3" name="TextBox 2"/>
+          <p:cNvPr id="3" name="Rectangle 2"/>
+          <p:cNvSpPr/>
+          <p:nvPr/>
+        </p:nvSpPr>
+        <p:spPr>
+          <a:xfrm>
+            <a:off x="731520" y="320040"/>
+            <a:ext cx="10728655" cy="36576"/>
+          </a:xfrm>
+          <a:prstGeom prst="rect">
+            <a:avLst/>
+          </a:prstGeom>
+          <a:solidFill>
+            <a:srgbClr val="FF7A00"/>
+          </a:solidFill>
+          <a:ln>
+            <a:noFill/>
+          </a:ln>
+        </p:spPr>
+        <p:style>
+          <a:lnRef idx="1">
+            <a:schemeClr val="accent1"/>
+          </a:lnRef>
+          <a:fillRef idx="3">
+            <a:schemeClr val="accent1"/>
+          </a:fillRef>
+          <a:effectRef idx="2">
+            <a:schemeClr val="accent1"/>
+          </a:effectRef>
+          <a:fontRef idx="minor">
+            <a:schemeClr val="lt1"/>
+          </a:fontRef>
+        </p:style>
+        <p:txBody>
+          <a:bodyPr rtlCol="0" anchor="ctr"/>
+          <a:lstStyle/>
+          <a:p>
+            <a:pPr algn="ctr"/>
+          </a:p>
+        </p:txBody>
+      </p:sp>
+      <p:sp>
+        <p:nvSpPr>
+          <p:cNvPr id="4" name="TextBox 3"/>
           <p:cNvSpPr txBox="1"/>
           <p:nvPr/>
         </p:nvSpPr>
         <p:spPr>
           <a:xfrm>
-            <a:off x="731520" y="365760"/>
-            <a:ext cx="10698480" cy="365760"/>
+            <a:off x="731520" y="411480"/>
+            <a:ext cx="9144000" cy="320040"/>
           </a:xfrm>
           <a:prstGeom prst="rect">
             <a:avLst/>
@@ -7897,28 +11413,28 @@
           <a:lstStyle/>
           <a:p>
             <a:pPr>
-              <a:defRPr sz="1100" b="1">
+              <a:defRPr sz="1000" b="1">
                 <a:solidFill>
                   <a:srgbClr val="FF7A00"/>
                 </a:solidFill>
               </a:defRPr>
             </a:pPr>
             <a:r>
-              <a:t>PROBLEM STATEMENT #26016 | MORD &amp; DOLR</a:t>
-            </a:r>
-          </a:p>
-        </p:txBody>
-      </p:sp>
-      <p:sp>
-        <p:nvSpPr>
-          <p:cNvPr id="4" name="TextBox 3"/>
+              <a:t>TECHNICAL PROJECT REVIEW | GOV-TECH &amp; SPATIAL INFORMATICS</a:t>
+            </a:r>
+          </a:p>
+        </p:txBody>
+      </p:sp>
+      <p:sp>
+        <p:nvSpPr>
+          <p:cNvPr id="5" name="TextBox 4"/>
           <p:cNvSpPr txBox="1"/>
           <p:nvPr/>
         </p:nvSpPr>
         <p:spPr>
           <a:xfrm>
-            <a:off x="731520" y="640080"/>
-            <a:ext cx="10698480" cy="731520"/>
+            <a:off x="731520" y="685800"/>
+            <a:ext cx="9601200" cy="685800"/>
           </a:xfrm>
           <a:prstGeom prst="rect">
             <a:avLst/>
@@ -7932,28 +11448,63 @@
           <a:lstStyle/>
           <a:p>
             <a:pPr>
-              <a:defRPr sz="2400" b="1">
-                <a:solidFill>
-                  <a:srgbClr val="F0F6FC"/>
-                </a:solidFill>
-              </a:defRPr>
-            </a:pPr>
-            <a:r>
-              <a:t>Executive MIS Analytics, AI Risk Radar &amp; Technology Stack</a:t>
-            </a:r>
-          </a:p>
-        </p:txBody>
-      </p:sp>
-      <p:sp>
-        <p:nvSpPr>
-          <p:cNvPr id="5" name="Rounded Rectangle 4"/>
+              <a:defRPr sz="2200" b="1">
+                <a:solidFill>
+                  <a:srgbClr val="F0F6FC"/>
+                </a:solidFill>
+              </a:defRPr>
+            </a:pPr>
+            <a:r>
+              <a:t>e-Office Green-Noting &amp; Cryptographic e-Sign Engine</a:t>
+            </a:r>
+          </a:p>
+        </p:txBody>
+      </p:sp>
+      <p:sp>
+        <p:nvSpPr>
+          <p:cNvPr id="6" name="TextBox 5"/>
+          <p:cNvSpPr txBox="1"/>
+          <p:nvPr/>
+        </p:nvSpPr>
+        <p:spPr>
+          <a:xfrm>
+            <a:off x="10515600" y="411480"/>
+            <a:ext cx="914400" cy="365760"/>
+          </a:xfrm>
+          <a:prstGeom prst="rect">
+            <a:avLst/>
+          </a:prstGeom>
+          <a:noFill/>
+        </p:spPr>
+        <p:txBody>
+          <a:bodyPr wrap="none">
+            <a:spAutoFit/>
+          </a:bodyPr>
+          <a:lstStyle/>
+          <a:p>
+            <a:pPr algn="r">
+              <a:defRPr sz="1100" b="1">
+                <a:solidFill>
+                  <a:srgbClr val="8B949E"/>
+                </a:solidFill>
+              </a:defRPr>
+            </a:pPr>
+            <a:r>
+              <a:t>09 / 15</a:t>
+            </a:r>
+          </a:p>
+        </p:txBody>
+      </p:sp>
+      <p:sp>
+        <p:nvSpPr>
+          <p:cNvPr id="7" name="Rounded Rectangle 6"/>
           <p:cNvSpPr/>
           <p:nvPr/>
         </p:nvSpPr>
         <p:spPr>
           <a:xfrm>
             <a:off x="731520" y="1645920"/>
-            <a:ext cx="5120640" cy="4572000"/>
+            <a:ext cx="3291840" cy="4572000"/>
           </a:xfrm>
           <a:prstGeom prst="roundRect">
             <a:avLst/>
@@ -7991,14 +11542,14 @@
       </p:sp>
       <p:sp>
         <p:nvSpPr>
-          <p:cNvPr id="6" name="TextBox 5"/>
+          <p:cNvPr id="8" name="TextBox 7"/>
           <p:cNvSpPr txBox="1"/>
           <p:nvPr/>
         </p:nvSpPr>
         <p:spPr>
           <a:xfrm>
             <a:off x="914400" y="1783080"/>
-            <a:ext cx="4754880" cy="4297680"/>
+            <a:ext cx="2926080" cy="4297680"/>
           </a:xfrm>
           <a:prstGeom prst="rect">
             <a:avLst/>
@@ -8013,90 +11564,75 @@
           <a:p>
             <a:pPr>
               <a:spcAft>
-                <a:spcPts val="1000"/>
-              </a:spcAft>
-              <a:defRPr sz="1600" b="1">
-                <a:solidFill>
-                  <a:srgbClr val="F5A623"/>
-                </a:solidFill>
-              </a:defRPr>
-            </a:pPr>
-            <a:r>
-              <a:t>📊 Decision Support &amp; AI Risk Radar</a:t>
-            </a:r>
-          </a:p>
-          <a:p>
-            <a:pPr>
-              <a:spcAft>
-                <a:spcPts val="600"/>
-              </a:spcAft>
-              <a:defRPr sz="1200">
-                <a:solidFill>
-                  <a:srgbClr val="F0F6FC"/>
-                </a:solidFill>
-              </a:defRPr>
-            </a:pPr>
-            <a:r>
-              <a:t>• Predictive Delay Forecaster: Evaluates court litigation density, citizen objection ratios, and historical CALA cycle times.</a:t>
-            </a:r>
-          </a:p>
-          <a:p>
-            <a:pPr>
-              <a:spcAft>
-                <a:spcPts val="600"/>
-              </a:spcAft>
-              <a:defRPr sz="1200">
-                <a:solidFill>
-                  <a:srgbClr val="F0F6FC"/>
-                </a:solidFill>
-              </a:defRPr>
-            </a:pPr>
-            <a:r>
-              <a:t>• State Compliance Heatmap: Compares performance across Tamil Nadu, Andhra Pradesh, Maharashtra, Karnataka, etc.</a:t>
-            </a:r>
-          </a:p>
-          <a:p>
-            <a:pPr>
-              <a:spcAft>
-                <a:spcPts val="600"/>
-              </a:spcAft>
-              <a:defRPr sz="1200">
-                <a:solidFill>
-                  <a:srgbClr val="F0F6FC"/>
-                </a:solidFill>
-              </a:defRPr>
-            </a:pPr>
-            <a:r>
-              <a:t>• Parliamentary Q&amp;A Generator: Generates ready-to-table responses for Starred/Unstarred Lok Sabha and Rajya Sabha questions.</a:t>
-            </a:r>
-          </a:p>
-          <a:p>
-            <a:pPr>
-              <a:spcAft>
-                <a:spcPts val="600"/>
-              </a:spcAft>
-              <a:defRPr sz="1200">
-                <a:solidFill>
-                  <a:srgbClr val="F0F6FC"/>
-                </a:solidFill>
-              </a:defRPr>
-            </a:pPr>
-            <a:r>
-              <a:t>• One-Click Export: Generates signed executive PDF briefs and detailed CSV/Excel data sheets.</a:t>
-            </a:r>
-          </a:p>
-        </p:txBody>
-      </p:sp>
-      <p:sp>
-        <p:nvSpPr>
-          <p:cNvPr id="7" name="Rounded Rectangle 6"/>
+                <a:spcPts val="800"/>
+              </a:spcAft>
+              <a:defRPr sz="1500" b="1">
+                <a:solidFill>
+                  <a:srgbClr val="10B981"/>
+                </a:solidFill>
+              </a:defRPr>
+            </a:pPr>
+            <a:r>
+              <a:t>📜 Authentic e-Office Experience</a:t>
+            </a:r>
+          </a:p>
+          <a:p>
+            <a:pPr>
+              <a:spcAft>
+                <a:spcPts val="500"/>
+              </a:spcAft>
+              <a:defRPr sz="1100">
+                <a:solidFill>
+                  <a:srgbClr val="F0F6FC"/>
+                </a:solidFill>
+              </a:defRPr>
+            </a:pPr>
+            <a:r>
+              <a:t>• Replaces vulnerable physical paper with authentic green-tinted government e-Office Noting Sheets.</a:t>
+            </a:r>
+          </a:p>
+          <a:p>
+            <a:pPr>
+              <a:spcAft>
+                <a:spcPts val="500"/>
+              </a:spcAft>
+              <a:defRPr sz="1100">
+                <a:solidFill>
+                  <a:srgbClr val="F0F6FC"/>
+                </a:solidFill>
+              </a:defRPr>
+            </a:pPr>
+            <a:r>
+              <a:t>• Chronological audit trail recording approving officer identity, official designation, and exact timestamps.</a:t>
+            </a:r>
+          </a:p>
+          <a:p>
+            <a:pPr>
+              <a:spcAft>
+                <a:spcPts val="500"/>
+              </a:spcAft>
+              <a:defRPr sz="1100">
+                <a:solidFill>
+                  <a:srgbClr val="F0F6FC"/>
+                </a:solidFill>
+              </a:defRPr>
+            </a:pPr>
+            <a:r>
+              <a:t>• Statutory compliance checklist (Gram Sabha quorum, SIA approval, Revenue Form verification).</a:t>
+            </a:r>
+          </a:p>
+        </p:txBody>
+      </p:sp>
+      <p:sp>
+        <p:nvSpPr>
+          <p:cNvPr id="9" name="Rounded Rectangle 8"/>
           <p:cNvSpPr/>
           <p:nvPr/>
         </p:nvSpPr>
         <p:spPr>
           <a:xfrm>
-            <a:off x="6217920" y="1645920"/>
-            <a:ext cx="5212080" cy="4572000"/>
+            <a:off x="4389120" y="1645920"/>
+            <a:ext cx="3291840" cy="4572000"/>
           </a:xfrm>
           <a:prstGeom prst="roundRect">
             <a:avLst/>
@@ -8134,14 +11670,14 @@
       </p:sp>
       <p:sp>
         <p:nvSpPr>
-          <p:cNvPr id="8" name="TextBox 7"/>
+          <p:cNvPr id="10" name="TextBox 9"/>
           <p:cNvSpPr txBox="1"/>
           <p:nvPr/>
         </p:nvSpPr>
         <p:spPr>
           <a:xfrm>
-            <a:off x="6400800" y="1783080"/>
-            <a:ext cx="4846320" cy="4297680"/>
+            <a:off x="4572000" y="1783080"/>
+            <a:ext cx="2926080" cy="4297680"/>
           </a:xfrm>
           <a:prstGeom prst="rect">
             <a:avLst/>
@@ -8156,91 +11692,189 @@
           <a:p>
             <a:pPr>
               <a:spcAft>
-                <a:spcPts val="1000"/>
-              </a:spcAft>
-              <a:defRPr sz="1600" b="1">
-                <a:solidFill>
-                  <a:srgbClr val="38BDF8"/>
-                </a:solidFill>
-              </a:defRPr>
-            </a:pPr>
-            <a:r>
-              <a:t>💻 Robust &amp; Scalable Tech Stack</a:t>
-            </a:r>
-          </a:p>
-          <a:p>
-            <a:pPr>
-              <a:spcAft>
-                <a:spcPts val="600"/>
-              </a:spcAft>
-              <a:defRPr sz="1200">
-                <a:solidFill>
-                  <a:srgbClr val="F0F6FC"/>
-                </a:solidFill>
-              </a:defRPr>
-            </a:pPr>
-            <a:r>
-              <a:t>• Frontend: Semantic HTML5, Vanilla CSS3 (Custom Design System), ES6+ JavaScript Modules.</a:t>
-            </a:r>
-          </a:p>
-          <a:p>
-            <a:pPr>
-              <a:spcAft>
-                <a:spcPts val="600"/>
-              </a:spcAft>
-              <a:defRPr sz="1200">
-                <a:solidFill>
-                  <a:srgbClr val="F0F6FC"/>
-                </a:solidFill>
-              </a:defRPr>
-            </a:pPr>
-            <a:r>
-              <a:t>• Mapping &amp; GIS: Leaflet.js, OpenStreetMap Carto tiles, ESRI World Imagery, GeoJSON Cadastral Layer.</a:t>
-            </a:r>
-          </a:p>
-          <a:p>
-            <a:pPr>
-              <a:spcAft>
-                <a:spcPts val="600"/>
-              </a:spcAft>
-              <a:defRPr sz="1200">
-                <a:solidFill>
-                  <a:srgbClr val="F0F6FC"/>
-                </a:solidFill>
-              </a:defRPr>
-            </a:pPr>
-            <a:r>
-              <a:t>• Visualization: Chart.js for live milestone funnels, solatium breakdowns, and financial burn rates.</a:t>
-            </a:r>
-          </a:p>
-          <a:p>
-            <a:pPr>
-              <a:spcAft>
-                <a:spcPts val="600"/>
-              </a:spcAft>
-              <a:defRPr sz="1200">
-                <a:solidFill>
-                  <a:srgbClr val="F0F6FC"/>
-                </a:solidFill>
-              </a:defRPr>
-            </a:pPr>
-            <a:r>
-              <a:t>• Zero Heavy Dependencies: Ultra-lightweight, 100% responsive, compatible with NIC Cloud &amp; MeghRaj guidelines.</a:t>
-            </a:r>
-          </a:p>
-          <a:p>
-            <a:pPr>
-              <a:spcAft>
-                <a:spcPts val="600"/>
-              </a:spcAft>
-              <a:defRPr sz="1200">
-                <a:solidFill>
-                  <a:srgbClr val="F0F6FC"/>
-                </a:solidFill>
-              </a:defRPr>
-            </a:pPr>
-            <a:r>
-              <a:t>• Security &amp; Audit: SHA-256 cryptographic seals, role-based access control, tamper-evident action logging.</a:t>
+                <a:spcPts val="800"/>
+              </a:spcAft>
+              <a:defRPr sz="1500" b="1">
+                <a:solidFill>
+                  <a:srgbClr val="FF7A00"/>
+                </a:solidFill>
+              </a:defRPr>
+            </a:pPr>
+            <a:r>
+              <a:t>✍️ Cryptographic DSC / e-Sign</a:t>
+            </a:r>
+          </a:p>
+          <a:p>
+            <a:pPr>
+              <a:spcAft>
+                <a:spcPts val="500"/>
+              </a:spcAft>
+              <a:defRPr sz="1100">
+                <a:solidFill>
+                  <a:srgbClr val="F0F6FC"/>
+                </a:solidFill>
+              </a:defRPr>
+            </a:pPr>
+            <a:r>
+              <a:t>• Officers approve files using Aadhaar OTP or Digital Signature Certificate (DSC) adapter.</a:t>
+            </a:r>
+          </a:p>
+          <a:p>
+            <a:pPr>
+              <a:spcAft>
+                <a:spcPts val="500"/>
+              </a:spcAft>
+              <a:defRPr sz="1100">
+                <a:solidFill>
+                  <a:srgbClr val="F0F6FC"/>
+                </a:solidFill>
+              </a:defRPr>
+            </a:pPr>
+            <a:r>
+              <a:t>• Generates SHA-256 tamper-evident cryptographic hash stamped directly onto the notification.</a:t>
+            </a:r>
+          </a:p>
+          <a:p>
+            <a:pPr>
+              <a:spcAft>
+                <a:spcPts val="500"/>
+              </a:spcAft>
+              <a:defRPr sz="1100">
+                <a:solidFill>
+                  <a:srgbClr val="F0F6FC"/>
+                </a:solidFill>
+              </a:defRPr>
+            </a:pPr>
+            <a:r>
+              <a:t>• Instant automated file forwarding to the next statutory stage (e.g., Sec 11 to Sec 15 hearing).</a:t>
+            </a:r>
+          </a:p>
+        </p:txBody>
+      </p:sp>
+      <p:sp>
+        <p:nvSpPr>
+          <p:cNvPr id="11" name="Rounded Rectangle 10"/>
+          <p:cNvSpPr/>
+          <p:nvPr/>
+        </p:nvSpPr>
+        <p:spPr>
+          <a:xfrm>
+            <a:off x="8046720" y="1645920"/>
+            <a:ext cx="3383280" cy="4572000"/>
+          </a:xfrm>
+          <a:prstGeom prst="roundRect">
+            <a:avLst/>
+          </a:prstGeom>
+          <a:solidFill>
+            <a:srgbClr val="112240"/>
+          </a:solidFill>
+          <a:ln w="19050">
+            <a:solidFill>
+              <a:srgbClr val="233554"/>
+            </a:solidFill>
+          </a:ln>
+        </p:spPr>
+        <p:style>
+          <a:lnRef idx="1">
+            <a:schemeClr val="accent1"/>
+          </a:lnRef>
+          <a:fillRef idx="3">
+            <a:schemeClr val="accent1"/>
+          </a:fillRef>
+          <a:effectRef idx="2">
+            <a:schemeClr val="accent1"/>
+          </a:effectRef>
+          <a:fontRef idx="minor">
+            <a:schemeClr val="lt1"/>
+          </a:fontRef>
+        </p:style>
+        <p:txBody>
+          <a:bodyPr rtlCol="0" anchor="ctr"/>
+          <a:lstStyle/>
+          <a:p>
+            <a:pPr algn="ctr"/>
+          </a:p>
+        </p:txBody>
+      </p:sp>
+      <p:sp>
+        <p:nvSpPr>
+          <p:cNvPr id="12" name="TextBox 11"/>
+          <p:cNvSpPr txBox="1"/>
+          <p:nvPr/>
+        </p:nvSpPr>
+        <p:spPr>
+          <a:xfrm>
+            <a:off x="8229600" y="1783080"/>
+            <a:ext cx="3017520" cy="4297680"/>
+          </a:xfrm>
+          <a:prstGeom prst="rect">
+            <a:avLst/>
+          </a:prstGeom>
+          <a:noFill/>
+        </p:spPr>
+        <p:txBody>
+          <a:bodyPr wrap="square">
+            <a:spAutoFit/>
+          </a:bodyPr>
+          <a:lstStyle/>
+          <a:p>
+            <a:pPr>
+              <a:spcAft>
+                <a:spcPts val="800"/>
+              </a:spcAft>
+              <a:defRPr sz="1500" b="1">
+                <a:solidFill>
+                  <a:srgbClr val="F5A623"/>
+                </a:solidFill>
+              </a:defRPr>
+            </a:pPr>
+            <a:r>
+              <a:t>⚖️ Section 15 Hearing Docket</a:t>
+            </a:r>
+          </a:p>
+          <a:p>
+            <a:pPr>
+              <a:spcAft>
+                <a:spcPts val="500"/>
+              </a:spcAft>
+              <a:defRPr sz="1100">
+                <a:solidFill>
+                  <a:srgbClr val="F0F6FC"/>
+                </a:solidFill>
+              </a:defRPr>
+            </a:pPr>
+            <a:r>
+              <a:t>• Dedicated quasi-judicial docket for recording and hearing citizen objections.</a:t>
+            </a:r>
+          </a:p>
+          <a:p>
+            <a:pPr>
+              <a:spcAft>
+                <a:spcPts val="500"/>
+              </a:spcAft>
+              <a:defRPr sz="1100">
+                <a:solidFill>
+                  <a:srgbClr val="F0F6FC"/>
+                </a:solidFill>
+              </a:defRPr>
+            </a:pPr>
+            <a:r>
+              <a:t>• Categorizes objection types (Boundary overlap, compensation quantum, tenancy claims).</a:t>
+            </a:r>
+          </a:p>
+          <a:p>
+            <a:pPr>
+              <a:spcAft>
+                <a:spcPts val="500"/>
+              </a:spcAft>
+              <a:defRPr sz="1100">
+                <a:solidFill>
+                  <a:srgbClr val="F0F6FC"/>
+                </a:solidFill>
+              </a:defRPr>
+            </a:pPr>
+            <a:r>
+              <a:t>• Produces legally binding CALA Speaking Orders designed to withstand High Court judicial scrutiny.</a:t>
             </a:r>
           </a:p>
         </p:txBody>
